--- a/thesis/figures/design-docs/export_sheet.pptx
+++ b/thesis/figures/design-docs/export_sheet.pptx
@@ -138,7 +138,7 @@
       </p:grpSpPr>
       <p:sp>
         <p:nvSpPr>
-          <p:cNvPr id="1951947409" name="Header Placeholder 1"/>
+          <p:cNvPr id="1460288558" name="Header Placeholder 1"/>
           <p:cNvSpPr>
             <a:spLocks noGrp="1"/>
           </p:cNvSpPr>
@@ -172,7 +172,7 @@
       </p:sp>
       <p:sp>
         <p:nvSpPr>
-          <p:cNvPr id="1369624429" name="Date Placeholder 2"/>
+          <p:cNvPr id="1833964481" name="Date Placeholder 2"/>
           <p:cNvSpPr>
             <a:spLocks noGrp="1"/>
           </p:cNvSpPr>
@@ -210,7 +210,7 @@
       </p:sp>
       <p:sp>
         <p:nvSpPr>
-          <p:cNvPr id="1910412494" name="Slide Image Placeholder 3"/>
+          <p:cNvPr id="862222000" name="Slide Image Placeholder 3"/>
           <p:cNvSpPr>
             <a:spLocks noChangeAspect="1" noGrp="1" noRot="1"/>
           </p:cNvSpPr>
@@ -246,7 +246,7 @@
       </p:sp>
       <p:sp>
         <p:nvSpPr>
-          <p:cNvPr id="1469392933" name="Notes Placeholder 4"/>
+          <p:cNvPr id="33942759" name="Notes Placeholder 4"/>
           <p:cNvSpPr>
             <a:spLocks noGrp="1"/>
           </p:cNvSpPr>
@@ -320,7 +320,7 @@
       </p:sp>
       <p:sp>
         <p:nvSpPr>
-          <p:cNvPr id="918925632" name="Footer Placeholder 5"/>
+          <p:cNvPr id="328067402" name="Footer Placeholder 5"/>
           <p:cNvSpPr>
             <a:spLocks noGrp="1"/>
           </p:cNvSpPr>
@@ -354,7 +354,7 @@
       </p:sp>
       <p:sp>
         <p:nvSpPr>
-          <p:cNvPr id="974746232" name="Slide Number Placeholder 6"/>
+          <p:cNvPr id="917349158" name="Slide Number Placeholder 6"/>
           <p:cNvSpPr>
             <a:spLocks noGrp="1"/>
           </p:cNvSpPr>
@@ -507,7 +507,7 @@
       </p:grpSpPr>
       <p:sp>
         <p:nvSpPr>
-          <p:cNvPr id="2" name="Slide Image Placeholder 1"/>
+          <p:cNvPr id="808047820" name="Slide Image Placeholder 1"/>
           <p:cNvSpPr>
             <a:spLocks noChangeAspect="1" noGrp="1" noRot="1"/>
           </p:cNvSpPr>
@@ -519,7 +519,7 @@
       </p:sp>
       <p:sp>
         <p:nvSpPr>
-          <p:cNvPr id="3" name="Notes Placeholder 2"/>
+          <p:cNvPr id="835546407" name="Notes Placeholder 2"/>
           <p:cNvSpPr>
             <a:spLocks noGrp="1"/>
           </p:cNvSpPr>
@@ -541,7 +541,7 @@
       </p:sp>
       <p:sp>
         <p:nvSpPr>
-          <p:cNvPr id="4" name="Slide Number Placeholder 3"/>
+          <p:cNvPr id="2142570302" name="Slide Number Placeholder 3"/>
           <p:cNvSpPr>
             <a:spLocks noGrp="1"/>
           </p:cNvSpPr>
@@ -592,7 +592,7 @@
       </p:grpSpPr>
       <p:sp>
         <p:nvSpPr>
-          <p:cNvPr id="587509128" name="Slide Image Placeholder 1"/>
+          <p:cNvPr id="1293753707" name="Slide Image Placeholder 1"/>
           <p:cNvSpPr>
             <a:spLocks noChangeAspect="1" noGrp="1" noRot="1"/>
           </p:cNvSpPr>
@@ -609,7 +609,7 @@
       </p:sp>
       <p:sp>
         <p:nvSpPr>
-          <p:cNvPr id="431839557" name="Notes Placeholder 2"/>
+          <p:cNvPr id="1690270783" name="Notes Placeholder 2"/>
           <p:cNvSpPr>
             <a:spLocks noGrp="1"/>
           </p:cNvSpPr>
@@ -634,7 +634,7 @@
       </p:sp>
       <p:sp>
         <p:nvSpPr>
-          <p:cNvPr id="688435998" name="Slide Number Placeholder 3"/>
+          <p:cNvPr id="539460173" name="Slide Number Placeholder 3"/>
           <p:cNvSpPr>
             <a:spLocks noGrp="1"/>
           </p:cNvSpPr>
@@ -685,7 +685,7 @@
       </p:grpSpPr>
       <p:sp>
         <p:nvSpPr>
-          <p:cNvPr id="1905159797" name="Slide Image Placeholder 1"/>
+          <p:cNvPr id="309381499" name="Slide Image Placeholder 1"/>
           <p:cNvSpPr>
             <a:spLocks noChangeAspect="1" noGrp="1" noRot="1"/>
           </p:cNvSpPr>
@@ -697,7 +697,7 @@
       </p:sp>
       <p:sp>
         <p:nvSpPr>
-          <p:cNvPr id="175533838" name="Notes Placeholder 2"/>
+          <p:cNvPr id="1472593956" name="Notes Placeholder 2"/>
           <p:cNvSpPr>
             <a:spLocks noGrp="1"/>
           </p:cNvSpPr>
@@ -719,7 +719,7 @@
       </p:sp>
       <p:sp>
         <p:nvSpPr>
-          <p:cNvPr id="66181996" name="Slide Number Placeholder 3"/>
+          <p:cNvPr id="537825377" name="Slide Number Placeholder 3"/>
           <p:cNvSpPr>
             <a:spLocks noGrp="1"/>
           </p:cNvSpPr>
@@ -770,7 +770,7 @@
       </p:grpSpPr>
       <p:sp>
         <p:nvSpPr>
-          <p:cNvPr id="1557246574" name="Slide Image Placeholder 1"/>
+          <p:cNvPr id="1048783155" name="Slide Image Placeholder 1"/>
           <p:cNvSpPr>
             <a:spLocks noChangeAspect="1" noGrp="1" noRot="1"/>
           </p:cNvSpPr>
@@ -782,7 +782,7 @@
       </p:sp>
       <p:sp>
         <p:nvSpPr>
-          <p:cNvPr id="1300299442" name="Notes Placeholder 2"/>
+          <p:cNvPr id="658309844" name="Notes Placeholder 2"/>
           <p:cNvSpPr>
             <a:spLocks noGrp="1"/>
           </p:cNvSpPr>
@@ -804,7 +804,7 @@
       </p:sp>
       <p:sp>
         <p:nvSpPr>
-          <p:cNvPr id="1731836930" name="Slide Number Placeholder 3"/>
+          <p:cNvPr id="1968762710" name="Slide Number Placeholder 3"/>
           <p:cNvSpPr>
             <a:spLocks noGrp="1"/>
           </p:cNvSpPr>
@@ -855,7 +855,7 @@
       </p:grpSpPr>
       <p:sp>
         <p:nvSpPr>
-          <p:cNvPr id="837668325" name="Slide Image Placeholder 1"/>
+          <p:cNvPr id="1827688495" name="Slide Image Placeholder 1"/>
           <p:cNvSpPr>
             <a:spLocks noChangeAspect="1" noGrp="1" noRot="1"/>
           </p:cNvSpPr>
@@ -867,7 +867,7 @@
       </p:sp>
       <p:sp>
         <p:nvSpPr>
-          <p:cNvPr id="729267807" name="Notes Placeholder 2"/>
+          <p:cNvPr id="2041817187" name="Notes Placeholder 2"/>
           <p:cNvSpPr>
             <a:spLocks noGrp="1"/>
           </p:cNvSpPr>
@@ -889,7 +889,7 @@
       </p:sp>
       <p:sp>
         <p:nvSpPr>
-          <p:cNvPr id="1217839228" name="Slide Number Placeholder 3"/>
+          <p:cNvPr id="2044442760" name="Slide Number Placeholder 3"/>
           <p:cNvSpPr>
             <a:spLocks noGrp="1"/>
           </p:cNvSpPr>
@@ -940,7 +940,7 @@
       </p:grpSpPr>
       <p:sp>
         <p:nvSpPr>
-          <p:cNvPr id="1112470055" name="Title 1"/>
+          <p:cNvPr id="1739167456" name="Title 1"/>
           <p:cNvSpPr>
             <a:spLocks noGrp="1"/>
           </p:cNvSpPr>
@@ -975,7 +975,7 @@
       </p:sp>
       <p:sp>
         <p:nvSpPr>
-          <p:cNvPr id="1239834897" name="Subtitle 2"/>
+          <p:cNvPr id="1643322294" name="Subtitle 2"/>
           <p:cNvSpPr>
             <a:spLocks noGrp="1"/>
           </p:cNvSpPr>
@@ -1043,7 +1043,7 @@
       </p:sp>
       <p:sp>
         <p:nvSpPr>
-          <p:cNvPr id="871346813" name="Date Placeholder 3"/>
+          <p:cNvPr id="1522584838" name="Date Placeholder 3"/>
           <p:cNvSpPr>
             <a:spLocks noGrp="1"/>
           </p:cNvSpPr>
@@ -1069,7 +1069,7 @@
       </p:sp>
       <p:sp>
         <p:nvSpPr>
-          <p:cNvPr id="2120650318" name="Footer Placeholder 4"/>
+          <p:cNvPr id="1750794605" name="Footer Placeholder 4"/>
           <p:cNvSpPr>
             <a:spLocks noGrp="1"/>
           </p:cNvSpPr>
@@ -1091,7 +1091,7 @@
       </p:sp>
       <p:sp>
         <p:nvSpPr>
-          <p:cNvPr id="1841140204" name="Slide Number Placeholder 5"/>
+          <p:cNvPr id="752211186" name="Slide Number Placeholder 5"/>
           <p:cNvSpPr>
             <a:spLocks noGrp="1"/>
           </p:cNvSpPr>
@@ -1142,7 +1142,7 @@
       </p:grpSpPr>
       <p:sp>
         <p:nvSpPr>
-          <p:cNvPr id="2002885787" name="Title 1"/>
+          <p:cNvPr id="272573661" name="Title 1"/>
           <p:cNvSpPr>
             <a:spLocks noGrp="1"/>
           </p:cNvSpPr>
@@ -1168,7 +1168,7 @@
       </p:sp>
       <p:sp>
         <p:nvSpPr>
-          <p:cNvPr id="927747831" name="Vertical Text Placeholder 2"/>
+          <p:cNvPr id="144400951" name="Vertical Text Placeholder 2"/>
           <p:cNvSpPr>
             <a:spLocks noGrp="1"/>
           </p:cNvSpPr>
@@ -1234,7 +1234,7 @@
       </p:sp>
       <p:sp>
         <p:nvSpPr>
-          <p:cNvPr id="883598419" name="Date Placeholder 3"/>
+          <p:cNvPr id="1069157248" name="Date Placeholder 3"/>
           <p:cNvSpPr>
             <a:spLocks noGrp="1"/>
           </p:cNvSpPr>
@@ -1260,7 +1260,7 @@
       </p:sp>
       <p:sp>
         <p:nvSpPr>
-          <p:cNvPr id="1370547690" name="Footer Placeholder 4"/>
+          <p:cNvPr id="255031687" name="Footer Placeholder 4"/>
           <p:cNvSpPr>
             <a:spLocks noGrp="1"/>
           </p:cNvSpPr>
@@ -1282,7 +1282,7 @@
       </p:sp>
       <p:sp>
         <p:nvSpPr>
-          <p:cNvPr id="1220950395" name="Slide Number Placeholder 5"/>
+          <p:cNvPr id="1689018420" name="Slide Number Placeholder 5"/>
           <p:cNvSpPr>
             <a:spLocks noGrp="1"/>
           </p:cNvSpPr>
@@ -1333,7 +1333,7 @@
       </p:grpSpPr>
       <p:sp>
         <p:nvSpPr>
-          <p:cNvPr id="944072054" name="Vertical Title 1"/>
+          <p:cNvPr id="114901577" name="Vertical Title 1"/>
           <p:cNvSpPr>
             <a:spLocks noGrp="1"/>
           </p:cNvSpPr>
@@ -1364,7 +1364,7 @@
       </p:sp>
       <p:sp>
         <p:nvSpPr>
-          <p:cNvPr id="1461447815" name="Vertical Text Placeholder 2"/>
+          <p:cNvPr id="1719658466" name="Vertical Text Placeholder 2"/>
           <p:cNvSpPr>
             <a:spLocks noGrp="1"/>
           </p:cNvSpPr>
@@ -1435,7 +1435,7 @@
       </p:sp>
       <p:sp>
         <p:nvSpPr>
-          <p:cNvPr id="517357685" name="Date Placeholder 3"/>
+          <p:cNvPr id="1951194293" name="Date Placeholder 3"/>
           <p:cNvSpPr>
             <a:spLocks noGrp="1"/>
           </p:cNvSpPr>
@@ -1461,7 +1461,7 @@
       </p:sp>
       <p:sp>
         <p:nvSpPr>
-          <p:cNvPr id="1421040325" name="Footer Placeholder 4"/>
+          <p:cNvPr id="408789065" name="Footer Placeholder 4"/>
           <p:cNvSpPr>
             <a:spLocks noGrp="1"/>
           </p:cNvSpPr>
@@ -1483,7 +1483,7 @@
       </p:sp>
       <p:sp>
         <p:nvSpPr>
-          <p:cNvPr id="111009682" name="Slide Number Placeholder 5"/>
+          <p:cNvPr id="260090722" name="Slide Number Placeholder 5"/>
           <p:cNvSpPr>
             <a:spLocks noGrp="1"/>
           </p:cNvSpPr>
@@ -1534,7 +1534,7 @@
       </p:grpSpPr>
       <p:sp>
         <p:nvSpPr>
-          <p:cNvPr id="1043410640" name="Title 1"/>
+          <p:cNvPr id="441262776" name="Title 1"/>
           <p:cNvSpPr>
             <a:spLocks noGrp="1"/>
           </p:cNvSpPr>
@@ -1560,7 +1560,7 @@
       </p:sp>
       <p:sp>
         <p:nvSpPr>
-          <p:cNvPr id="1514054834" name="Content Placeholder 2"/>
+          <p:cNvPr id="1229900708" name="Content Placeholder 2"/>
           <p:cNvSpPr>
             <a:spLocks noGrp="1"/>
           </p:cNvSpPr>
@@ -1626,7 +1626,7 @@
       </p:sp>
       <p:sp>
         <p:nvSpPr>
-          <p:cNvPr id="1295913136" name="Date Placeholder 3"/>
+          <p:cNvPr id="383110435" name="Date Placeholder 3"/>
           <p:cNvSpPr>
             <a:spLocks noGrp="1"/>
           </p:cNvSpPr>
@@ -1652,7 +1652,7 @@
       </p:sp>
       <p:sp>
         <p:nvSpPr>
-          <p:cNvPr id="947921061" name="Footer Placeholder 4"/>
+          <p:cNvPr id="1061493719" name="Footer Placeholder 4"/>
           <p:cNvSpPr>
             <a:spLocks noGrp="1"/>
           </p:cNvSpPr>
@@ -1674,7 +1674,7 @@
       </p:sp>
       <p:sp>
         <p:nvSpPr>
-          <p:cNvPr id="807627428" name="Slide Number Placeholder 5"/>
+          <p:cNvPr id="153002681" name="Slide Number Placeholder 5"/>
           <p:cNvSpPr>
             <a:spLocks noGrp="1"/>
           </p:cNvSpPr>
@@ -1725,7 +1725,7 @@
       </p:grpSpPr>
       <p:sp>
         <p:nvSpPr>
-          <p:cNvPr id="631702215" name="Title 1"/>
+          <p:cNvPr id="1146231232" name="Title 1"/>
           <p:cNvSpPr>
             <a:spLocks noGrp="1"/>
           </p:cNvSpPr>
@@ -1760,7 +1760,7 @@
       </p:sp>
       <p:sp>
         <p:nvSpPr>
-          <p:cNvPr id="984073310" name="Text Placeholder 2"/>
+          <p:cNvPr id="1598912497" name="Text Placeholder 2"/>
           <p:cNvSpPr>
             <a:spLocks noGrp="1"/>
           </p:cNvSpPr>
@@ -1882,7 +1882,7 @@
       </p:sp>
       <p:sp>
         <p:nvSpPr>
-          <p:cNvPr id="1983709233" name="Date Placeholder 3"/>
+          <p:cNvPr id="1887521609" name="Date Placeholder 3"/>
           <p:cNvSpPr>
             <a:spLocks noGrp="1"/>
           </p:cNvSpPr>
@@ -1908,7 +1908,7 @@
       </p:sp>
       <p:sp>
         <p:nvSpPr>
-          <p:cNvPr id="808777957" name="Footer Placeholder 4"/>
+          <p:cNvPr id="2055068312" name="Footer Placeholder 4"/>
           <p:cNvSpPr>
             <a:spLocks noGrp="1"/>
           </p:cNvSpPr>
@@ -1930,7 +1930,7 @@
       </p:sp>
       <p:sp>
         <p:nvSpPr>
-          <p:cNvPr id="333923553" name="Slide Number Placeholder 5"/>
+          <p:cNvPr id="852582856" name="Slide Number Placeholder 5"/>
           <p:cNvSpPr>
             <a:spLocks noGrp="1"/>
           </p:cNvSpPr>
@@ -1981,7 +1981,7 @@
       </p:grpSpPr>
       <p:sp>
         <p:nvSpPr>
-          <p:cNvPr id="76835490" name="Title 1"/>
+          <p:cNvPr id="153477680" name="Title 1"/>
           <p:cNvSpPr>
             <a:spLocks noGrp="1"/>
           </p:cNvSpPr>
@@ -2007,7 +2007,7 @@
       </p:sp>
       <p:sp>
         <p:nvSpPr>
-          <p:cNvPr id="1497811580" name="Content Placeholder 2"/>
+          <p:cNvPr id="851077675" name="Content Placeholder 2"/>
           <p:cNvSpPr>
             <a:spLocks noGrp="1"/>
           </p:cNvSpPr>
@@ -2078,7 +2078,7 @@
       </p:sp>
       <p:sp>
         <p:nvSpPr>
-          <p:cNvPr id="1002020222" name="Content Placeholder 3"/>
+          <p:cNvPr id="36094278" name="Content Placeholder 3"/>
           <p:cNvSpPr>
             <a:spLocks noGrp="1"/>
           </p:cNvSpPr>
@@ -2149,7 +2149,7 @@
       </p:sp>
       <p:sp>
         <p:nvSpPr>
-          <p:cNvPr id="1224793613" name="Date Placeholder 4"/>
+          <p:cNvPr id="1324578168" name="Date Placeholder 4"/>
           <p:cNvSpPr>
             <a:spLocks noGrp="1"/>
           </p:cNvSpPr>
@@ -2175,7 +2175,7 @@
       </p:sp>
       <p:sp>
         <p:nvSpPr>
-          <p:cNvPr id="1070991426" name="Footer Placeholder 5"/>
+          <p:cNvPr id="1620982142" name="Footer Placeholder 5"/>
           <p:cNvSpPr>
             <a:spLocks noGrp="1"/>
           </p:cNvSpPr>
@@ -2197,7 +2197,7 @@
       </p:sp>
       <p:sp>
         <p:nvSpPr>
-          <p:cNvPr id="234840608" name="Slide Number Placeholder 6"/>
+          <p:cNvPr id="1987364072" name="Slide Number Placeholder 6"/>
           <p:cNvSpPr>
             <a:spLocks noGrp="1"/>
           </p:cNvSpPr>
@@ -2248,7 +2248,7 @@
       </p:grpSpPr>
       <p:sp>
         <p:nvSpPr>
-          <p:cNvPr id="1467816531" name="Title 1"/>
+          <p:cNvPr id="1937237088" name="Title 1"/>
           <p:cNvSpPr>
             <a:spLocks noGrp="1"/>
           </p:cNvSpPr>
@@ -2279,7 +2279,7 @@
       </p:sp>
       <p:sp>
         <p:nvSpPr>
-          <p:cNvPr id="1975900562" name="Text Placeholder 2"/>
+          <p:cNvPr id="402990663" name="Text Placeholder 2"/>
           <p:cNvSpPr>
             <a:spLocks noGrp="1"/>
           </p:cNvSpPr>
@@ -2347,7 +2347,7 @@
       </p:sp>
       <p:sp>
         <p:nvSpPr>
-          <p:cNvPr id="602282977" name="Content Placeholder 3"/>
+          <p:cNvPr id="748322627" name="Content Placeholder 3"/>
           <p:cNvSpPr>
             <a:spLocks noGrp="1"/>
           </p:cNvSpPr>
@@ -2418,7 +2418,7 @@
       </p:sp>
       <p:sp>
         <p:nvSpPr>
-          <p:cNvPr id="842638984" name="Text Placeholder 4"/>
+          <p:cNvPr id="399306314" name="Text Placeholder 4"/>
           <p:cNvSpPr>
             <a:spLocks noGrp="1"/>
           </p:cNvSpPr>
@@ -2486,7 +2486,7 @@
       </p:sp>
       <p:sp>
         <p:nvSpPr>
-          <p:cNvPr id="2108527607" name="Content Placeholder 5"/>
+          <p:cNvPr id="1490364871" name="Content Placeholder 5"/>
           <p:cNvSpPr>
             <a:spLocks noGrp="1"/>
           </p:cNvSpPr>
@@ -2557,7 +2557,7 @@
       </p:sp>
       <p:sp>
         <p:nvSpPr>
-          <p:cNvPr id="1733037033" name="Date Placeholder 6"/>
+          <p:cNvPr id="1574340566" name="Date Placeholder 6"/>
           <p:cNvSpPr>
             <a:spLocks noGrp="1"/>
           </p:cNvSpPr>
@@ -2583,7 +2583,7 @@
       </p:sp>
       <p:sp>
         <p:nvSpPr>
-          <p:cNvPr id="324681356" name="Footer Placeholder 7"/>
+          <p:cNvPr id="444371180" name="Footer Placeholder 7"/>
           <p:cNvSpPr>
             <a:spLocks noGrp="1"/>
           </p:cNvSpPr>
@@ -2605,7 +2605,7 @@
       </p:sp>
       <p:sp>
         <p:nvSpPr>
-          <p:cNvPr id="2056663313" name="Slide Number Placeholder 8"/>
+          <p:cNvPr id="1242973383" name="Slide Number Placeholder 8"/>
           <p:cNvSpPr>
             <a:spLocks noGrp="1"/>
           </p:cNvSpPr>
@@ -2656,7 +2656,7 @@
       </p:grpSpPr>
       <p:sp>
         <p:nvSpPr>
-          <p:cNvPr id="521073189" name="Title 1"/>
+          <p:cNvPr id="922056948" name="Title 1"/>
           <p:cNvSpPr>
             <a:spLocks noGrp="1"/>
           </p:cNvSpPr>
@@ -2682,7 +2682,7 @@
       </p:sp>
       <p:sp>
         <p:nvSpPr>
-          <p:cNvPr id="1808771297" name="Date Placeholder 2"/>
+          <p:cNvPr id="1838435880" name="Date Placeholder 2"/>
           <p:cNvSpPr>
             <a:spLocks noGrp="1"/>
           </p:cNvSpPr>
@@ -2708,7 +2708,7 @@
       </p:sp>
       <p:sp>
         <p:nvSpPr>
-          <p:cNvPr id="1423055085" name="Footer Placeholder 3"/>
+          <p:cNvPr id="638086605" name="Footer Placeholder 3"/>
           <p:cNvSpPr>
             <a:spLocks noGrp="1"/>
           </p:cNvSpPr>
@@ -2730,7 +2730,7 @@
       </p:sp>
       <p:sp>
         <p:nvSpPr>
-          <p:cNvPr id="1728489920" name="Slide Number Placeholder 4"/>
+          <p:cNvPr id="749791046" name="Slide Number Placeholder 4"/>
           <p:cNvSpPr>
             <a:spLocks noGrp="1"/>
           </p:cNvSpPr>
@@ -2781,7 +2781,7 @@
       </p:grpSpPr>
       <p:sp>
         <p:nvSpPr>
-          <p:cNvPr id="33693156" name="Date Placeholder 1"/>
+          <p:cNvPr id="461000537" name="Date Placeholder 1"/>
           <p:cNvSpPr>
             <a:spLocks noGrp="1"/>
           </p:cNvSpPr>
@@ -2807,7 +2807,7 @@
       </p:sp>
       <p:sp>
         <p:nvSpPr>
-          <p:cNvPr id="1581973124" name="Footer Placeholder 2"/>
+          <p:cNvPr id="180112019" name="Footer Placeholder 2"/>
           <p:cNvSpPr>
             <a:spLocks noGrp="1"/>
           </p:cNvSpPr>
@@ -2829,7 +2829,7 @@
       </p:sp>
       <p:sp>
         <p:nvSpPr>
-          <p:cNvPr id="613575313" name="Slide Number Placeholder 3"/>
+          <p:cNvPr id="1482571045" name="Slide Number Placeholder 3"/>
           <p:cNvSpPr>
             <a:spLocks noGrp="1"/>
           </p:cNvSpPr>
@@ -2880,7 +2880,7 @@
       </p:grpSpPr>
       <p:sp>
         <p:nvSpPr>
-          <p:cNvPr id="342672317" name="Title 1"/>
+          <p:cNvPr id="2084315212" name="Title 1"/>
           <p:cNvSpPr>
             <a:spLocks noGrp="1"/>
           </p:cNvSpPr>
@@ -2915,7 +2915,7 @@
       </p:sp>
       <p:sp>
         <p:nvSpPr>
-          <p:cNvPr id="877881407" name="Content Placeholder 2"/>
+          <p:cNvPr id="1094279499" name="Content Placeholder 2"/>
           <p:cNvSpPr>
             <a:spLocks noGrp="1"/>
           </p:cNvSpPr>
@@ -3014,7 +3014,7 @@
       </p:sp>
       <p:sp>
         <p:nvSpPr>
-          <p:cNvPr id="987608547" name="Text Placeholder 3"/>
+          <p:cNvPr id="1043627688" name="Text Placeholder 3"/>
           <p:cNvSpPr>
             <a:spLocks noGrp="1"/>
           </p:cNvSpPr>
@@ -3082,7 +3082,7 @@
       </p:sp>
       <p:sp>
         <p:nvSpPr>
-          <p:cNvPr id="42703928" name="Date Placeholder 4"/>
+          <p:cNvPr id="95329832" name="Date Placeholder 4"/>
           <p:cNvSpPr>
             <a:spLocks noGrp="1"/>
           </p:cNvSpPr>
@@ -3108,7 +3108,7 @@
       </p:sp>
       <p:sp>
         <p:nvSpPr>
-          <p:cNvPr id="772541626" name="Footer Placeholder 5"/>
+          <p:cNvPr id="1191003259" name="Footer Placeholder 5"/>
           <p:cNvSpPr>
             <a:spLocks noGrp="1"/>
           </p:cNvSpPr>
@@ -3130,7 +3130,7 @@
       </p:sp>
       <p:sp>
         <p:nvSpPr>
-          <p:cNvPr id="2079842010" name="Slide Number Placeholder 6"/>
+          <p:cNvPr id="480043676" name="Slide Number Placeholder 6"/>
           <p:cNvSpPr>
             <a:spLocks noGrp="1"/>
           </p:cNvSpPr>
@@ -3181,7 +3181,7 @@
       </p:grpSpPr>
       <p:sp>
         <p:nvSpPr>
-          <p:cNvPr id="847243105" name="Title 1"/>
+          <p:cNvPr id="1092666912" name="Title 1"/>
           <p:cNvSpPr>
             <a:spLocks noGrp="1"/>
           </p:cNvSpPr>
@@ -3216,7 +3216,7 @@
       </p:sp>
       <p:sp>
         <p:nvSpPr>
-          <p:cNvPr id="1145613439" name="Picture Placeholder 2"/>
+          <p:cNvPr id="218595223" name="Picture Placeholder 2"/>
           <p:cNvSpPr>
             <a:spLocks noChangeAspect="1" noGrp="1"/>
           </p:cNvSpPr>
@@ -3284,7 +3284,7 @@
       </p:sp>
       <p:sp>
         <p:nvSpPr>
-          <p:cNvPr id="2065547490" name="Text Placeholder 3"/>
+          <p:cNvPr id="1909922823" name="Text Placeholder 3"/>
           <p:cNvSpPr>
             <a:spLocks noGrp="1"/>
           </p:cNvSpPr>
@@ -3352,7 +3352,7 @@
       </p:sp>
       <p:sp>
         <p:nvSpPr>
-          <p:cNvPr id="1212660423" name="Date Placeholder 4"/>
+          <p:cNvPr id="74694548" name="Date Placeholder 4"/>
           <p:cNvSpPr>
             <a:spLocks noGrp="1"/>
           </p:cNvSpPr>
@@ -3378,7 +3378,7 @@
       </p:sp>
       <p:sp>
         <p:nvSpPr>
-          <p:cNvPr id="125263094" name="Footer Placeholder 5"/>
+          <p:cNvPr id="1203535772" name="Footer Placeholder 5"/>
           <p:cNvSpPr>
             <a:spLocks noGrp="1"/>
           </p:cNvSpPr>
@@ -3400,7 +3400,7 @@
       </p:sp>
       <p:sp>
         <p:nvSpPr>
-          <p:cNvPr id="2034963574" name="Slide Number Placeholder 6"/>
+          <p:cNvPr id="248696478" name="Slide Number Placeholder 6"/>
           <p:cNvSpPr>
             <a:spLocks noGrp="1"/>
           </p:cNvSpPr>
@@ -3456,7 +3456,7 @@
       </p:grpSpPr>
       <p:sp>
         <p:nvSpPr>
-          <p:cNvPr id="2081232448" name="Title Placeholder 1"/>
+          <p:cNvPr id="647740611" name="Title Placeholder 1"/>
           <p:cNvSpPr>
             <a:spLocks noGrp="1"/>
           </p:cNvSpPr>
@@ -3492,7 +3492,7 @@
       </p:sp>
       <p:sp>
         <p:nvSpPr>
-          <p:cNvPr id="314205688" name="Text Placeholder 2"/>
+          <p:cNvPr id="437056662" name="Text Placeholder 2"/>
           <p:cNvSpPr>
             <a:spLocks noGrp="1"/>
           </p:cNvSpPr>
@@ -3568,7 +3568,7 @@
       </p:sp>
       <p:sp>
         <p:nvSpPr>
-          <p:cNvPr id="1661751201" name="Date Placeholder 3"/>
+          <p:cNvPr id="1205141180" name="Date Placeholder 3"/>
           <p:cNvSpPr>
             <a:spLocks noGrp="1"/>
           </p:cNvSpPr>
@@ -3612,7 +3612,7 @@
       </p:sp>
       <p:sp>
         <p:nvSpPr>
-          <p:cNvPr id="1809476314" name="Footer Placeholder 4"/>
+          <p:cNvPr id="1574447752" name="Footer Placeholder 4"/>
           <p:cNvSpPr>
             <a:spLocks noGrp="1"/>
           </p:cNvSpPr>
@@ -3652,7 +3652,7 @@
       </p:sp>
       <p:sp>
         <p:nvSpPr>
-          <p:cNvPr id="640434659" name="Slide Number Placeholder 5"/>
+          <p:cNvPr id="1229414723" name="Slide Number Placeholder 5"/>
           <p:cNvSpPr>
             <a:spLocks noGrp="1"/>
           </p:cNvSpPr>
@@ -4012,35 +4012,35 @@
       </p:grpSpPr>
       <p:grpSp>
         <p:nvGrpSpPr>
-          <p:cNvPr id="781490164" name=""/>
+          <p:cNvPr id="1433740912" name=""/>
           <p:cNvGrpSpPr/>
           <p:nvPr/>
         </p:nvGrpSpPr>
         <p:grpSpPr bwMode="auto">
-          <a:xfrm rot="0" flipH="0" flipV="0">
-            <a:off x="13434543" y="4268019"/>
-            <a:ext cx="3212273" cy="2294745"/>
+          <a:xfrm>
+            <a:off x="19538562" y="9099399"/>
+            <a:ext cx="3564434" cy="427079"/>
             <a:chOff x="0" y="0"/>
-            <a:chExt cx="3212273" cy="2294745"/>
+            <a:chExt cx="3564434" cy="427079"/>
           </a:xfrm>
         </p:grpSpPr>
         <p:cxnSp>
           <p:nvCxnSpPr>
-            <p:cNvPr id="209936647" name=""/>
+            <p:cNvPr id="138996307" name=""/>
             <p:cNvCxnSpPr/>
             <p:nvPr/>
           </p:nvCxnSpPr>
           <p:spPr bwMode="auto">
-            <a:xfrm rot="10800000" flipH="0" flipV="0">
-              <a:off x="1252067" y="1179936"/>
-              <a:ext cx="718360" cy="0"/>
+            <a:xfrm rot="0" flipH="1" flipV="0">
+              <a:off x="0" y="216956"/>
+              <a:ext cx="808166" cy="0"/>
             </a:xfrm>
             <a:prstGeom prst="line">
               <a:avLst/>
             </a:prstGeom>
-            <a:ln w="38100" cap="flat" cmpd="sng" algn="ctr">
+            <a:ln w="44450" cap="flat" cmpd="sng" algn="ctr">
               <a:solidFill>
-                <a:schemeClr val="tx1"/>
+                <a:srgbClr val="00FF73"/>
               </a:solidFill>
               <a:prstDash val="solid"/>
               <a:miter lim="800000"/>
@@ -4063,29 +4063,408 @@
             </a:fontRef>
           </p:style>
         </p:cxnSp>
+        <p:sp>
+          <p:nvSpPr>
+            <p:cNvPr id="296466058" name=""/>
+            <p:cNvSpPr txBox="1"/>
+            <p:nvPr/>
+          </p:nvSpPr>
+          <p:spPr bwMode="auto">
+            <a:xfrm rot="0" flipH="0" flipV="0">
+              <a:off x="992832" y="0"/>
+              <a:ext cx="2571602" cy="427079"/>
+            </a:xfrm>
+            <a:prstGeom prst="rect">
+              <a:avLst/>
+            </a:prstGeom>
+            <a:noFill/>
+          </p:spPr>
+          <p:txBody>
+            <a:bodyPr vertOverflow="overflow" horzOverflow="overflow" vert="horz" wrap="square" lIns="91440" tIns="45720" rIns="91440" bIns="45720" numCol="1" spcCol="0" rtlCol="0" fromWordArt="0" anchor="t" anchorCtr="0" forceAA="0" upright="0" compatLnSpc="0">
+              <a:spAutoFit/>
+            </a:bodyPr>
+            <a:p>
+              <a:pPr>
+                <a:defRPr/>
+              </a:pPr>
+              <a:r>
+                <a:rPr lang="fr-FR" sz="2200" b="1">
+                  <a:solidFill>
+                    <a:schemeClr val="tx1"/>
+                  </a:solidFill>
+                  <a:latin typeface="CMU Serif"/>
+                  <a:ea typeface="CMU Serif"/>
+                  <a:cs typeface="CMU Serif"/>
+                </a:rPr>
+                <a:t>= Entanglement</a:t>
+              </a:r>
+              <a:endParaRPr lang="fr-FR" sz="2200" b="1">
+                <a:solidFill>
+                  <a:schemeClr val="tx1"/>
+                </a:solidFill>
+                <a:latin typeface="CMU Serif"/>
+                <a:ea typeface="CMU Serif"/>
+                <a:cs typeface="CMU Serif"/>
+              </a:endParaRPr>
+            </a:p>
+          </p:txBody>
+        </p:sp>
+      </p:grpSp>
+      <p:grpSp>
+        <p:nvGrpSpPr>
+          <p:cNvPr id="383198049" name=""/>
+          <p:cNvGrpSpPr/>
+          <p:nvPr/>
+        </p:nvGrpSpPr>
+        <p:grpSpPr bwMode="auto">
+          <a:xfrm>
+            <a:off x="6878675" y="3832256"/>
+            <a:ext cx="14526602" cy="3461573"/>
+            <a:chOff x="0" y="0"/>
+            <a:chExt cx="14526602" cy="3461573"/>
+          </a:xfrm>
+        </p:grpSpPr>
         <p:grpSp>
           <p:nvGrpSpPr>
-            <p:cNvPr id="72158560" name=""/>
+            <p:cNvPr id="1491003039" name=""/>
             <p:cNvGrpSpPr/>
             <p:nvPr/>
           </p:nvGrpSpPr>
           <p:grpSpPr bwMode="auto">
             <a:xfrm rot="0" flipH="0" flipV="0">
-              <a:off x="827500" y="457377"/>
-              <a:ext cx="628720" cy="1837112"/>
+              <a:off x="6555867" y="435762"/>
+              <a:ext cx="3212269" cy="2294743"/>
               <a:chOff x="0" y="0"/>
-              <a:chExt cx="628720" cy="1837112"/>
+              <a:chExt cx="3212269" cy="2294743"/>
             </a:xfrm>
           </p:grpSpPr>
+          <p:cxnSp>
+            <p:nvCxnSpPr>
+              <p:cNvPr id="209936647" name=""/>
+              <p:cNvCxnSpPr/>
+              <p:nvPr/>
+            </p:nvCxnSpPr>
+            <p:spPr bwMode="auto">
+              <a:xfrm rot="10800000" flipH="0" flipV="0">
+                <a:off x="1252065" y="1179936"/>
+                <a:ext cx="718360" cy="0"/>
+              </a:xfrm>
+              <a:prstGeom prst="line">
+                <a:avLst/>
+              </a:prstGeom>
+              <a:ln w="38100" cap="flat" cmpd="sng" algn="ctr">
+                <a:solidFill>
+                  <a:schemeClr val="tx1"/>
+                </a:solidFill>
+                <a:prstDash val="solid"/>
+                <a:miter lim="800000"/>
+              </a:ln>
+            </p:spPr>
+            <p:style>
+              <a:lnRef idx="1">
+                <a:schemeClr val="accent1">
+                  <a:shade val="50000"/>
+                </a:schemeClr>
+              </a:lnRef>
+              <a:fillRef idx="0">
+                <a:schemeClr val="accent1"/>
+              </a:fillRef>
+              <a:effectRef idx="0">
+                <a:schemeClr val="accent1"/>
+              </a:effectRef>
+              <a:fontRef idx="minor">
+                <a:schemeClr val="tx1"/>
+              </a:fontRef>
+            </p:style>
+          </p:cxnSp>
+          <p:grpSp>
+            <p:nvGrpSpPr>
+              <p:cNvPr id="72158560" name=""/>
+              <p:cNvGrpSpPr/>
+              <p:nvPr/>
+            </p:nvGrpSpPr>
+            <p:grpSpPr bwMode="auto">
+              <a:xfrm rot="0" flipH="0" flipV="0">
+                <a:off x="827498" y="457376"/>
+                <a:ext cx="628719" cy="1837111"/>
+                <a:chOff x="0" y="0"/>
+                <a:chExt cx="628719" cy="1837111"/>
+              </a:xfrm>
+            </p:grpSpPr>
+            <p:sp>
+              <p:nvSpPr>
+                <p:cNvPr id="45257188" name=""/>
+                <p:cNvSpPr/>
+                <p:nvPr/>
+              </p:nvSpPr>
+              <p:spPr bwMode="auto">
+                <a:xfrm rot="0" flipH="0" flipV="0">
+                  <a:off x="243095" y="631695"/>
+                  <a:ext cx="181469" cy="181469"/>
+                </a:xfrm>
+                <a:prstGeom prst="ellipse">
+                  <a:avLst/>
+                </a:prstGeom>
+                <a:solidFill>
+                  <a:schemeClr val="tx1"/>
+                </a:solidFill>
+                <a:ln w="12700" cap="flat" cmpd="sng" algn="ctr">
+                  <a:solidFill>
+                    <a:schemeClr val="tx1"/>
+                  </a:solidFill>
+                  <a:prstDash val="solid"/>
+                  <a:miter lim="800000"/>
+                </a:ln>
+              </p:spPr>
+              <p:style>
+                <a:lnRef idx="2">
+                  <a:schemeClr val="accent1">
+                    <a:shade val="50000"/>
+                  </a:schemeClr>
+                </a:lnRef>
+                <a:fillRef idx="1">
+                  <a:schemeClr val="accent1"/>
+                </a:fillRef>
+                <a:effectRef idx="0">
+                  <a:schemeClr val="accent1"/>
+                </a:effectRef>
+                <a:fontRef idx="minor">
+                  <a:schemeClr val="lt1"/>
+                </a:fontRef>
+              </p:style>
+            </p:sp>
+            <p:cxnSp>
+              <p:nvCxnSpPr>
+                <p:cNvPr id="1485224911" name=""/>
+                <p:cNvCxnSpPr/>
+                <p:nvPr/>
+              </p:nvCxnSpPr>
+              <p:spPr bwMode="auto">
+                <a:xfrm rot="5400000" flipH="0" flipV="1">
+                  <a:off x="12871" y="315847"/>
+                  <a:ext cx="631695" cy="0"/>
+                </a:xfrm>
+                <a:prstGeom prst="line">
+                  <a:avLst/>
+                </a:prstGeom>
+                <a:ln w="38100" cap="flat" cmpd="sng" algn="ctr">
+                  <a:solidFill>
+                    <a:schemeClr val="tx1"/>
+                  </a:solidFill>
+                  <a:prstDash val="solid"/>
+                  <a:miter lim="800000"/>
+                </a:ln>
+              </p:spPr>
+              <p:style>
+                <a:lnRef idx="1">
+                  <a:schemeClr val="accent1">
+                    <a:shade val="50000"/>
+                  </a:schemeClr>
+                </a:lnRef>
+                <a:fillRef idx="0">
+                  <a:schemeClr val="accent1"/>
+                </a:fillRef>
+                <a:effectRef idx="0">
+                  <a:schemeClr val="accent1"/>
+                </a:effectRef>
+                <a:fontRef idx="minor">
+                  <a:schemeClr val="tx1"/>
+                </a:fontRef>
+              </p:style>
+            </p:cxnSp>
+            <p:cxnSp>
+              <p:nvCxnSpPr>
+                <p:cNvPr id="1084472742" name=""/>
+                <p:cNvCxnSpPr/>
+                <p:nvPr/>
+              </p:nvCxnSpPr>
+              <p:spPr bwMode="auto">
+                <a:xfrm rot="16199998" flipH="0" flipV="0">
+                  <a:off x="67687" y="1079309"/>
+                  <a:ext cx="532286" cy="0"/>
+                </a:xfrm>
+                <a:prstGeom prst="line">
+                  <a:avLst/>
+                </a:prstGeom>
+                <a:ln w="38100" cap="flat" cmpd="sng" algn="ctr">
+                  <a:solidFill>
+                    <a:schemeClr val="tx1"/>
+                  </a:solidFill>
+                  <a:prstDash val="solid"/>
+                  <a:miter lim="800000"/>
+                </a:ln>
+              </p:spPr>
+              <p:style>
+                <a:lnRef idx="1">
+                  <a:schemeClr val="accent1">
+                    <a:shade val="50000"/>
+                  </a:schemeClr>
+                </a:lnRef>
+                <a:fillRef idx="0">
+                  <a:schemeClr val="accent1"/>
+                </a:fillRef>
+                <a:effectRef idx="0">
+                  <a:schemeClr val="accent1"/>
+                </a:effectRef>
+                <a:fontRef idx="minor">
+                  <a:schemeClr val="tx1"/>
+                </a:fontRef>
+              </p:style>
+            </p:cxnSp>
+            <p:grpSp>
+              <p:nvGrpSpPr>
+                <p:cNvPr id="965460799" name=""/>
+                <p:cNvGrpSpPr/>
+                <p:nvPr/>
+              </p:nvGrpSpPr>
+              <p:grpSpPr bwMode="auto">
+                <a:xfrm flipH="0" flipV="0">
+                  <a:off x="0" y="1345452"/>
+                  <a:ext cx="628719" cy="491658"/>
+                  <a:chOff x="0" y="0"/>
+                  <a:chExt cx="628719" cy="491658"/>
+                </a:xfrm>
+              </p:grpSpPr>
+              <p:sp>
+                <p:nvSpPr>
+                  <p:cNvPr id="326553863" name=""/>
+                  <p:cNvSpPr txBox="1"/>
+                  <p:nvPr/>
+                </p:nvSpPr>
+                <p:spPr bwMode="auto">
+                  <a:xfrm rot="0" flipH="0" flipV="0">
+                    <a:off x="0" y="3619"/>
+                    <a:ext cx="477778" cy="488039"/>
+                  </a:xfrm>
+                  <a:prstGeom prst="rect">
+                    <a:avLst/>
+                  </a:prstGeom>
+                  <a:noFill/>
+                </p:spPr>
+                <p:txBody>
+                  <a:bodyPr vertOverflow="overflow" horzOverflow="overflow" vert="horz" wrap="square" lIns="91440" tIns="45720" rIns="91440" bIns="45720" numCol="1" spcCol="0" rtlCol="0" fromWordArt="0" anchor="t" anchorCtr="0" forceAA="0" upright="0" compatLnSpc="0">
+                    <a:spAutoFit/>
+                  </a:bodyPr>
+                  <a:p>
+                    <a:pPr algn="ctr">
+                      <a:defRPr/>
+                    </a:pPr>
+                    <mc:AlternateContent xmlns:mc="http://schemas.openxmlformats.org/markup-compatibility/2006" xmlns:m="http://schemas.openxmlformats.org/officeDocument/2006/math">
+                      <mc:Choice xmlns:a14="http://schemas.microsoft.com/office/drawing/2010/main" Requires="a14">
+                        <a14:m>
+                          <m:oMathPara>
+                            <m:oMathParaPr/>
+                            <m:oMath>
+                              <m:sSub>
+                                <m:sSubPr>
+                                  <m:ctrlPr>
+                                    <a:rPr lang="fr-FR" sz="2600" b="1" i="1" u="none" strike="noStrike" cap="none" spc="0">
+                                      <a:solidFill>
+                                        <a:schemeClr val="tx1"/>
+                                      </a:solidFill>
+                                      <a:latin typeface="Cambria Math"/>
+                                      <a:ea typeface="Cambria Math"/>
+                                      <a:cs typeface="Cambria Math"/>
+                                    </a:rPr>
+                                  </m:ctrlPr>
+                                </m:sSubPr>
+                                <m:e>
+                                  <m:r>
+                                    <m:rPr>
+                                      <m:sty m:val="bi"/>
+                                    </m:rPr>
+                                    <a:rPr lang="fr-FR" sz="2600" u="none" strike="noStrike" cap="none" spc="0">
+                                      <a:solidFill>
+                                        <a:schemeClr val="tx1"/>
+                                      </a:solidFill>
+                                      <a:latin typeface="Cambria Math"/>
+                                      <a:ea typeface="Cambria Math"/>
+                                      <a:cs typeface="Cambria Math"/>
+                                    </a:rPr>
+                                    <m:t>M</m:t>
+                                  </m:r>
+                                </m:e>
+                                <m:sub>
+                                  <m:r>
+                                    <m:rPr>
+                                      <m:sty m:val="bi"/>
+                                    </m:rPr>
+                                    <a:rPr lang="fr-FR" sz="2600" u="none" strike="noStrike" cap="none" spc="0">
+                                      <a:solidFill>
+                                        <a:schemeClr val="tx1"/>
+                                      </a:solidFill>
+                                      <a:latin typeface="Cambria Math"/>
+                                      <a:ea typeface="Cambria Math"/>
+                                      <a:cs typeface="Cambria Math"/>
+                                    </a:rPr>
+                                    <m:t>X</m:t>
+                                  </m:r>
+                                </m:sub>
+                              </m:sSub>
+                            </m:oMath>
+                          </m:oMathPara>
+                        </a14:m>
+                      </mc:Choice>
+                      <mc:Fallback/>
+                    </mc:AlternateContent>
+                    <a:endParaRPr sz="2600" b="1">
+                      <a:latin typeface="CMU Serif"/>
+                      <a:cs typeface="CMU Serif"/>
+                    </a:endParaRPr>
+                  </a:p>
+                </p:txBody>
+              </p:sp>
+              <p:sp>
+                <p:nvSpPr>
+                  <p:cNvPr id="907833745" name=""/>
+                  <p:cNvSpPr/>
+                  <p:nvPr/>
+                </p:nvSpPr>
+                <p:spPr bwMode="auto">
+                  <a:xfrm rot="0" flipH="0" flipV="0">
+                    <a:off x="38943" y="0"/>
+                    <a:ext cx="589777" cy="488672"/>
+                  </a:xfrm>
+                  <a:prstGeom prst="rect">
+                    <a:avLst/>
+                  </a:prstGeom>
+                  <a:noFill/>
+                  <a:ln w="28575" cap="flat" cmpd="sng" algn="ctr">
+                    <a:solidFill>
+                      <a:schemeClr val="tx1"/>
+                    </a:solidFill>
+                    <a:prstDash val="solid"/>
+                    <a:miter lim="800000"/>
+                  </a:ln>
+                </p:spPr>
+                <p:style>
+                  <a:lnRef idx="2">
+                    <a:schemeClr val="accent1">
+                      <a:shade val="50000"/>
+                    </a:schemeClr>
+                  </a:lnRef>
+                  <a:fillRef idx="1">
+                    <a:schemeClr val="accent1"/>
+                  </a:fillRef>
+                  <a:effectRef idx="0">
+                    <a:schemeClr val="accent1"/>
+                  </a:effectRef>
+                  <a:fontRef idx="minor">
+                    <a:schemeClr val="lt1"/>
+                  </a:fontRef>
+                </p:style>
+              </p:sp>
+            </p:grpSp>
+          </p:grpSp>
           <p:sp>
             <p:nvSpPr>
-              <p:cNvPr id="45257188" name=""/>
+              <p:cNvPr id="508684163" name=""/>
               <p:cNvSpPr/>
               <p:nvPr/>
             </p:nvSpPr>
             <p:spPr bwMode="auto">
               <a:xfrm rot="0" flipH="0" flipV="0">
-                <a:off x="243096" y="631695"/>
+                <a:off x="1970426" y="1089327"/>
                 <a:ext cx="181469" cy="181469"/>
               </a:xfrm>
               <a:prstGeom prst="ellipse">
@@ -4121,14 +4500,14 @@
           </p:sp>
           <p:cxnSp>
             <p:nvCxnSpPr>
-              <p:cNvPr id="1485224911" name=""/>
+              <p:cNvPr id="1314814407" name=""/>
               <p:cNvCxnSpPr/>
               <p:nvPr/>
             </p:nvCxnSpPr>
             <p:spPr bwMode="auto">
-              <a:xfrm rot="5400000" flipH="0" flipV="1">
-                <a:off x="12872" y="315847"/>
-                <a:ext cx="631695" cy="0"/>
+              <a:xfrm rot="5400000" flipH="0" flipV="0">
+                <a:off x="1745186" y="773352"/>
+                <a:ext cx="631950" cy="0"/>
               </a:xfrm>
               <a:prstGeom prst="line">
                 <a:avLst/>
@@ -4160,14 +4539,14 @@
           </p:cxnSp>
           <p:cxnSp>
             <p:nvCxnSpPr>
-              <p:cNvPr id="1084472742" name=""/>
+              <p:cNvPr id="38772195" name=""/>
               <p:cNvCxnSpPr/>
               <p:nvPr/>
             </p:nvCxnSpPr>
             <p:spPr bwMode="auto">
               <a:xfrm rot="16199998" flipH="0" flipV="0">
-                <a:off x="67688" y="1079309"/>
-                <a:ext cx="532286" cy="0"/>
+                <a:off x="1795018" y="1536940"/>
+                <a:ext cx="532285" cy="0"/>
               </a:xfrm>
               <a:prstGeom prst="line">
                 <a:avLst/>
@@ -4199,28 +4578,28 @@
           </p:cxnSp>
           <p:grpSp>
             <p:nvGrpSpPr>
-              <p:cNvPr id="965460799" name=""/>
+              <p:cNvPr id="1976074680" name=""/>
               <p:cNvGrpSpPr/>
               <p:nvPr/>
             </p:nvGrpSpPr>
             <p:grpSpPr bwMode="auto">
-              <a:xfrm flipH="0" flipV="0">
-                <a:off x="0" y="1345452"/>
-                <a:ext cx="628720" cy="491659"/>
+              <a:xfrm rot="0" flipH="0" flipV="0">
+                <a:off x="1727329" y="1803084"/>
+                <a:ext cx="628719" cy="491658"/>
                 <a:chOff x="0" y="0"/>
-                <a:chExt cx="628720" cy="491659"/>
+                <a:chExt cx="628719" cy="491658"/>
               </a:xfrm>
             </p:grpSpPr>
             <p:sp>
               <p:nvSpPr>
-                <p:cNvPr id="326553863" name=""/>
+                <p:cNvPr id="382696975" name=""/>
                 <p:cNvSpPr txBox="1"/>
                 <p:nvPr/>
               </p:nvSpPr>
               <p:spPr bwMode="auto">
                 <a:xfrm rot="0" flipH="0" flipV="0">
-                  <a:off x="0" y="3620"/>
-                  <a:ext cx="477778" cy="488039"/>
+                  <a:off x="0" y="3619"/>
+                  <a:ext cx="478033" cy="488039"/>
                 </a:xfrm>
                 <a:prstGeom prst="rect">
                   <a:avLst/>
@@ -4302,14 +4681,14 @@
             </p:sp>
             <p:sp>
               <p:nvSpPr>
-                <p:cNvPr id="907833745" name=""/>
+                <p:cNvPr id="2122237855" name=""/>
                 <p:cNvSpPr/>
                 <p:nvPr/>
               </p:nvSpPr>
               <p:spPr bwMode="auto">
                 <a:xfrm rot="0" flipH="0" flipV="0">
                   <a:off x="38943" y="0"/>
-                  <a:ext cx="589777" cy="488672"/>
+                  <a:ext cx="589776" cy="488671"/>
                 </a:xfrm>
                 <a:prstGeom prst="rect">
                   <a:avLst/>
@@ -4341,151 +4720,16 @@
               </p:style>
             </p:sp>
           </p:grpSp>
-        </p:grpSp>
-        <p:sp>
-          <p:nvSpPr>
-            <p:cNvPr id="508684163" name=""/>
-            <p:cNvSpPr/>
-            <p:nvPr/>
-          </p:nvSpPr>
-          <p:spPr bwMode="auto">
-            <a:xfrm rot="0" flipH="0" flipV="0">
-              <a:off x="1970428" y="1089328"/>
-              <a:ext cx="181469" cy="181469"/>
-            </a:xfrm>
-            <a:prstGeom prst="ellipse">
-              <a:avLst/>
-            </a:prstGeom>
-            <a:solidFill>
-              <a:schemeClr val="tx1"/>
-            </a:solidFill>
-            <a:ln w="12700" cap="flat" cmpd="sng" algn="ctr">
-              <a:solidFill>
-                <a:schemeClr val="tx1"/>
-              </a:solidFill>
-              <a:prstDash val="solid"/>
-              <a:miter lim="800000"/>
-            </a:ln>
-          </p:spPr>
-          <p:style>
-            <a:lnRef idx="2">
-              <a:schemeClr val="accent1">
-                <a:shade val="50000"/>
-              </a:schemeClr>
-            </a:lnRef>
-            <a:fillRef idx="1">
-              <a:schemeClr val="accent1"/>
-            </a:fillRef>
-            <a:effectRef idx="0">
-              <a:schemeClr val="accent1"/>
-            </a:effectRef>
-            <a:fontRef idx="minor">
-              <a:schemeClr val="lt1"/>
-            </a:fontRef>
-          </p:style>
-        </p:sp>
-        <p:cxnSp>
-          <p:nvCxnSpPr>
-            <p:cNvPr id="1314814407" name=""/>
-            <p:cNvCxnSpPr/>
-            <p:nvPr/>
-          </p:nvCxnSpPr>
-          <p:spPr bwMode="auto">
-            <a:xfrm rot="5400000" flipH="0" flipV="0">
-              <a:off x="1745188" y="773352"/>
-              <a:ext cx="631950" cy="0"/>
-            </a:xfrm>
-            <a:prstGeom prst="line">
-              <a:avLst/>
-            </a:prstGeom>
-            <a:ln w="38100" cap="flat" cmpd="sng" algn="ctr">
-              <a:solidFill>
-                <a:schemeClr val="tx1"/>
-              </a:solidFill>
-              <a:prstDash val="solid"/>
-              <a:miter lim="800000"/>
-            </a:ln>
-          </p:spPr>
-          <p:style>
-            <a:lnRef idx="1">
-              <a:schemeClr val="accent1">
-                <a:shade val="50000"/>
-              </a:schemeClr>
-            </a:lnRef>
-            <a:fillRef idx="0">
-              <a:schemeClr val="accent1"/>
-            </a:fillRef>
-            <a:effectRef idx="0">
-              <a:schemeClr val="accent1"/>
-            </a:effectRef>
-            <a:fontRef idx="minor">
-              <a:schemeClr val="tx1"/>
-            </a:fontRef>
-          </p:style>
-        </p:cxnSp>
-        <p:cxnSp>
-          <p:nvCxnSpPr>
-            <p:cNvPr id="38772195" name=""/>
-            <p:cNvCxnSpPr/>
-            <p:nvPr/>
-          </p:nvCxnSpPr>
-          <p:spPr bwMode="auto">
-            <a:xfrm rot="16199998" flipH="0" flipV="0">
-              <a:off x="1795020" y="1536941"/>
-              <a:ext cx="532285" cy="0"/>
-            </a:xfrm>
-            <a:prstGeom prst="line">
-              <a:avLst/>
-            </a:prstGeom>
-            <a:ln w="38100" cap="flat" cmpd="sng" algn="ctr">
-              <a:solidFill>
-                <a:schemeClr val="tx1"/>
-              </a:solidFill>
-              <a:prstDash val="solid"/>
-              <a:miter lim="800000"/>
-            </a:ln>
-          </p:spPr>
-          <p:style>
-            <a:lnRef idx="1">
-              <a:schemeClr val="accent1">
-                <a:shade val="50000"/>
-              </a:schemeClr>
-            </a:lnRef>
-            <a:fillRef idx="0">
-              <a:schemeClr val="accent1"/>
-            </a:fillRef>
-            <a:effectRef idx="0">
-              <a:schemeClr val="accent1"/>
-            </a:effectRef>
-            <a:fontRef idx="minor">
-              <a:schemeClr val="tx1"/>
-            </a:fontRef>
-          </p:style>
-        </p:cxnSp>
-        <p:grpSp>
-          <p:nvGrpSpPr>
-            <p:cNvPr id="1976074680" name=""/>
-            <p:cNvGrpSpPr/>
-            <p:nvPr/>
-          </p:nvGrpSpPr>
-          <p:grpSpPr bwMode="auto">
-            <a:xfrm rot="0" flipH="0" flipV="0">
-              <a:off x="1727331" y="1803085"/>
-              <a:ext cx="628720" cy="491659"/>
-              <a:chOff x="0" y="0"/>
-              <a:chExt cx="628720" cy="491659"/>
-            </a:xfrm>
-          </p:grpSpPr>
           <p:sp>
             <p:nvSpPr>
-              <p:cNvPr id="382696975" name=""/>
+              <p:cNvPr id="1930183193" name=""/>
               <p:cNvSpPr txBox="1"/>
               <p:nvPr/>
             </p:nvSpPr>
             <p:spPr bwMode="auto">
               <a:xfrm rot="0" flipH="0" flipV="0">
-                <a:off x="0" y="3620"/>
-                <a:ext cx="478033" cy="488039"/>
+                <a:off x="1292351" y="675000"/>
+                <a:ext cx="480580" cy="488039"/>
               </a:xfrm>
               <a:prstGeom prst="rect">
                 <a:avLst/>
@@ -4506,52 +4750,20 @@
                       <m:oMathPara>
                         <m:oMathParaPr/>
                         <m:oMath>
-                          <m:sSub>
-                            <m:sSubPr>
-                              <m:ctrlPr>
-                                <a:rPr lang="fr-FR" sz="2600" b="1" i="1" u="none" strike="noStrike" cap="none" spc="0">
-                                  <a:solidFill>
-                                    <a:schemeClr val="tx1"/>
-                                  </a:solidFill>
-                                  <a:latin typeface="Cambria Math"/>
-                                  <a:ea typeface="Cambria Math"/>
-                                  <a:cs typeface="Cambria Math"/>
-                                </a:rPr>
-                              </m:ctrlPr>
-                            </m:sSubPr>
-                            <m:e>
-                              <m:r>
-                                <m:rPr>
-                                  <m:sty m:val="bi"/>
-                                </m:rPr>
-                                <a:rPr lang="fr-FR" sz="2600" u="none" strike="noStrike" cap="none" spc="0">
-                                  <a:solidFill>
-                                    <a:schemeClr val="tx1"/>
-                                  </a:solidFill>
-                                  <a:latin typeface="Cambria Math"/>
-                                  <a:ea typeface="Cambria Math"/>
-                                  <a:cs typeface="Cambria Math"/>
-                                </a:rPr>
-                                <m:t>M</m:t>
-                              </m:r>
-                            </m:e>
-                            <m:sub>
-                              <m:r>
-                                <m:rPr>
-                                  <m:sty m:val="bi"/>
-                                </m:rPr>
-                                <a:rPr lang="fr-FR" sz="2600" u="none" strike="noStrike" cap="none" spc="0">
-                                  <a:solidFill>
-                                    <a:schemeClr val="tx1"/>
-                                  </a:solidFill>
-                                  <a:latin typeface="Cambria Math"/>
-                                  <a:ea typeface="Cambria Math"/>
-                                  <a:cs typeface="Cambria Math"/>
-                                </a:rPr>
-                                <m:t>X</m:t>
-                              </m:r>
-                            </m:sub>
-                          </m:sSub>
+                          <m:r>
+                            <m:rPr>
+                              <m:sty m:val="bi"/>
+                            </m:rPr>
+                            <a:rPr lang="fr-FR" sz="2600" u="none" strike="noStrike" cap="none" spc="0">
+                              <a:solidFill>
+                                <a:schemeClr val="tx1"/>
+                              </a:solidFill>
+                              <a:latin typeface="Cambria Math"/>
+                              <a:ea typeface="Cambria Math"/>
+                              <a:cs typeface="Cambria Math"/>
+                            </a:rPr>
+                            <m:t>CZ</m:t>
+                          </m:r>
                         </m:oMath>
                       </m:oMathPara>
                     </a14:m>
@@ -4567,257 +4779,13 @@
           </p:sp>
           <p:sp>
             <p:nvSpPr>
-              <p:cNvPr id="2122237855" name=""/>
+              <p:cNvPr id="1286433182" name=""/>
               <p:cNvSpPr/>
               <p:nvPr/>
             </p:nvSpPr>
             <p:spPr bwMode="auto">
               <a:xfrm rot="0" flipH="0" flipV="0">
-                <a:off x="38944" y="0"/>
-                <a:ext cx="589776" cy="488671"/>
-              </a:xfrm>
-              <a:prstGeom prst="rect">
-                <a:avLst/>
-              </a:prstGeom>
-              <a:noFill/>
-              <a:ln w="28575" cap="flat" cmpd="sng" algn="ctr">
-                <a:solidFill>
-                  <a:schemeClr val="tx1"/>
-                </a:solidFill>
-                <a:prstDash val="solid"/>
-                <a:miter lim="800000"/>
-              </a:ln>
-            </p:spPr>
-            <p:style>
-              <a:lnRef idx="2">
-                <a:schemeClr val="accent1">
-                  <a:shade val="50000"/>
-                </a:schemeClr>
-              </a:lnRef>
-              <a:fillRef idx="1">
-                <a:schemeClr val="accent1"/>
-              </a:fillRef>
-              <a:effectRef idx="0">
-                <a:schemeClr val="accent1"/>
-              </a:effectRef>
-              <a:fontRef idx="minor">
-                <a:schemeClr val="lt1"/>
-              </a:fontRef>
-            </p:style>
-          </p:sp>
-        </p:grpSp>
-        <p:sp>
-          <p:nvSpPr>
-            <p:cNvPr id="1930183193" name=""/>
-            <p:cNvSpPr txBox="1"/>
-            <p:nvPr/>
-          </p:nvSpPr>
-          <p:spPr bwMode="auto">
-            <a:xfrm rot="0" flipH="0" flipV="0">
-              <a:off x="1292353" y="675000"/>
-              <a:ext cx="480580" cy="488039"/>
-            </a:xfrm>
-            <a:prstGeom prst="rect">
-              <a:avLst/>
-            </a:prstGeom>
-            <a:noFill/>
-          </p:spPr>
-          <p:txBody>
-            <a:bodyPr vertOverflow="overflow" horzOverflow="overflow" vert="horz" wrap="square" lIns="91440" tIns="45720" rIns="91440" bIns="45720" numCol="1" spcCol="0" rtlCol="0" fromWordArt="0" anchor="t" anchorCtr="0" forceAA="0" upright="0" compatLnSpc="0">
-              <a:spAutoFit/>
-            </a:bodyPr>
-            <a:p>
-              <a:pPr algn="ctr">
-                <a:defRPr/>
-              </a:pPr>
-              <mc:AlternateContent xmlns:mc="http://schemas.openxmlformats.org/markup-compatibility/2006" xmlns:m="http://schemas.openxmlformats.org/officeDocument/2006/math">
-                <mc:Choice xmlns:a14="http://schemas.microsoft.com/office/drawing/2010/main" Requires="a14">
-                  <a14:m>
-                    <m:oMathPara>
-                      <m:oMathParaPr/>
-                      <m:oMath>
-                        <m:r>
-                          <m:rPr>
-                            <m:sty m:val="bi"/>
-                          </m:rPr>
-                          <a:rPr lang="fr-FR" sz="2600" u="none" strike="noStrike" cap="none" spc="0">
-                            <a:solidFill>
-                              <a:schemeClr val="tx1"/>
-                            </a:solidFill>
-                            <a:latin typeface="Cambria Math"/>
-                            <a:ea typeface="Cambria Math"/>
-                            <a:cs typeface="Cambria Math"/>
-                          </a:rPr>
-                          <m:t>CZ</m:t>
-                        </m:r>
-                      </m:oMath>
-                    </m:oMathPara>
-                  </a14:m>
-                </mc:Choice>
-                <mc:Fallback/>
-              </mc:AlternateContent>
-              <a:endParaRPr sz="2600" b="1">
-                <a:latin typeface="CMU Serif"/>
-                <a:cs typeface="CMU Serif"/>
-              </a:endParaRPr>
-            </a:p>
-          </p:txBody>
-        </p:sp>
-        <p:sp>
-          <p:nvSpPr>
-            <p:cNvPr id="1286433182" name=""/>
-            <p:cNvSpPr/>
-            <p:nvPr/>
-          </p:nvSpPr>
-          <p:spPr bwMode="auto">
-            <a:xfrm rot="0" flipH="0" flipV="0">
-              <a:off x="2754894" y="0"/>
-              <a:ext cx="457377" cy="457377"/>
-            </a:xfrm>
-            <a:prstGeom prst="ellipse">
-              <a:avLst/>
-            </a:prstGeom>
-            <a:solidFill>
-              <a:schemeClr val="bg1"/>
-            </a:solidFill>
-            <a:ln w="44450" cap="flat" cmpd="sng" algn="ctr">
-              <a:solidFill>
-                <a:srgbClr val="000000"/>
-              </a:solidFill>
-              <a:prstDash val="sysDot"/>
-              <a:miter lim="800000"/>
-            </a:ln>
-          </p:spPr>
-          <p:style>
-            <a:lnRef idx="2">
-              <a:schemeClr val="accent1">
-                <a:shade val="50000"/>
-              </a:schemeClr>
-            </a:lnRef>
-            <a:fillRef idx="1">
-              <a:schemeClr val="accent1"/>
-            </a:fillRef>
-            <a:effectRef idx="0">
-              <a:schemeClr val="accent1"/>
-            </a:effectRef>
-            <a:fontRef idx="minor">
-              <a:schemeClr val="lt1"/>
-            </a:fontRef>
-          </p:style>
-        </p:sp>
-        <p:cxnSp>
-          <p:nvCxnSpPr>
-            <p:cNvPr id="854316108" name=""/>
-            <p:cNvCxnSpPr/>
-            <p:nvPr/>
-          </p:nvCxnSpPr>
-          <p:spPr bwMode="auto">
-            <a:xfrm rot="10800000" flipH="0" flipV="0">
-              <a:off x="2300000" y="228688"/>
-              <a:ext cx="454893" cy="0"/>
-            </a:xfrm>
-            <a:prstGeom prst="line">
-              <a:avLst/>
-            </a:prstGeom>
-            <a:ln w="38100" cap="flat" cmpd="sng" algn="ctr">
-              <a:solidFill>
-                <a:schemeClr val="tx1"/>
-              </a:solidFill>
-              <a:prstDash val="solid"/>
-              <a:miter lim="800000"/>
-            </a:ln>
-          </p:spPr>
-          <p:style>
-            <a:lnRef idx="1">
-              <a:schemeClr val="accent1">
-                <a:shade val="50000"/>
-              </a:schemeClr>
-            </a:lnRef>
-            <a:fillRef idx="0">
-              <a:schemeClr val="accent1"/>
-            </a:fillRef>
-            <a:effectRef idx="0">
-              <a:schemeClr val="accent1"/>
-            </a:effectRef>
-            <a:fontRef idx="minor">
-              <a:schemeClr val="tx1"/>
-            </a:fontRef>
-          </p:style>
-        </p:cxnSp>
-        <p:sp>
-          <p:nvSpPr>
-            <p:cNvPr id="475000429" name=""/>
-            <p:cNvSpPr/>
-            <p:nvPr/>
-          </p:nvSpPr>
-          <p:spPr bwMode="auto">
-            <a:xfrm rot="0" flipH="0" flipV="0">
-              <a:off x="1832475" y="0"/>
-              <a:ext cx="457377" cy="457377"/>
-            </a:xfrm>
-            <a:prstGeom prst="ellipse">
-              <a:avLst/>
-            </a:prstGeom>
-            <a:solidFill>
-              <a:schemeClr val="bg1"/>
-            </a:solidFill>
-            <a:ln w="44450" cap="flat" cmpd="sng" algn="ctr">
-              <a:solidFill>
-                <a:schemeClr val="tx1"/>
-              </a:solidFill>
-              <a:prstDash val="solid"/>
-              <a:miter lim="800000"/>
-            </a:ln>
-          </p:spPr>
-          <p:style>
-            <a:lnRef idx="2">
-              <a:schemeClr val="accent1">
-                <a:shade val="50000"/>
-              </a:schemeClr>
-            </a:lnRef>
-            <a:fillRef idx="1">
-              <a:schemeClr val="accent1"/>
-            </a:fillRef>
-            <a:effectRef idx="0">
-              <a:schemeClr val="accent1"/>
-            </a:effectRef>
-            <a:fontRef idx="minor">
-              <a:schemeClr val="lt1"/>
-            </a:fontRef>
-          </p:style>
-          <p:txBody>
-            <a:bodyPr anchor="ctr"/>
-            <a:p>
-              <a:pPr algn="ctr">
-                <a:defRPr/>
-              </a:pPr>
-              <a:endParaRPr/>
-            </a:p>
-          </p:txBody>
-        </p:sp>
-        <p:grpSp>
-          <p:nvGrpSpPr>
-            <p:cNvPr id="2083355767" name=""/>
-            <p:cNvGrpSpPr/>
-            <p:nvPr/>
-          </p:nvGrpSpPr>
-          <p:grpSpPr bwMode="auto">
-            <a:xfrm rot="10800000" flipH="0" flipV="0">
-              <a:off x="0" y="0"/>
-              <a:ext cx="1379797" cy="457377"/>
-              <a:chOff x="0" y="0"/>
-              <a:chExt cx="1379797" cy="457377"/>
-            </a:xfrm>
-          </p:grpSpPr>
-          <p:sp>
-            <p:nvSpPr>
-              <p:cNvPr id="1883425642" name=""/>
-              <p:cNvSpPr/>
-              <p:nvPr/>
-            </p:nvSpPr>
-            <p:spPr bwMode="auto">
-              <a:xfrm rot="0" flipH="0" flipV="0">
-                <a:off x="922419" y="0"/>
+                <a:off x="2754892" y="0"/>
                 <a:ext cx="457377" cy="457377"/>
               </a:xfrm>
               <a:prstGeom prst="ellipse">
@@ -4853,13 +4821,13 @@
           </p:sp>
           <p:cxnSp>
             <p:nvCxnSpPr>
-              <p:cNvPr id="188305902" name=""/>
+              <p:cNvPr id="854316108" name=""/>
               <p:cNvCxnSpPr/>
               <p:nvPr/>
             </p:nvCxnSpPr>
             <p:spPr bwMode="auto">
               <a:xfrm rot="10800000" flipH="0" flipV="0">
-                <a:off x="467524" y="228688"/>
+                <a:off x="2299998" y="228687"/>
                 <a:ext cx="454893" cy="0"/>
               </a:xfrm>
               <a:prstGeom prst="line">
@@ -4892,13 +4860,13 @@
           </p:cxnSp>
           <p:sp>
             <p:nvSpPr>
-              <p:cNvPr id="1505337369" name=""/>
+              <p:cNvPr id="475000429" name=""/>
               <p:cNvSpPr/>
               <p:nvPr/>
             </p:nvSpPr>
             <p:spPr bwMode="auto">
               <a:xfrm rot="0" flipH="0" flipV="0">
-                <a:off x="0" y="0"/>
+                <a:off x="1832473" y="0"/>
                 <a:ext cx="457377" cy="457377"/>
               </a:xfrm>
               <a:prstGeom prst="ellipse">
@@ -4941,162 +4909,531 @@
               </a:p>
             </p:txBody>
           </p:sp>
+          <p:grpSp>
+            <p:nvGrpSpPr>
+              <p:cNvPr id="2083355767" name=""/>
+              <p:cNvGrpSpPr/>
+              <p:nvPr/>
+            </p:nvGrpSpPr>
+            <p:grpSpPr bwMode="auto">
+              <a:xfrm rot="10800000" flipH="0" flipV="0">
+                <a:off x="0" y="0"/>
+                <a:ext cx="1379795" cy="457376"/>
+                <a:chOff x="0" y="0"/>
+                <a:chExt cx="1379795" cy="457376"/>
+              </a:xfrm>
+            </p:grpSpPr>
+            <p:sp>
+              <p:nvSpPr>
+                <p:cNvPr id="1883425642" name=""/>
+                <p:cNvSpPr/>
+                <p:nvPr/>
+              </p:nvSpPr>
+              <p:spPr bwMode="auto">
+                <a:xfrm rot="0" flipH="0" flipV="0">
+                  <a:off x="922419" y="0"/>
+                  <a:ext cx="457377" cy="457377"/>
+                </a:xfrm>
+                <a:prstGeom prst="ellipse">
+                  <a:avLst/>
+                </a:prstGeom>
+                <a:solidFill>
+                  <a:schemeClr val="bg1"/>
+                </a:solidFill>
+                <a:ln w="44450" cap="flat" cmpd="sng" algn="ctr">
+                  <a:solidFill>
+                    <a:srgbClr val="000000"/>
+                  </a:solidFill>
+                  <a:prstDash val="sysDot"/>
+                  <a:miter lim="800000"/>
+                </a:ln>
+              </p:spPr>
+              <p:style>
+                <a:lnRef idx="2">
+                  <a:schemeClr val="accent1">
+                    <a:shade val="50000"/>
+                  </a:schemeClr>
+                </a:lnRef>
+                <a:fillRef idx="1">
+                  <a:schemeClr val="accent1"/>
+                </a:fillRef>
+                <a:effectRef idx="0">
+                  <a:schemeClr val="accent1"/>
+                </a:effectRef>
+                <a:fontRef idx="minor">
+                  <a:schemeClr val="lt1"/>
+                </a:fontRef>
+              </p:style>
+            </p:sp>
+            <p:cxnSp>
+              <p:nvCxnSpPr>
+                <p:cNvPr id="188305902" name=""/>
+                <p:cNvCxnSpPr/>
+                <p:nvPr/>
+              </p:nvCxnSpPr>
+              <p:spPr bwMode="auto">
+                <a:xfrm rot="10800000" flipH="0" flipV="0">
+                  <a:off x="467523" y="228687"/>
+                  <a:ext cx="454893" cy="0"/>
+                </a:xfrm>
+                <a:prstGeom prst="line">
+                  <a:avLst/>
+                </a:prstGeom>
+                <a:ln w="38100" cap="flat" cmpd="sng" algn="ctr">
+                  <a:solidFill>
+                    <a:schemeClr val="tx1"/>
+                  </a:solidFill>
+                  <a:prstDash val="solid"/>
+                  <a:miter lim="800000"/>
+                </a:ln>
+              </p:spPr>
+              <p:style>
+                <a:lnRef idx="1">
+                  <a:schemeClr val="accent1">
+                    <a:shade val="50000"/>
+                  </a:schemeClr>
+                </a:lnRef>
+                <a:fillRef idx="0">
+                  <a:schemeClr val="accent1"/>
+                </a:fillRef>
+                <a:effectRef idx="0">
+                  <a:schemeClr val="accent1"/>
+                </a:effectRef>
+                <a:fontRef idx="minor">
+                  <a:schemeClr val="tx1"/>
+                </a:fontRef>
+              </p:style>
+            </p:cxnSp>
+            <p:sp>
+              <p:nvSpPr>
+                <p:cNvPr id="1505337369" name=""/>
+                <p:cNvSpPr/>
+                <p:nvPr/>
+              </p:nvSpPr>
+              <p:spPr bwMode="auto">
+                <a:xfrm rot="0" flipH="0" flipV="0">
+                  <a:off x="0" y="0"/>
+                  <a:ext cx="457377" cy="457377"/>
+                </a:xfrm>
+                <a:prstGeom prst="ellipse">
+                  <a:avLst/>
+                </a:prstGeom>
+                <a:solidFill>
+                  <a:schemeClr val="bg1"/>
+                </a:solidFill>
+                <a:ln w="44450" cap="flat" cmpd="sng" algn="ctr">
+                  <a:solidFill>
+                    <a:schemeClr val="tx1"/>
+                  </a:solidFill>
+                  <a:prstDash val="solid"/>
+                  <a:miter lim="800000"/>
+                </a:ln>
+              </p:spPr>
+              <p:style>
+                <a:lnRef idx="2">
+                  <a:schemeClr val="accent1">
+                    <a:shade val="50000"/>
+                  </a:schemeClr>
+                </a:lnRef>
+                <a:fillRef idx="1">
+                  <a:schemeClr val="accent1"/>
+                </a:fillRef>
+                <a:effectRef idx="0">
+                  <a:schemeClr val="accent1"/>
+                </a:effectRef>
+                <a:fontRef idx="minor">
+                  <a:schemeClr val="lt1"/>
+                </a:fontRef>
+              </p:style>
+              <p:txBody>
+                <a:bodyPr anchor="ctr"/>
+                <a:p>
+                  <a:pPr algn="ctr">
+                    <a:defRPr/>
+                  </a:pPr>
+                  <a:endParaRPr/>
+                </a:p>
+              </p:txBody>
+            </p:sp>
+          </p:grpSp>
         </p:grpSp>
-      </p:grpSp>
-      <p:grpSp>
-        <p:nvGrpSpPr>
-          <p:cNvPr id="562520318" name=""/>
-          <p:cNvGrpSpPr/>
-          <p:nvPr/>
-        </p:nvGrpSpPr>
-        <p:grpSpPr bwMode="auto">
-          <a:xfrm rot="0" flipH="0" flipV="0">
-            <a:off x="7111068" y="4493119"/>
-            <a:ext cx="4194556" cy="1400662"/>
-            <a:chOff x="0" y="0"/>
-            <a:chExt cx="4194556" cy="1400662"/>
-          </a:xfrm>
-        </p:grpSpPr>
-        <p:sp>
-          <p:nvSpPr>
-            <p:cNvPr id="915773653" name=""/>
-            <p:cNvSpPr/>
+        <p:grpSp>
+          <p:nvGrpSpPr>
+            <p:cNvPr id="37379887" name=""/>
+            <p:cNvGrpSpPr/>
             <p:nvPr/>
-          </p:nvSpPr>
-          <p:spPr bwMode="auto">
+          </p:nvGrpSpPr>
+          <p:grpSpPr bwMode="auto">
             <a:xfrm rot="0" flipH="0" flipV="0">
-              <a:off x="1289166" y="652274"/>
-              <a:ext cx="646337" cy="646337"/>
+              <a:off x="232391" y="660861"/>
+              <a:ext cx="4194554" cy="1400661"/>
+              <a:chOff x="0" y="0"/>
+              <a:chExt cx="4194554" cy="1400661"/>
             </a:xfrm>
-            <a:prstGeom prst="ellipse">
-              <a:avLst/>
-            </a:prstGeom>
-            <a:solidFill>
-              <a:schemeClr val="bg1"/>
-            </a:solidFill>
-            <a:ln w="44450" cap="flat" cmpd="sng" algn="ctr">
+          </p:grpSpPr>
+          <p:sp>
+            <p:nvSpPr>
+              <p:cNvPr id="915773653" name=""/>
+              <p:cNvSpPr/>
+              <p:nvPr/>
+            </p:nvSpPr>
+            <p:spPr bwMode="auto">
+              <a:xfrm rot="0" flipH="0" flipV="0">
+                <a:off x="1289165" y="652273"/>
+                <a:ext cx="646337" cy="646337"/>
+              </a:xfrm>
+              <a:prstGeom prst="ellipse">
+                <a:avLst/>
+              </a:prstGeom>
               <a:solidFill>
+                <a:schemeClr val="bg1"/>
+              </a:solidFill>
+              <a:ln w="44450" cap="flat" cmpd="sng" algn="ctr">
+                <a:solidFill>
+                  <a:schemeClr val="tx1"/>
+                </a:solidFill>
+                <a:prstDash val="solid"/>
+                <a:miter lim="800000"/>
+              </a:ln>
+            </p:spPr>
+            <p:style>
+              <a:lnRef idx="2">
+                <a:schemeClr val="accent1">
+                  <a:shade val="50000"/>
+                </a:schemeClr>
+              </a:lnRef>
+              <a:fillRef idx="1">
+                <a:schemeClr val="accent1"/>
+              </a:fillRef>
+              <a:effectRef idx="0">
+                <a:schemeClr val="accent1"/>
+              </a:effectRef>
+              <a:fontRef idx="minor">
+                <a:schemeClr val="lt1"/>
+              </a:fontRef>
+            </p:style>
+          </p:sp>
+          <p:sp>
+            <p:nvSpPr>
+              <p:cNvPr id="1295666278" name=""/>
+              <p:cNvSpPr/>
+              <p:nvPr/>
+            </p:nvSpPr>
+            <p:spPr bwMode="auto">
+              <a:xfrm rot="0" flipH="0" flipV="0">
+                <a:off x="1136908" y="536991"/>
+                <a:ext cx="1898305" cy="863669"/>
+              </a:xfrm>
+              <a:prstGeom prst="flowChartAlternateProcess">
+                <a:avLst/>
+              </a:prstGeom>
+              <a:noFill/>
+              <a:ln w="57150" cap="flat" cmpd="sng" algn="ctr">
+                <a:solidFill>
+                  <a:schemeClr val="tx1"/>
+                </a:solidFill>
+                <a:prstDash val="dash"/>
+                <a:miter lim="800000"/>
+              </a:ln>
+            </p:spPr>
+            <p:style>
+              <a:lnRef idx="2">
+                <a:schemeClr val="accent1">
+                  <a:shade val="50000"/>
+                </a:schemeClr>
+              </a:lnRef>
+              <a:fillRef idx="1">
+                <a:schemeClr val="accent1"/>
+              </a:fillRef>
+              <a:effectRef idx="0">
+                <a:schemeClr val="accent1"/>
+              </a:effectRef>
+              <a:fontRef idx="minor">
+                <a:schemeClr val="lt1"/>
+              </a:fontRef>
+            </p:style>
+            <p:txBody>
+              <a:bodyPr anchor="ctr"/>
+              <a:p>
+                <a:pPr algn="ctr">
+                  <a:defRPr/>
+                </a:pPr>
+                <a:endParaRPr/>
+              </a:p>
+            </p:txBody>
+          </p:sp>
+          <p:sp>
+            <p:nvSpPr>
+              <p:cNvPr id="399993644" name=""/>
+              <p:cNvSpPr txBox="1"/>
+              <p:nvPr/>
+            </p:nvSpPr>
+            <p:spPr bwMode="auto">
+              <a:xfrm rot="0" flipH="0" flipV="0">
+                <a:off x="1095300" y="0"/>
+                <a:ext cx="1983323" cy="488039"/>
+              </a:xfrm>
+              <a:prstGeom prst="rect">
+                <a:avLst/>
+              </a:prstGeom>
+              <a:noFill/>
+            </p:spPr>
+            <p:txBody>
+              <a:bodyPr vertOverflow="overflow" horzOverflow="overflow" vert="horz" wrap="square" lIns="91440" tIns="45720" rIns="91440" bIns="45720" numCol="1" spcCol="0" rtlCol="0" fromWordArt="0" anchor="t" anchorCtr="0" forceAA="0" upright="0" compatLnSpc="0">
+                <a:spAutoFit/>
+              </a:bodyPr>
+              <a:p>
+                <a:pPr algn="ctr">
+                  <a:defRPr/>
+                </a:pPr>
+                <a:r>
+                  <a:rPr lang="fr-FR" sz="2600" b="1">
+                    <a:latin typeface="CMU Serif"/>
+                    <a:ea typeface="CMU Serif"/>
+                    <a:cs typeface="CMU Serif"/>
+                  </a:rPr>
+                  <a:t>BSM</a:t>
+                </a:r>
+                <a:endParaRPr sz="2600" b="1">
+                  <a:latin typeface="CMU Serif"/>
+                  <a:cs typeface="CMU Serif"/>
+                </a:endParaRPr>
+              </a:p>
+            </p:txBody>
+          </p:sp>
+          <p:cxnSp>
+            <p:nvCxnSpPr>
+              <p:cNvPr id="1745280508" name=""/>
+              <p:cNvCxnSpPr/>
+              <p:nvPr/>
+            </p:nvCxnSpPr>
+            <p:spPr bwMode="auto">
+              <a:xfrm rot="10800000" flipH="0" flipV="0">
+                <a:off x="646335" y="975443"/>
+                <a:ext cx="642828" cy="0"/>
+              </a:xfrm>
+              <a:prstGeom prst="line">
+                <a:avLst/>
+              </a:prstGeom>
+              <a:ln w="38100" cap="flat" cmpd="sng" algn="ctr">
+                <a:solidFill>
+                  <a:schemeClr val="tx1"/>
+                </a:solidFill>
+                <a:prstDash val="solid"/>
+                <a:miter lim="800000"/>
+              </a:ln>
+            </p:spPr>
+            <p:style>
+              <a:lnRef idx="1">
+                <a:schemeClr val="accent1">
+                  <a:shade val="50000"/>
+                </a:schemeClr>
+              </a:lnRef>
+              <a:fillRef idx="0">
+                <a:schemeClr val="accent1"/>
+              </a:fillRef>
+              <a:effectRef idx="0">
+                <a:schemeClr val="accent1"/>
+              </a:effectRef>
+              <a:fontRef idx="minor">
                 <a:schemeClr val="tx1"/>
+              </a:fontRef>
+            </p:style>
+          </p:cxnSp>
+          <p:sp>
+            <p:nvSpPr>
+              <p:cNvPr id="403892996" name=""/>
+              <p:cNvSpPr/>
+              <p:nvPr/>
+            </p:nvSpPr>
+            <p:spPr bwMode="auto">
+              <a:xfrm rot="0" flipH="0" flipV="0">
+                <a:off x="0" y="652273"/>
+                <a:ext cx="646337" cy="646337"/>
+              </a:xfrm>
+              <a:prstGeom prst="ellipse">
+                <a:avLst/>
+              </a:prstGeom>
+              <a:solidFill>
+                <a:schemeClr val="bg1"/>
               </a:solidFill>
-              <a:prstDash val="solid"/>
-              <a:miter lim="800000"/>
-            </a:ln>
-          </p:spPr>
-          <p:style>
-            <a:lnRef idx="2">
-              <a:schemeClr val="accent1">
-                <a:shade val="50000"/>
-              </a:schemeClr>
-            </a:lnRef>
-            <a:fillRef idx="1">
-              <a:schemeClr val="accent1"/>
-            </a:fillRef>
-            <a:effectRef idx="0">
-              <a:schemeClr val="accent1"/>
-            </a:effectRef>
-            <a:fontRef idx="minor">
-              <a:schemeClr val="lt1"/>
-            </a:fontRef>
-          </p:style>
-        </p:sp>
-        <p:sp>
-          <p:nvSpPr>
-            <p:cNvPr id="1295666278" name=""/>
-            <p:cNvSpPr/>
-            <p:nvPr/>
-          </p:nvSpPr>
-          <p:spPr bwMode="auto">
-            <a:xfrm rot="0" flipH="0" flipV="0">
-              <a:off x="1136909" y="536992"/>
-              <a:ext cx="1898305" cy="863669"/>
-            </a:xfrm>
-            <a:prstGeom prst="flowChartAlternateProcess">
-              <a:avLst/>
-            </a:prstGeom>
-            <a:noFill/>
-            <a:ln w="57150" cap="flat" cmpd="sng" algn="ctr">
+              <a:ln w="44450" cap="flat" cmpd="sng" algn="ctr">
+                <a:solidFill>
+                  <a:srgbClr val="000000"/>
+                </a:solidFill>
+                <a:prstDash val="sysDot"/>
+                <a:miter lim="800000"/>
+              </a:ln>
+            </p:spPr>
+            <p:style>
+              <a:lnRef idx="2">
+                <a:schemeClr val="accent1">
+                  <a:shade val="50000"/>
+                </a:schemeClr>
+              </a:lnRef>
+              <a:fillRef idx="1">
+                <a:schemeClr val="accent1"/>
+              </a:fillRef>
+              <a:effectRef idx="0">
+                <a:schemeClr val="accent1"/>
+              </a:effectRef>
+              <a:fontRef idx="minor">
+                <a:schemeClr val="lt1"/>
+              </a:fontRef>
+            </p:style>
+            <p:txBody>
+              <a:bodyPr anchor="ctr"/>
+              <a:p>
+                <a:pPr algn="ctr">
+                  <a:defRPr/>
+                </a:pPr>
+                <a:endParaRPr/>
+              </a:p>
+            </p:txBody>
+          </p:sp>
+          <p:sp>
+            <p:nvSpPr>
+              <p:cNvPr id="1816905699" name=""/>
+              <p:cNvSpPr/>
+              <p:nvPr/>
+            </p:nvSpPr>
+            <p:spPr bwMode="auto">
+              <a:xfrm rot="0" flipH="0" flipV="0">
+                <a:off x="3548217" y="652273"/>
+                <a:ext cx="646337" cy="646337"/>
+              </a:xfrm>
+              <a:prstGeom prst="ellipse">
+                <a:avLst/>
+              </a:prstGeom>
               <a:solidFill>
+                <a:schemeClr val="bg1"/>
+              </a:solidFill>
+              <a:ln w="44450" cap="flat" cmpd="sng" algn="ctr">
+                <a:solidFill>
+                  <a:srgbClr val="000000"/>
+                </a:solidFill>
+                <a:prstDash val="sysDot"/>
+                <a:miter lim="800000"/>
+              </a:ln>
+            </p:spPr>
+            <p:style>
+              <a:lnRef idx="2">
+                <a:schemeClr val="accent1">
+                  <a:shade val="50000"/>
+                </a:schemeClr>
+              </a:lnRef>
+              <a:fillRef idx="1">
+                <a:schemeClr val="accent1"/>
+              </a:fillRef>
+              <a:effectRef idx="0">
+                <a:schemeClr val="accent1"/>
+              </a:effectRef>
+              <a:fontRef idx="minor">
+                <a:schemeClr val="lt1"/>
+              </a:fontRef>
+            </p:style>
+          </p:sp>
+          <p:cxnSp>
+            <p:nvCxnSpPr>
+              <p:cNvPr id="2111305849" name=""/>
+              <p:cNvCxnSpPr/>
+              <p:nvPr/>
+            </p:nvCxnSpPr>
+            <p:spPr bwMode="auto">
+              <a:xfrm rot="10800000" flipH="0" flipV="0">
+                <a:off x="2905389" y="975443"/>
+                <a:ext cx="642827" cy="0"/>
+              </a:xfrm>
+              <a:prstGeom prst="line">
+                <a:avLst/>
+              </a:prstGeom>
+              <a:ln w="38100" cap="flat" cmpd="sng" algn="ctr">
+                <a:solidFill>
+                  <a:schemeClr val="tx1"/>
+                </a:solidFill>
+                <a:prstDash val="solid"/>
+                <a:miter lim="800000"/>
+              </a:ln>
+            </p:spPr>
+            <p:style>
+              <a:lnRef idx="1">
+                <a:schemeClr val="accent1">
+                  <a:shade val="50000"/>
+                </a:schemeClr>
+              </a:lnRef>
+              <a:fillRef idx="0">
+                <a:schemeClr val="accent1"/>
+              </a:fillRef>
+              <a:effectRef idx="0">
+                <a:schemeClr val="accent1"/>
+              </a:effectRef>
+              <a:fontRef idx="minor">
                 <a:schemeClr val="tx1"/>
+              </a:fontRef>
+            </p:style>
+          </p:cxnSp>
+          <p:sp>
+            <p:nvSpPr>
+              <p:cNvPr id="35204925" name=""/>
+              <p:cNvSpPr/>
+              <p:nvPr/>
+            </p:nvSpPr>
+            <p:spPr bwMode="auto">
+              <a:xfrm rot="0" flipH="0" flipV="0">
+                <a:off x="2259050" y="652273"/>
+                <a:ext cx="646337" cy="646337"/>
+              </a:xfrm>
+              <a:prstGeom prst="ellipse">
+                <a:avLst/>
+              </a:prstGeom>
+              <a:solidFill>
+                <a:schemeClr val="bg1"/>
               </a:solidFill>
-              <a:prstDash val="dash"/>
-              <a:miter lim="800000"/>
-            </a:ln>
-          </p:spPr>
-          <p:style>
-            <a:lnRef idx="2">
-              <a:schemeClr val="accent1">
-                <a:shade val="50000"/>
-              </a:schemeClr>
-            </a:lnRef>
-            <a:fillRef idx="1">
-              <a:schemeClr val="accent1"/>
-            </a:fillRef>
-            <a:effectRef idx="0">
-              <a:schemeClr val="accent1"/>
-            </a:effectRef>
-            <a:fontRef idx="minor">
-              <a:schemeClr val="lt1"/>
-            </a:fontRef>
-          </p:style>
-          <p:txBody>
-            <a:bodyPr anchor="ctr"/>
-            <a:p>
-              <a:pPr algn="ctr">
-                <a:defRPr/>
-              </a:pPr>
-              <a:endParaRPr/>
-            </a:p>
-          </p:txBody>
-        </p:sp>
-        <p:sp>
-          <p:nvSpPr>
-            <p:cNvPr id="399993644" name=""/>
-            <p:cNvSpPr txBox="1"/>
-            <p:nvPr/>
-          </p:nvSpPr>
-          <p:spPr bwMode="auto">
-            <a:xfrm rot="0" flipH="0" flipV="0">
-              <a:off x="1095301" y="0"/>
-              <a:ext cx="1983323" cy="488039"/>
-            </a:xfrm>
-            <a:prstGeom prst="rect">
-              <a:avLst/>
-            </a:prstGeom>
-            <a:noFill/>
-          </p:spPr>
-          <p:txBody>
-            <a:bodyPr vertOverflow="overflow" horzOverflow="overflow" vert="horz" wrap="square" lIns="91440" tIns="45720" rIns="91440" bIns="45720" numCol="1" spcCol="0" rtlCol="0" fromWordArt="0" anchor="t" anchorCtr="0" forceAA="0" upright="0" compatLnSpc="0">
-              <a:spAutoFit/>
-            </a:bodyPr>
-            <a:p>
-              <a:pPr algn="ctr">
-                <a:defRPr/>
-              </a:pPr>
-              <a:r>
-                <a:rPr lang="fr-FR" sz="2600" b="1">
-                  <a:latin typeface="CMU Serif"/>
-                  <a:ea typeface="CMU Serif"/>
-                  <a:cs typeface="CMU Serif"/>
-                </a:rPr>
-                <a:t>BSM</a:t>
-              </a:r>
-              <a:endParaRPr sz="2600" b="1">
-                <a:latin typeface="CMU Serif"/>
-                <a:cs typeface="CMU Serif"/>
-              </a:endParaRPr>
-            </a:p>
-          </p:txBody>
-        </p:sp>
+              <a:ln w="44450" cap="flat" cmpd="sng" algn="ctr">
+                <a:solidFill>
+                  <a:schemeClr val="tx1"/>
+                </a:solidFill>
+                <a:prstDash val="solid"/>
+                <a:miter lim="800000"/>
+              </a:ln>
+            </p:spPr>
+            <p:style>
+              <a:lnRef idx="2">
+                <a:schemeClr val="accent1">
+                  <a:shade val="50000"/>
+                </a:schemeClr>
+              </a:lnRef>
+              <a:fillRef idx="1">
+                <a:schemeClr val="accent1"/>
+              </a:fillRef>
+              <a:effectRef idx="0">
+                <a:schemeClr val="accent1"/>
+              </a:effectRef>
+              <a:fontRef idx="minor">
+                <a:schemeClr val="lt1"/>
+              </a:fontRef>
+            </p:style>
+            <p:txBody>
+              <a:bodyPr anchor="ctr"/>
+              <a:p>
+                <a:pPr algn="ctr">
+                  <a:defRPr/>
+                </a:pPr>
+                <a:endParaRPr/>
+              </a:p>
+            </p:txBody>
+          </p:sp>
+        </p:grpSp>
         <p:cxnSp>
           <p:nvCxnSpPr>
-            <p:cNvPr id="1745280508" name=""/>
+            <p:cNvPr id="277183171" name=""/>
             <p:cNvCxnSpPr/>
             <p:nvPr/>
           </p:nvCxnSpPr>
           <p:spPr bwMode="auto">
-            <a:xfrm rot="10800000" flipH="0" flipV="0">
-              <a:off x="646336" y="975444"/>
-              <a:ext cx="642828" cy="0"/>
+            <a:xfrm rot="0" flipH="0" flipV="0">
+              <a:off x="5006026" y="1651483"/>
+              <a:ext cx="1362304" cy="0"/>
             </a:xfrm>
             <a:prstGeom prst="line">
               <a:avLst/>
@@ -5107,6 +5444,7 @@
               </a:solidFill>
               <a:prstDash val="solid"/>
               <a:miter lim="800000"/>
+              <a:tailEnd type="arrow" len="med"/>
             </a:ln>
           </p:spPr>
           <p:style>
@@ -5128,729 +5466,242 @@
         </p:cxnSp>
         <p:sp>
           <p:nvSpPr>
-            <p:cNvPr id="403892996" name=""/>
-            <p:cNvSpPr/>
+            <p:cNvPr id="209090875" name=""/>
+            <p:cNvSpPr txBox="1"/>
             <p:nvPr/>
           </p:nvSpPr>
           <p:spPr bwMode="auto">
             <a:xfrm rot="0" flipH="0" flipV="0">
-              <a:off x="0" y="652274"/>
-              <a:ext cx="646337" cy="646337"/>
+              <a:off x="4967926" y="1104617"/>
+              <a:ext cx="1432661" cy="488039"/>
             </a:xfrm>
-            <a:prstGeom prst="ellipse">
+            <a:prstGeom prst="rect">
               <a:avLst/>
             </a:prstGeom>
-            <a:solidFill>
-              <a:schemeClr val="bg1"/>
-            </a:solidFill>
-            <a:ln w="44450" cap="flat" cmpd="sng" algn="ctr">
-              <a:solidFill>
-                <a:srgbClr val="000000"/>
-              </a:solidFill>
-              <a:prstDash val="sysDot"/>
-              <a:miter lim="800000"/>
-            </a:ln>
+            <a:noFill/>
           </p:spPr>
-          <p:style>
-            <a:lnRef idx="2">
-              <a:schemeClr val="accent1">
-                <a:shade val="50000"/>
-              </a:schemeClr>
-            </a:lnRef>
-            <a:fillRef idx="1">
-              <a:schemeClr val="accent1"/>
-            </a:fillRef>
-            <a:effectRef idx="0">
-              <a:schemeClr val="accent1"/>
-            </a:effectRef>
-            <a:fontRef idx="minor">
-              <a:schemeClr val="lt1"/>
-            </a:fontRef>
-          </p:style>
           <p:txBody>
-            <a:bodyPr anchor="ctr"/>
+            <a:bodyPr vertOverflow="overflow" horzOverflow="overflow" vert="horz" wrap="square" lIns="91440" tIns="45720" rIns="91440" bIns="45720" numCol="1" spcCol="0" rtlCol="0" fromWordArt="0" anchor="t" anchorCtr="0" forceAA="0" upright="0" compatLnSpc="0">
+              <a:spAutoFit/>
+            </a:bodyPr>
             <a:p>
               <a:pPr algn="ctr">
                 <a:defRPr/>
               </a:pPr>
-              <a:endParaRPr/>
+              <a:r>
+                <a:rPr lang="fr-FR" sz="2600" b="1">
+                  <a:solidFill>
+                    <a:srgbClr val="00FF73"/>
+                  </a:solidFill>
+                  <a:latin typeface="CMU Serif"/>
+                  <a:ea typeface="CMU Serif"/>
+                  <a:cs typeface="CMU Serif"/>
+                </a:rPr>
+                <a:t>Success</a:t>
+              </a:r>
+              <a:endParaRPr sz="2600" b="1">
+                <a:solidFill>
+                  <a:srgbClr val="00FF73"/>
+                </a:solidFill>
+                <a:latin typeface="CMU Serif"/>
+                <a:cs typeface="CMU Serif"/>
+              </a:endParaRPr>
             </a:p>
           </p:txBody>
         </p:sp>
         <p:sp>
           <p:nvSpPr>
-            <p:cNvPr id="1816905699" name=""/>
-            <p:cNvSpPr/>
-            <p:nvPr/>
-          </p:nvSpPr>
-          <p:spPr bwMode="auto">
-            <a:xfrm rot="0" flipH="0" flipV="0">
-              <a:off x="3548218" y="652274"/>
-              <a:ext cx="646337" cy="646337"/>
-            </a:xfrm>
-            <a:prstGeom prst="ellipse">
-              <a:avLst/>
-            </a:prstGeom>
-            <a:solidFill>
-              <a:schemeClr val="bg1"/>
-            </a:solidFill>
-            <a:ln w="44450" cap="flat" cmpd="sng" algn="ctr">
-              <a:solidFill>
-                <a:srgbClr val="000000"/>
-              </a:solidFill>
-              <a:prstDash val="sysDot"/>
-              <a:miter lim="800000"/>
-            </a:ln>
-          </p:spPr>
-          <p:style>
-            <a:lnRef idx="2">
-              <a:schemeClr val="accent1">
-                <a:shade val="50000"/>
-              </a:schemeClr>
-            </a:lnRef>
-            <a:fillRef idx="1">
-              <a:schemeClr val="accent1"/>
-            </a:fillRef>
-            <a:effectRef idx="0">
-              <a:schemeClr val="accent1"/>
-            </a:effectRef>
-            <a:fontRef idx="minor">
-              <a:schemeClr val="lt1"/>
-            </a:fontRef>
-          </p:style>
-        </p:sp>
-        <p:cxnSp>
-          <p:nvCxnSpPr>
-            <p:cNvPr id="2111305849" name=""/>
-            <p:cNvCxnSpPr/>
-            <p:nvPr/>
-          </p:nvCxnSpPr>
-          <p:spPr bwMode="auto">
-            <a:xfrm rot="10800000" flipH="0" flipV="0">
-              <a:off x="2905389" y="975444"/>
-              <a:ext cx="642827" cy="0"/>
-            </a:xfrm>
-            <a:prstGeom prst="line">
-              <a:avLst/>
-            </a:prstGeom>
-            <a:ln w="38100" cap="flat" cmpd="sng" algn="ctr">
-              <a:solidFill>
-                <a:schemeClr val="tx1"/>
-              </a:solidFill>
-              <a:prstDash val="solid"/>
-              <a:miter lim="800000"/>
-            </a:ln>
-          </p:spPr>
-          <p:style>
-            <a:lnRef idx="1">
-              <a:schemeClr val="accent1">
-                <a:shade val="50000"/>
-              </a:schemeClr>
-            </a:lnRef>
-            <a:fillRef idx="0">
-              <a:schemeClr val="accent1"/>
-            </a:fillRef>
-            <a:effectRef idx="0">
-              <a:schemeClr val="accent1"/>
-            </a:effectRef>
-            <a:fontRef idx="minor">
-              <a:schemeClr val="tx1"/>
-            </a:fontRef>
-          </p:style>
-        </p:cxnSp>
-        <p:sp>
-          <p:nvSpPr>
-            <p:cNvPr id="35204925" name=""/>
-            <p:cNvSpPr/>
-            <p:nvPr/>
-          </p:nvSpPr>
-          <p:spPr bwMode="auto">
-            <a:xfrm rot="0" flipH="0" flipV="0">
-              <a:off x="2259051" y="652274"/>
-              <a:ext cx="646337" cy="646337"/>
-            </a:xfrm>
-            <a:prstGeom prst="ellipse">
-              <a:avLst/>
-            </a:prstGeom>
-            <a:solidFill>
-              <a:schemeClr val="bg1"/>
-            </a:solidFill>
-            <a:ln w="44450" cap="flat" cmpd="sng" algn="ctr">
-              <a:solidFill>
-                <a:schemeClr val="tx1"/>
-              </a:solidFill>
-              <a:prstDash val="solid"/>
-              <a:miter lim="800000"/>
-            </a:ln>
-          </p:spPr>
-          <p:style>
-            <a:lnRef idx="2">
-              <a:schemeClr val="accent1">
-                <a:shade val="50000"/>
-              </a:schemeClr>
-            </a:lnRef>
-            <a:fillRef idx="1">
-              <a:schemeClr val="accent1"/>
-            </a:fillRef>
-            <a:effectRef idx="0">
-              <a:schemeClr val="accent1"/>
-            </a:effectRef>
-            <a:fontRef idx="minor">
-              <a:schemeClr val="lt1"/>
-            </a:fontRef>
-          </p:style>
-          <p:txBody>
-            <a:bodyPr anchor="ctr"/>
-            <a:p>
-              <a:pPr algn="ctr">
-                <a:defRPr/>
-              </a:pPr>
-              <a:endParaRPr/>
-            </a:p>
-          </p:txBody>
-        </p:sp>
-      </p:grpSp>
-      <p:cxnSp>
-        <p:nvCxnSpPr>
-          <p:cNvPr id="1143848607" name=""/>
-          <p:cNvCxnSpPr/>
-          <p:nvPr/>
-        </p:nvCxnSpPr>
-        <p:spPr bwMode="auto">
-          <a:xfrm rot="0" flipH="0" flipV="0">
-            <a:off x="11884703" y="5483741"/>
-            <a:ext cx="1362304" cy="0"/>
-          </a:xfrm>
-          <a:prstGeom prst="line">
-            <a:avLst/>
-          </a:prstGeom>
-          <a:ln w="38100" cap="flat" cmpd="sng" algn="ctr">
-            <a:solidFill>
-              <a:schemeClr val="tx1"/>
-            </a:solidFill>
-            <a:prstDash val="solid"/>
-            <a:miter lim="800000"/>
-            <a:tailEnd type="arrow" len="med"/>
-          </a:ln>
-        </p:spPr>
-        <p:style>
-          <a:lnRef idx="1">
-            <a:schemeClr val="accent1">
-              <a:shade val="50000"/>
-            </a:schemeClr>
-          </a:lnRef>
-          <a:fillRef idx="0">
-            <a:schemeClr val="accent1"/>
-          </a:fillRef>
-          <a:effectRef idx="0">
-            <a:schemeClr val="accent1"/>
-          </a:effectRef>
-          <a:fontRef idx="minor">
-            <a:schemeClr val="tx1"/>
-          </a:fontRef>
-        </p:style>
-      </p:cxnSp>
-      <p:sp>
-        <p:nvSpPr>
-          <p:cNvPr id="1345250975" name=""/>
-          <p:cNvSpPr txBox="1"/>
-          <p:nvPr/>
-        </p:nvSpPr>
-        <p:spPr bwMode="auto">
-          <a:xfrm rot="0" flipH="0" flipV="0">
-            <a:off x="11846603" y="4936875"/>
-            <a:ext cx="1432661" cy="488039"/>
-          </a:xfrm>
-          <a:prstGeom prst="rect">
-            <a:avLst/>
-          </a:prstGeom>
-          <a:noFill/>
-        </p:spPr>
-        <p:txBody>
-          <a:bodyPr vertOverflow="overflow" horzOverflow="overflow" vert="horz" wrap="square" lIns="91440" tIns="45720" rIns="91440" bIns="45720" numCol="1" spcCol="0" rtlCol="0" fromWordArt="0" anchor="t" anchorCtr="0" forceAA="0" upright="0" compatLnSpc="0">
-            <a:spAutoFit/>
-          </a:bodyPr>
-          <a:p>
-            <a:pPr algn="ctr">
-              <a:defRPr/>
-            </a:pPr>
-            <a:r>
-              <a:rPr lang="fr-FR" sz="2600" b="1">
-                <a:solidFill>
-                  <a:srgbClr val="00FF73"/>
-                </a:solidFill>
-                <a:latin typeface="CMU Serif"/>
-                <a:ea typeface="CMU Serif"/>
-                <a:cs typeface="CMU Serif"/>
-              </a:rPr>
-              <a:t>Success</a:t>
-            </a:r>
-            <a:endParaRPr sz="2600" b="1">
-              <a:solidFill>
-                <a:srgbClr val="00FF73"/>
-              </a:solidFill>
-              <a:latin typeface="CMU Serif"/>
-              <a:cs typeface="CMU Serif"/>
-            </a:endParaRPr>
-          </a:p>
-        </p:txBody>
-      </p:sp>
-      <p:sp>
-        <p:nvSpPr>
-          <p:cNvPr id="155905261" name=""/>
-          <p:cNvSpPr txBox="1"/>
-          <p:nvPr/>
-        </p:nvSpPr>
-        <p:spPr bwMode="auto">
-          <a:xfrm rot="0" flipH="0" flipV="0">
-            <a:off x="16622521" y="5046482"/>
-            <a:ext cx="1435540" cy="823320"/>
-          </a:xfrm>
-          <a:prstGeom prst="rect">
-            <a:avLst/>
-          </a:prstGeom>
-          <a:noFill/>
-        </p:spPr>
-        <p:txBody>
-          <a:bodyPr vertOverflow="overflow" horzOverflow="overflow" vert="horz" wrap="square" lIns="91440" tIns="45720" rIns="91440" bIns="45720" numCol="1" spcCol="0" rtlCol="0" fromWordArt="0" anchor="t" anchorCtr="0" forceAA="0" upright="0" compatLnSpc="0">
-            <a:spAutoFit/>
-          </a:bodyPr>
-          <a:p>
-            <a:pPr algn="ctr">
-              <a:defRPr/>
-            </a:pPr>
-            <a:r>
-              <a:rPr lang="fr-FR" sz="4800" b="1">
-                <a:solidFill>
-                  <a:schemeClr val="tx1"/>
-                </a:solidFill>
-                <a:latin typeface="CMU Serif"/>
-                <a:ea typeface="CMU Serif"/>
-                <a:cs typeface="CMU Serif"/>
-              </a:rPr>
-              <a:t>=</a:t>
-            </a:r>
-            <a:endParaRPr sz="4800" b="1">
-              <a:solidFill>
-                <a:schemeClr val="tx1"/>
-              </a:solidFill>
-              <a:latin typeface="CMU Serif"/>
-              <a:cs typeface="CMU Serif"/>
-            </a:endParaRPr>
-          </a:p>
-        </p:txBody>
-      </p:sp>
-      <p:grpSp>
-        <p:nvGrpSpPr>
-          <p:cNvPr id="1284129151" name=""/>
-          <p:cNvGrpSpPr/>
-          <p:nvPr/>
-        </p:nvGrpSpPr>
-        <p:grpSpPr bwMode="auto">
-          <a:xfrm rot="0" flipH="0" flipV="0">
-            <a:off x="18538996" y="5134973"/>
-            <a:ext cx="2713758" cy="646338"/>
-            <a:chOff x="0" y="0"/>
-            <a:chExt cx="2713758" cy="646338"/>
-          </a:xfrm>
-        </p:grpSpPr>
-        <p:sp>
-          <p:nvSpPr>
-            <p:cNvPr id="542542561" name=""/>
-            <p:cNvSpPr/>
-            <p:nvPr/>
-          </p:nvSpPr>
-          <p:spPr bwMode="auto">
-            <a:xfrm rot="0" flipH="0" flipV="0">
-              <a:off x="2067420" y="0"/>
-              <a:ext cx="646337" cy="646337"/>
-            </a:xfrm>
-            <a:prstGeom prst="ellipse">
-              <a:avLst/>
-            </a:prstGeom>
-            <a:solidFill>
-              <a:schemeClr val="bg1"/>
-            </a:solidFill>
-            <a:ln w="44450" cap="flat" cmpd="sng" algn="ctr">
-              <a:solidFill>
-                <a:srgbClr val="000000"/>
-              </a:solidFill>
-              <a:prstDash val="sysDot"/>
-              <a:miter lim="800000"/>
-            </a:ln>
-          </p:spPr>
-          <p:style>
-            <a:lnRef idx="2">
-              <a:schemeClr val="accent1">
-                <a:shade val="50000"/>
-              </a:schemeClr>
-            </a:lnRef>
-            <a:fillRef idx="1">
-              <a:schemeClr val="accent1"/>
-            </a:fillRef>
-            <a:effectRef idx="0">
-              <a:schemeClr val="accent1"/>
-            </a:effectRef>
-            <a:fontRef idx="minor">
-              <a:schemeClr val="lt1"/>
-            </a:fontRef>
-          </p:style>
-        </p:sp>
-        <p:sp>
-          <p:nvSpPr>
-            <p:cNvPr id="390393671" name=""/>
-            <p:cNvSpPr/>
-            <p:nvPr/>
-          </p:nvSpPr>
-          <p:spPr bwMode="auto">
-            <a:xfrm rot="10800000" flipH="0" flipV="0">
-              <a:off x="0" y="0"/>
-              <a:ext cx="646337" cy="646337"/>
-            </a:xfrm>
-            <a:prstGeom prst="ellipse">
-              <a:avLst/>
-            </a:prstGeom>
-            <a:solidFill>
-              <a:schemeClr val="bg1"/>
-            </a:solidFill>
-            <a:ln w="44450" cap="flat" cmpd="sng" algn="ctr">
-              <a:solidFill>
-                <a:srgbClr val="000000"/>
-              </a:solidFill>
-              <a:prstDash val="sysDot"/>
-              <a:miter lim="800000"/>
-            </a:ln>
-          </p:spPr>
-          <p:style>
-            <a:lnRef idx="2">
-              <a:schemeClr val="accent1">
-                <a:shade val="50000"/>
-              </a:schemeClr>
-            </a:lnRef>
-            <a:fillRef idx="1">
-              <a:schemeClr val="accent1"/>
-            </a:fillRef>
-            <a:effectRef idx="0">
-              <a:schemeClr val="accent1"/>
-            </a:effectRef>
-            <a:fontRef idx="minor">
-              <a:schemeClr val="lt1"/>
-            </a:fontRef>
-          </p:style>
-        </p:sp>
-        <p:cxnSp>
-          <p:nvCxnSpPr>
-            <p:cNvPr id="798033775" name=""/>
-            <p:cNvCxnSpPr/>
-            <p:nvPr/>
-          </p:nvCxnSpPr>
-          <p:spPr bwMode="auto">
-            <a:xfrm rot="10800000" flipH="0" flipV="0">
-              <a:off x="646337" y="323169"/>
-              <a:ext cx="1421082" cy="0"/>
-            </a:xfrm>
-            <a:prstGeom prst="line">
-              <a:avLst/>
-            </a:prstGeom>
-            <a:ln w="57150" cap="flat" cmpd="sng" algn="ctr">
-              <a:solidFill>
-                <a:srgbClr val="00FF73"/>
-              </a:solidFill>
-              <a:prstDash val="solid"/>
-              <a:miter lim="800000"/>
-            </a:ln>
-          </p:spPr>
-          <p:style>
-            <a:lnRef idx="1">
-              <a:schemeClr val="accent1">
-                <a:shade val="50000"/>
-              </a:schemeClr>
-            </a:lnRef>
-            <a:fillRef idx="0">
-              <a:schemeClr val="accent1"/>
-            </a:fillRef>
-            <a:effectRef idx="0">
-              <a:schemeClr val="accent1"/>
-            </a:effectRef>
-            <a:fontRef idx="minor">
-              <a:schemeClr val="tx1"/>
-            </a:fontRef>
-          </p:style>
-        </p:cxnSp>
-      </p:grpSp>
-      <p:sp>
-        <p:nvSpPr>
-          <p:cNvPr id="904782835" name=""/>
-          <p:cNvSpPr txBox="1"/>
-          <p:nvPr/>
-        </p:nvSpPr>
-        <p:spPr bwMode="auto">
-          <a:xfrm rot="0" flipH="0" flipV="0">
-            <a:off x="20757580" y="6077721"/>
-            <a:ext cx="647699" cy="366119"/>
-          </a:xfrm>
-          <a:prstGeom prst="rect">
-            <a:avLst/>
-          </a:prstGeom>
-          <a:noFill/>
-        </p:spPr>
-        <p:txBody>
-          <a:bodyPr vertOverflow="overflow" horzOverflow="overflow" vert="horz" wrap="square" lIns="91440" tIns="45720" rIns="91440" bIns="45720" numCol="1" spcCol="0" rtlCol="0" fromWordArt="0" anchor="t" anchorCtr="0" forceAA="0" upright="0" compatLnSpc="0">
-            <a:spAutoFit/>
-          </a:bodyPr>
-          <a:p>
-            <a:pPr>
-              <a:defRPr/>
-            </a:pPr>
-            <a:endParaRPr/>
-          </a:p>
-        </p:txBody>
-      </p:sp>
-      <p:sp>
-        <p:nvSpPr>
-          <p:cNvPr id="1413467146" name=""/>
-          <p:cNvSpPr txBox="1"/>
-          <p:nvPr/>
-        </p:nvSpPr>
-        <p:spPr bwMode="auto">
-          <a:xfrm rot="0" flipH="0" flipV="0">
-            <a:off x="17394276" y="3832257"/>
-            <a:ext cx="648059" cy="366119"/>
-          </a:xfrm>
-          <a:prstGeom prst="rect">
-            <a:avLst/>
-          </a:prstGeom>
-          <a:noFill/>
-        </p:spPr>
-        <p:txBody>
-          <a:bodyPr vertOverflow="overflow" horzOverflow="overflow" vert="horz" wrap="square" lIns="91440" tIns="45720" rIns="91440" bIns="45720" numCol="1" spcCol="0" rtlCol="0" fromWordArt="0" anchor="t" anchorCtr="0" forceAA="0" upright="0" compatLnSpc="0">
-            <a:spAutoFit/>
-          </a:bodyPr>
-          <a:p>
-            <a:pPr>
-              <a:defRPr/>
-            </a:pPr>
-            <a:endParaRPr/>
-          </a:p>
-        </p:txBody>
-      </p:sp>
-      <p:sp>
-        <p:nvSpPr>
-          <p:cNvPr id="1136975868" name=""/>
-          <p:cNvSpPr txBox="1"/>
-          <p:nvPr/>
-        </p:nvSpPr>
-        <p:spPr bwMode="auto">
-          <a:xfrm rot="0" flipH="0" flipV="0">
-            <a:off x="6878676" y="4613307"/>
-            <a:ext cx="648419" cy="366119"/>
-          </a:xfrm>
-          <a:prstGeom prst="rect">
-            <a:avLst/>
-          </a:prstGeom>
-          <a:noFill/>
-        </p:spPr>
-        <p:txBody>
-          <a:bodyPr vertOverflow="overflow" horzOverflow="overflow" vert="horz" wrap="square" lIns="91440" tIns="45720" rIns="91440" bIns="45720" numCol="1" spcCol="0" rtlCol="0" fromWordArt="0" anchor="t" anchorCtr="0" forceAA="0" upright="0" compatLnSpc="0">
-            <a:spAutoFit/>
-          </a:bodyPr>
-          <a:p>
-            <a:pPr>
-              <a:defRPr/>
-            </a:pPr>
-            <a:endParaRPr/>
-          </a:p>
-        </p:txBody>
-      </p:sp>
-      <p:sp>
-        <p:nvSpPr>
-          <p:cNvPr id="2011420539" name=""/>
-          <p:cNvSpPr txBox="1"/>
-          <p:nvPr/>
-        </p:nvSpPr>
-        <p:spPr bwMode="auto">
-          <a:xfrm rot="0" flipH="0" flipV="0">
-            <a:off x="6957673" y="7091508"/>
-            <a:ext cx="4348416" cy="457560"/>
-          </a:xfrm>
-          <a:prstGeom prst="rect">
-            <a:avLst/>
-          </a:prstGeom>
-          <a:noFill/>
-        </p:spPr>
-        <p:txBody>
-          <a:bodyPr vertOverflow="overflow" horzOverflow="overflow" vert="horz" wrap="square" lIns="91440" tIns="45720" rIns="91440" bIns="45720" numCol="1" spcCol="0" rtlCol="0" fromWordArt="0" anchor="t" anchorCtr="0" forceAA="0" upright="0" compatLnSpc="0">
-            <a:spAutoFit/>
-          </a:bodyPr>
-          <a:p>
-            <a:pPr marL="327935" indent="-327935" algn="ctr">
-              <a:buAutoNum type="alphaLcParenBoth"/>
-              <a:defRPr/>
-            </a:pPr>
-            <a:r>
-              <a:rPr lang="fr-FR" sz="2400" b="1">
-                <a:latin typeface="CMU Serif"/>
-                <a:ea typeface="CMU Serif"/>
-                <a:cs typeface="CMU Serif"/>
-              </a:rPr>
-              <a:t> XXXXXXXXXXXXX</a:t>
-            </a:r>
-            <a:endParaRPr sz="2400" b="1" i="0">
-              <a:latin typeface="CMU Serif"/>
-              <a:cs typeface="CMU Serif"/>
-            </a:endParaRPr>
-          </a:p>
-        </p:txBody>
-      </p:sp>
-      <p:sp>
-        <p:nvSpPr>
-          <p:cNvPr id="1324314389" name=""/>
-          <p:cNvSpPr txBox="1"/>
-          <p:nvPr/>
-        </p:nvSpPr>
-        <p:spPr bwMode="auto">
-          <a:xfrm rot="0" flipH="0" flipV="0">
-            <a:off x="12497544" y="7091508"/>
-            <a:ext cx="4513438" cy="457560"/>
-          </a:xfrm>
-          <a:prstGeom prst="rect">
-            <a:avLst/>
-          </a:prstGeom>
-          <a:noFill/>
-        </p:spPr>
-        <p:txBody>
-          <a:bodyPr vertOverflow="overflow" horzOverflow="overflow" vert="horz" wrap="square" lIns="91440" tIns="45720" rIns="91440" bIns="45720" numCol="1" spcCol="0" rtlCol="0" fromWordArt="0" anchor="t" anchorCtr="0" forceAA="0" upright="0" compatLnSpc="0">
-            <a:spAutoFit/>
-          </a:bodyPr>
-          <a:p>
-            <a:pPr algn="ctr">
-              <a:defRPr/>
-            </a:pPr>
-            <a:r>
-              <a:rPr lang="fr-FR" sz="2400" b="1">
-                <a:latin typeface="CMU Serif"/>
-                <a:ea typeface="CMU Serif"/>
-                <a:cs typeface="CMU Serif"/>
-              </a:rPr>
-              <a:t>(b) XXXXXXXXXXXXX</a:t>
-            </a:r>
-            <a:endParaRPr sz="2400" b="1" i="0">
-              <a:latin typeface="CMU Serif"/>
-              <a:cs typeface="CMU Serif"/>
-            </a:endParaRPr>
-          </a:p>
-        </p:txBody>
-      </p:sp>
-      <p:sp>
-        <p:nvSpPr>
-          <p:cNvPr id="296880483" name=""/>
-          <p:cNvSpPr txBox="1"/>
-          <p:nvPr/>
-        </p:nvSpPr>
-        <p:spPr bwMode="auto">
-          <a:xfrm rot="0" flipH="0" flipV="0">
-            <a:off x="17739891" y="7091508"/>
-            <a:ext cx="4208716" cy="457560"/>
-          </a:xfrm>
-          <a:prstGeom prst="rect">
-            <a:avLst/>
-          </a:prstGeom>
-          <a:noFill/>
-        </p:spPr>
-        <p:txBody>
-          <a:bodyPr vertOverflow="overflow" horzOverflow="overflow" vert="horz" wrap="square" lIns="91440" tIns="45720" rIns="91440" bIns="45720" numCol="1" spcCol="0" rtlCol="0" fromWordArt="0" anchor="t" anchorCtr="0" forceAA="0" upright="0" compatLnSpc="0">
-            <a:spAutoFit/>
-          </a:bodyPr>
-          <a:p>
-            <a:pPr algn="ctr">
-              <a:defRPr/>
-            </a:pPr>
-            <a:r>
-              <a:rPr lang="fr-FR" sz="2400" b="1">
-                <a:latin typeface="CMU Serif"/>
-                <a:ea typeface="CMU Serif"/>
-                <a:cs typeface="CMU Serif"/>
-              </a:rPr>
-              <a:t>(c) </a:t>
-            </a:r>
-            <a:r>
-              <a:rPr lang="fr-FR" sz="2400" b="1">
-                <a:latin typeface="CMU Serif"/>
-                <a:ea typeface="CMU Serif"/>
-                <a:cs typeface="CMU Serif"/>
-              </a:rPr>
-              <a:t>XXXXXXXXXXXXX</a:t>
-            </a:r>
-            <a:endParaRPr sz="2400" b="1" i="0">
-              <a:latin typeface="CMU Serif"/>
-              <a:cs typeface="CMU Serif"/>
-            </a:endParaRPr>
-          </a:p>
-        </p:txBody>
-      </p:sp>
-      <p:grpSp>
-        <p:nvGrpSpPr>
-          <p:cNvPr id="349939444" name=""/>
-          <p:cNvGrpSpPr/>
-          <p:nvPr/>
-        </p:nvGrpSpPr>
-        <p:grpSpPr bwMode="auto">
-          <a:xfrm>
-            <a:off x="17422023" y="7955828"/>
-            <a:ext cx="4526584" cy="427079"/>
-            <a:chOff x="0" y="0"/>
-            <a:chExt cx="4526584" cy="427079"/>
-          </a:xfrm>
-        </p:grpSpPr>
-        <p:cxnSp>
-          <p:nvCxnSpPr>
-            <p:cNvPr id="138996307" name=""/>
-            <p:cNvCxnSpPr/>
-            <p:nvPr/>
-          </p:nvCxnSpPr>
-          <p:spPr bwMode="auto">
-            <a:xfrm rot="0" flipH="1" flipV="0">
-              <a:off x="0" y="216957"/>
-              <a:ext cx="808166" cy="0"/>
-            </a:xfrm>
-            <a:prstGeom prst="line">
-              <a:avLst/>
-            </a:prstGeom>
-            <a:ln w="44450" cap="flat" cmpd="sng" algn="ctr">
-              <a:solidFill>
-                <a:srgbClr val="00FF73"/>
-              </a:solidFill>
-              <a:prstDash val="solid"/>
-              <a:miter lim="800000"/>
-            </a:ln>
-          </p:spPr>
-          <p:style>
-            <a:lnRef idx="1">
-              <a:schemeClr val="accent1">
-                <a:shade val="50000"/>
-              </a:schemeClr>
-            </a:lnRef>
-            <a:fillRef idx="0">
-              <a:schemeClr val="accent1"/>
-            </a:fillRef>
-            <a:effectRef idx="0">
-              <a:schemeClr val="accent1"/>
-            </a:effectRef>
-            <a:fontRef idx="minor">
-              <a:schemeClr val="tx1"/>
-            </a:fontRef>
-          </p:style>
-        </p:cxnSp>
-        <p:sp>
-          <p:nvSpPr>
-            <p:cNvPr id="296466058" name=""/>
+            <p:cNvPr id="476090664" name=""/>
             <p:cNvSpPr txBox="1"/>
             <p:nvPr/>
           </p:nvSpPr>
           <p:spPr bwMode="auto">
             <a:xfrm rot="0" flipH="0" flipV="0">
-              <a:off x="992833" y="0"/>
-              <a:ext cx="3533750" cy="427079"/>
+              <a:off x="9743844" y="1214224"/>
+              <a:ext cx="1435539" cy="823320"/>
+            </a:xfrm>
+            <a:prstGeom prst="rect">
+              <a:avLst/>
+            </a:prstGeom>
+            <a:noFill/>
+          </p:spPr>
+          <p:txBody>
+            <a:bodyPr vertOverflow="overflow" horzOverflow="overflow" vert="horz" wrap="square" lIns="91440" tIns="45720" rIns="91440" bIns="45720" numCol="1" spcCol="0" rtlCol="0" fromWordArt="0" anchor="t" anchorCtr="0" forceAA="0" upright="0" compatLnSpc="0">
+              <a:spAutoFit/>
+            </a:bodyPr>
+            <a:p>
+              <a:pPr algn="ctr">
+                <a:defRPr/>
+              </a:pPr>
+              <a:r>
+                <a:rPr lang="fr-FR" sz="4800" b="1">
+                  <a:solidFill>
+                    <a:schemeClr val="tx1"/>
+                  </a:solidFill>
+                  <a:latin typeface="CMU Serif"/>
+                  <a:ea typeface="CMU Serif"/>
+                  <a:cs typeface="CMU Serif"/>
+                </a:rPr>
+                <a:t>=</a:t>
+              </a:r>
+              <a:endParaRPr sz="4800" b="1">
+                <a:solidFill>
+                  <a:schemeClr val="tx1"/>
+                </a:solidFill>
+                <a:latin typeface="CMU Serif"/>
+                <a:cs typeface="CMU Serif"/>
+              </a:endParaRPr>
+            </a:p>
+          </p:txBody>
+        </p:sp>
+        <p:grpSp>
+          <p:nvGrpSpPr>
+            <p:cNvPr id="609976990" name=""/>
+            <p:cNvGrpSpPr/>
+            <p:nvPr/>
+          </p:nvGrpSpPr>
+          <p:grpSpPr bwMode="auto">
+            <a:xfrm rot="0" flipH="0" flipV="0">
+              <a:off x="11660319" y="1302715"/>
+              <a:ext cx="2713756" cy="646336"/>
+              <a:chOff x="0" y="0"/>
+              <a:chExt cx="2713756" cy="646336"/>
+            </a:xfrm>
+          </p:grpSpPr>
+          <p:sp>
+            <p:nvSpPr>
+              <p:cNvPr id="542542561" name=""/>
+              <p:cNvSpPr/>
+              <p:nvPr/>
+            </p:nvSpPr>
+            <p:spPr bwMode="auto">
+              <a:xfrm rot="0" flipH="0" flipV="0">
+                <a:off x="2067419" y="0"/>
+                <a:ext cx="646337" cy="646337"/>
+              </a:xfrm>
+              <a:prstGeom prst="ellipse">
+                <a:avLst/>
+              </a:prstGeom>
+              <a:solidFill>
+                <a:schemeClr val="bg1"/>
+              </a:solidFill>
+              <a:ln w="44450" cap="flat" cmpd="sng" algn="ctr">
+                <a:solidFill>
+                  <a:srgbClr val="000000"/>
+                </a:solidFill>
+                <a:prstDash val="sysDot"/>
+                <a:miter lim="800000"/>
+              </a:ln>
+            </p:spPr>
+            <p:style>
+              <a:lnRef idx="2">
+                <a:schemeClr val="accent1">
+                  <a:shade val="50000"/>
+                </a:schemeClr>
+              </a:lnRef>
+              <a:fillRef idx="1">
+                <a:schemeClr val="accent1"/>
+              </a:fillRef>
+              <a:effectRef idx="0">
+                <a:schemeClr val="accent1"/>
+              </a:effectRef>
+              <a:fontRef idx="minor">
+                <a:schemeClr val="lt1"/>
+              </a:fontRef>
+            </p:style>
+          </p:sp>
+          <p:sp>
+            <p:nvSpPr>
+              <p:cNvPr id="390393671" name=""/>
+              <p:cNvSpPr/>
+              <p:nvPr/>
+            </p:nvSpPr>
+            <p:spPr bwMode="auto">
+              <a:xfrm rot="10800000" flipH="0" flipV="0">
+                <a:off x="0" y="0"/>
+                <a:ext cx="646337" cy="646337"/>
+              </a:xfrm>
+              <a:prstGeom prst="ellipse">
+                <a:avLst/>
+              </a:prstGeom>
+              <a:solidFill>
+                <a:schemeClr val="bg1"/>
+              </a:solidFill>
+              <a:ln w="44450" cap="flat" cmpd="sng" algn="ctr">
+                <a:solidFill>
+                  <a:srgbClr val="000000"/>
+                </a:solidFill>
+                <a:prstDash val="sysDot"/>
+                <a:miter lim="800000"/>
+              </a:ln>
+            </p:spPr>
+            <p:style>
+              <a:lnRef idx="2">
+                <a:schemeClr val="accent1">
+                  <a:shade val="50000"/>
+                </a:schemeClr>
+              </a:lnRef>
+              <a:fillRef idx="1">
+                <a:schemeClr val="accent1"/>
+              </a:fillRef>
+              <a:effectRef idx="0">
+                <a:schemeClr val="accent1"/>
+              </a:effectRef>
+              <a:fontRef idx="minor">
+                <a:schemeClr val="lt1"/>
+              </a:fontRef>
+            </p:style>
+          </p:sp>
+          <p:cxnSp>
+            <p:nvCxnSpPr>
+              <p:cNvPr id="798033775" name=""/>
+              <p:cNvCxnSpPr/>
+              <p:nvPr/>
+            </p:nvCxnSpPr>
+            <p:spPr bwMode="auto">
+              <a:xfrm rot="10800000" flipH="0" flipV="0">
+                <a:off x="646336" y="323168"/>
+                <a:ext cx="1421082" cy="0"/>
+              </a:xfrm>
+              <a:prstGeom prst="line">
+                <a:avLst/>
+              </a:prstGeom>
+              <a:ln w="57150" cap="flat" cmpd="sng" algn="ctr">
+                <a:solidFill>
+                  <a:srgbClr val="00FF73"/>
+                </a:solidFill>
+                <a:prstDash val="solid"/>
+                <a:miter lim="800000"/>
+              </a:ln>
+            </p:spPr>
+            <p:style>
+              <a:lnRef idx="1">
+                <a:schemeClr val="accent1">
+                  <a:shade val="50000"/>
+                </a:schemeClr>
+              </a:lnRef>
+              <a:fillRef idx="0">
+                <a:schemeClr val="accent1"/>
+              </a:fillRef>
+              <a:effectRef idx="0">
+                <a:schemeClr val="accent1"/>
+              </a:effectRef>
+              <a:fontRef idx="minor">
+                <a:schemeClr val="tx1"/>
+              </a:fontRef>
+            </p:style>
+          </p:cxnSp>
+        </p:grpSp>
+        <p:sp>
+          <p:nvSpPr>
+            <p:cNvPr id="1981843927" name=""/>
+            <p:cNvSpPr txBox="1"/>
+            <p:nvPr/>
+          </p:nvSpPr>
+          <p:spPr bwMode="auto">
+            <a:xfrm rot="0" flipH="0" flipV="0">
+              <a:off x="13878903" y="2245463"/>
+              <a:ext cx="647699" cy="366119"/>
             </a:xfrm>
             <a:prstGeom prst="rect">
               <a:avLst/>
@@ -5865,34 +5716,178 @@
               <a:pPr>
                 <a:defRPr/>
               </a:pPr>
+              <a:endParaRPr/>
+            </a:p>
+          </p:txBody>
+        </p:sp>
+        <p:sp>
+          <p:nvSpPr>
+            <p:cNvPr id="115748145" name=""/>
+            <p:cNvSpPr txBox="1"/>
+            <p:nvPr/>
+          </p:nvSpPr>
+          <p:spPr bwMode="auto">
+            <a:xfrm rot="0" flipH="0" flipV="0">
+              <a:off x="10515600" y="0"/>
+              <a:ext cx="648059" cy="366119"/>
+            </a:xfrm>
+            <a:prstGeom prst="rect">
+              <a:avLst/>
+            </a:prstGeom>
+            <a:noFill/>
+          </p:spPr>
+          <p:txBody>
+            <a:bodyPr vertOverflow="overflow" horzOverflow="overflow" vert="horz" wrap="square" lIns="91440" tIns="45720" rIns="91440" bIns="45720" numCol="1" spcCol="0" rtlCol="0" fromWordArt="0" anchor="t" anchorCtr="0" forceAA="0" upright="0" compatLnSpc="0">
+              <a:spAutoFit/>
+            </a:bodyPr>
+            <a:p>
+              <a:pPr>
+                <a:defRPr/>
+              </a:pPr>
+              <a:endParaRPr/>
+            </a:p>
+          </p:txBody>
+        </p:sp>
+        <p:sp>
+          <p:nvSpPr>
+            <p:cNvPr id="1778301759" name=""/>
+            <p:cNvSpPr txBox="1"/>
+            <p:nvPr/>
+          </p:nvSpPr>
+          <p:spPr bwMode="auto">
+            <a:xfrm rot="0" flipH="0" flipV="0">
+              <a:off x="0" y="781049"/>
+              <a:ext cx="648419" cy="366119"/>
+            </a:xfrm>
+            <a:prstGeom prst="rect">
+              <a:avLst/>
+            </a:prstGeom>
+            <a:noFill/>
+          </p:spPr>
+          <p:txBody>
+            <a:bodyPr vertOverflow="overflow" horzOverflow="overflow" vert="horz" wrap="square" lIns="91440" tIns="45720" rIns="91440" bIns="45720" numCol="1" spcCol="0" rtlCol="0" fromWordArt="0" anchor="t" anchorCtr="0" forceAA="0" upright="0" compatLnSpc="0">
+              <a:spAutoFit/>
+            </a:bodyPr>
+            <a:p>
+              <a:pPr>
+                <a:defRPr/>
+              </a:pPr>
+              <a:endParaRPr/>
+            </a:p>
+          </p:txBody>
+        </p:sp>
+        <p:sp>
+          <p:nvSpPr>
+            <p:cNvPr id="1075470405" name=""/>
+            <p:cNvSpPr txBox="1"/>
+            <p:nvPr/>
+          </p:nvSpPr>
+          <p:spPr bwMode="auto">
+            <a:xfrm rot="0" flipH="0" flipV="0">
+              <a:off x="2006209" y="2943053"/>
+              <a:ext cx="711788" cy="518519"/>
+            </a:xfrm>
+            <a:prstGeom prst="rect">
+              <a:avLst/>
+            </a:prstGeom>
+            <a:noFill/>
+          </p:spPr>
+          <p:txBody>
+            <a:bodyPr vertOverflow="overflow" horzOverflow="overflow" vert="horz" wrap="square" lIns="91440" tIns="45720" rIns="91440" bIns="45720" numCol="1" spcCol="0" rtlCol="0" fromWordArt="0" anchor="t" anchorCtr="0" forceAA="0" upright="0" compatLnSpc="0">
+              <a:spAutoFit/>
+            </a:bodyPr>
+            <a:p>
+              <a:pPr algn="ctr">
+                <a:defRPr/>
+              </a:pPr>
               <a:r>
-                <a:rPr lang="fr-FR" sz="2200" b="1">
-                  <a:solidFill>
-                    <a:schemeClr val="tx1"/>
-                  </a:solidFill>
+                <a:rPr lang="fr-FR" sz="2800" b="1">
                   <a:latin typeface="CMU Serif"/>
                   <a:ea typeface="CMU Serif"/>
                   <a:cs typeface="CMU Serif"/>
                 </a:rPr>
-                <a:t>= Entanglement</a:t>
+                <a:t>(a)</a:t>
               </a:r>
+              <a:endParaRPr sz="2800" b="1" i="0">
+                <a:latin typeface="CMU Serif"/>
+                <a:cs typeface="CMU Serif"/>
+              </a:endParaRPr>
+            </a:p>
+          </p:txBody>
+        </p:sp>
+        <p:sp>
+          <p:nvSpPr>
+            <p:cNvPr id="291228878" name=""/>
+            <p:cNvSpPr txBox="1"/>
+            <p:nvPr/>
+          </p:nvSpPr>
+          <p:spPr bwMode="auto">
+            <a:xfrm rot="0" flipH="0" flipV="0">
+              <a:off x="7832265" y="2943053"/>
+              <a:ext cx="772182" cy="518519"/>
+            </a:xfrm>
+            <a:prstGeom prst="rect">
+              <a:avLst/>
+            </a:prstGeom>
+            <a:noFill/>
+          </p:spPr>
+          <p:txBody>
+            <a:bodyPr vertOverflow="overflow" horzOverflow="overflow" vert="horz" wrap="square" lIns="91440" tIns="45720" rIns="91440" bIns="45720" numCol="1" spcCol="0" rtlCol="0" fromWordArt="0" anchor="t" anchorCtr="0" forceAA="0" upright="0" compatLnSpc="0">
+              <a:spAutoFit/>
+            </a:bodyPr>
+            <a:p>
+              <a:pPr algn="ctr">
+                <a:defRPr/>
+              </a:pPr>
               <a:r>
-                <a:rPr lang="fr-FR" sz="2200" b="1">
-                  <a:solidFill>
-                    <a:schemeClr val="tx1"/>
-                  </a:solidFill>
+                <a:rPr lang="fr-FR" sz="2800" b="1">
                   <a:latin typeface="CMU Serif"/>
                   <a:ea typeface="CMU Serif"/>
                   <a:cs typeface="CMU Serif"/>
                 </a:rPr>
-                <a:t> Link</a:t>
+                <a:t>(b)</a:t>
               </a:r>
-              <a:endParaRPr lang="fr-FR" sz="2200" b="1">
-                <a:solidFill>
-                  <a:schemeClr val="tx1"/>
-                </a:solidFill>
+              <a:endParaRPr sz="2800" b="1" i="0">
                 <a:latin typeface="CMU Serif"/>
-                <a:ea typeface="CMU Serif"/>
+                <a:cs typeface="CMU Serif"/>
+              </a:endParaRPr>
+            </a:p>
+          </p:txBody>
+        </p:sp>
+        <p:sp>
+          <p:nvSpPr>
+            <p:cNvPr id="1381974184" name=""/>
+            <p:cNvSpPr txBox="1"/>
+            <p:nvPr/>
+          </p:nvSpPr>
+          <p:spPr bwMode="auto">
+            <a:xfrm rot="0" flipH="0" flipV="0">
+              <a:off x="12647644" y="2943053"/>
+              <a:ext cx="739828" cy="518519"/>
+            </a:xfrm>
+            <a:prstGeom prst="rect">
+              <a:avLst/>
+            </a:prstGeom>
+            <a:noFill/>
+          </p:spPr>
+          <p:txBody>
+            <a:bodyPr vertOverflow="overflow" horzOverflow="overflow" vert="horz" wrap="square" lIns="91440" tIns="45720" rIns="91440" bIns="45720" numCol="1" spcCol="0" rtlCol="0" fromWordArt="0" anchor="t" anchorCtr="0" forceAA="0" upright="0" compatLnSpc="0">
+              <a:spAutoFit/>
+            </a:bodyPr>
+            <a:p>
+              <a:pPr algn="ctr">
+                <a:defRPr/>
+              </a:pPr>
+              <a:r>
+                <a:rPr lang="fr-FR" sz="2800" b="1">
+                  <a:latin typeface="CMU Serif"/>
+                  <a:ea typeface="CMU Serif"/>
+                  <a:cs typeface="CMU Serif"/>
+                </a:rPr>
+                <a:t>(c)</a:t>
+              </a:r>
+              <a:endParaRPr sz="2800" b="1" i="0">
+                <a:latin typeface="CMU Serif"/>
                 <a:cs typeface="CMU Serif"/>
               </a:endParaRPr>
             </a:p>
@@ -5934,2521 +5929,16 @@
       </p:grpSpPr>
       <p:grpSp>
         <p:nvGrpSpPr>
-          <p:cNvPr id="1766704126" name=""/>
+          <p:cNvPr id="1706519780" name=""/>
           <p:cNvGrpSpPr/>
           <p:nvPr/>
         </p:nvGrpSpPr>
         <p:grpSpPr bwMode="auto">
           <a:xfrm rot="0" flipH="0" flipV="0">
-            <a:off x="9473355" y="11884860"/>
-            <a:ext cx="15675427" cy="5380375"/>
+            <a:off x="4905092" y="2579314"/>
+            <a:ext cx="19142209" cy="5708487"/>
             <a:chOff x="0" y="0"/>
-            <a:chExt cx="15675427" cy="5380375"/>
-          </a:xfrm>
-        </p:grpSpPr>
-        <p:grpSp>
-          <p:nvGrpSpPr>
-            <p:cNvPr id="1387127880" name=""/>
-            <p:cNvGrpSpPr/>
-            <p:nvPr/>
-          </p:nvGrpSpPr>
-          <p:grpSpPr bwMode="auto">
-            <a:xfrm>
-              <a:off x="0" y="0"/>
-              <a:ext cx="15494129" cy="5380375"/>
-              <a:chOff x="0" y="0"/>
-              <a:chExt cx="15494129" cy="5380375"/>
-            </a:xfrm>
-          </p:grpSpPr>
-          <p:grpSp>
-            <p:nvGrpSpPr>
-              <p:cNvPr id="1367443478" name=""/>
-              <p:cNvGrpSpPr/>
-              <p:nvPr/>
-            </p:nvGrpSpPr>
-            <p:grpSpPr bwMode="auto">
-              <a:xfrm rot="0" flipH="0" flipV="0">
-                <a:off x="0" y="0"/>
-                <a:ext cx="4419593" cy="4578460"/>
-                <a:chOff x="0" y="0"/>
-                <a:chExt cx="4419593" cy="4578460"/>
-              </a:xfrm>
-            </p:grpSpPr>
-            <p:grpSp>
-              <p:nvGrpSpPr>
-                <p:cNvPr id="1447600443" name=""/>
-                <p:cNvGrpSpPr/>
-                <p:nvPr/>
-              </p:nvGrpSpPr>
-              <p:grpSpPr bwMode="auto">
-                <a:xfrm rot="10800000">
-                  <a:off x="300086" y="1240945"/>
-                  <a:ext cx="3974220" cy="3337515"/>
-                  <a:chOff x="0" y="0"/>
-                  <a:chExt cx="3974220" cy="3337515"/>
-                </a:xfrm>
-              </p:grpSpPr>
-              <p:cxnSp>
-                <p:nvCxnSpPr>
-                  <p:cNvPr id="646056537" name=""/>
-                  <p:cNvCxnSpPr/>
-                  <p:nvPr/>
-                </p:nvCxnSpPr>
-                <p:spPr bwMode="auto">
-                  <a:xfrm rot="10800000" flipH="0" flipV="0">
-                    <a:off x="2436300" y="1668753"/>
-                    <a:ext cx="805230" cy="0"/>
-                  </a:xfrm>
-                  <a:prstGeom prst="line">
-                    <a:avLst/>
-                  </a:prstGeom>
-                  <a:ln w="38100" cap="flat" cmpd="sng" algn="ctr">
-                    <a:solidFill>
-                      <a:srgbClr val="000000"/>
-                    </a:solidFill>
-                    <a:prstDash val="solid"/>
-                    <a:miter lim="800000"/>
-                  </a:ln>
-                </p:spPr>
-                <p:style>
-                  <a:lnRef idx="1">
-                    <a:schemeClr val="accent1">
-                      <a:shade val="50000"/>
-                    </a:schemeClr>
-                  </a:lnRef>
-                  <a:fillRef idx="0">
-                    <a:schemeClr val="accent1"/>
-                  </a:fillRef>
-                  <a:effectRef idx="0">
-                    <a:schemeClr val="accent1"/>
-                  </a:effectRef>
-                  <a:fontRef idx="minor">
-                    <a:schemeClr val="tx1"/>
-                  </a:fontRef>
-                </p:style>
-              </p:cxnSp>
-              <p:cxnSp>
-                <p:nvCxnSpPr>
-                  <p:cNvPr id="1117192866" name=""/>
-                  <p:cNvCxnSpPr/>
-                  <p:nvPr/>
-                </p:nvCxnSpPr>
-                <p:spPr bwMode="auto">
-                  <a:xfrm rot="16199998" flipH="0" flipV="1">
-                    <a:off x="2370879" y="431758"/>
-                    <a:ext cx="1043366" cy="912529"/>
-                  </a:xfrm>
-                  <a:prstGeom prst="line">
-                    <a:avLst/>
-                  </a:prstGeom>
-                  <a:ln w="38100" cap="flat" cmpd="sng" algn="ctr">
-                    <a:solidFill>
-                      <a:srgbClr val="000000"/>
-                    </a:solidFill>
-                    <a:prstDash val="solid"/>
-                    <a:miter lim="800000"/>
-                  </a:ln>
-                </p:spPr>
-                <p:style>
-                  <a:lnRef idx="1">
-                    <a:schemeClr val="accent1">
-                      <a:shade val="50000"/>
-                    </a:schemeClr>
-                  </a:lnRef>
-                  <a:fillRef idx="0">
-                    <a:schemeClr val="accent1"/>
-                  </a:fillRef>
-                  <a:effectRef idx="0">
-                    <a:schemeClr val="accent1"/>
-                  </a:effectRef>
-                  <a:fontRef idx="minor">
-                    <a:schemeClr val="tx1"/>
-                  </a:fontRef>
-                </p:style>
-              </p:cxnSp>
-              <p:cxnSp>
-                <p:nvCxnSpPr>
-                  <p:cNvPr id="1004321018" name=""/>
-                  <p:cNvCxnSpPr/>
-                  <p:nvPr/>
-                </p:nvCxnSpPr>
-                <p:spPr bwMode="auto">
-                  <a:xfrm rot="5399997" flipH="0" flipV="0">
-                    <a:off x="2370881" y="1993221"/>
-                    <a:ext cx="1043364" cy="912529"/>
-                  </a:xfrm>
-                  <a:prstGeom prst="line">
-                    <a:avLst/>
-                  </a:prstGeom>
-                  <a:ln w="38100" cap="flat" cmpd="sng" algn="ctr">
-                    <a:solidFill>
-                      <a:srgbClr val="000000"/>
-                    </a:solidFill>
-                    <a:prstDash val="solid"/>
-                    <a:miter lim="800000"/>
-                  </a:ln>
-                </p:spPr>
-                <p:style>
-                  <a:lnRef idx="1">
-                    <a:schemeClr val="accent1">
-                      <a:shade val="50000"/>
-                    </a:schemeClr>
-                  </a:lnRef>
-                  <a:fillRef idx="0">
-                    <a:schemeClr val="accent1"/>
-                  </a:fillRef>
-                  <a:effectRef idx="0">
-                    <a:schemeClr val="accent1"/>
-                  </a:effectRef>
-                  <a:fontRef idx="minor">
-                    <a:schemeClr val="tx1"/>
-                  </a:fontRef>
-                </p:style>
-              </p:cxnSp>
-              <p:sp>
-                <p:nvSpPr>
-                  <p:cNvPr id="981816707" name=""/>
-                  <p:cNvSpPr/>
-                  <p:nvPr/>
-                </p:nvSpPr>
-                <p:spPr bwMode="auto">
-                  <a:xfrm rot="0" flipH="0" flipV="0">
-                    <a:off x="3241530" y="1302406"/>
-                    <a:ext cx="732690" cy="732690"/>
-                  </a:xfrm>
-                  <a:prstGeom prst="ellipse">
-                    <a:avLst/>
-                  </a:prstGeom>
-                  <a:solidFill>
-                    <a:srgbClr val="E173FF"/>
-                  </a:solidFill>
-                  <a:ln w="38100" cap="flat" cmpd="sng" algn="ctr">
-                    <a:solidFill>
-                      <a:srgbClr val="000000"/>
-                    </a:solidFill>
-                    <a:prstDash val="solid"/>
-                    <a:miter lim="800000"/>
-                  </a:ln>
-                </p:spPr>
-                <p:style>
-                  <a:lnRef idx="2">
-                    <a:schemeClr val="accent1">
-                      <a:shade val="50000"/>
-                    </a:schemeClr>
-                  </a:lnRef>
-                  <a:fillRef idx="1">
-                    <a:schemeClr val="accent1"/>
-                  </a:fillRef>
-                  <a:effectRef idx="0">
-                    <a:schemeClr val="accent1"/>
-                  </a:effectRef>
-                  <a:fontRef idx="minor">
-                    <a:schemeClr val="lt1"/>
-                  </a:fontRef>
-                </p:style>
-              </p:sp>
-              <p:cxnSp>
-                <p:nvCxnSpPr>
-                  <p:cNvPr id="264740111" name=""/>
-                  <p:cNvCxnSpPr/>
-                  <p:nvPr/>
-                </p:nvCxnSpPr>
-                <p:spPr bwMode="auto">
-                  <a:xfrm rot="10800000" flipH="0" flipV="0">
-                    <a:off x="732690" y="2971170"/>
-                    <a:ext cx="970920" cy="0"/>
-                  </a:xfrm>
-                  <a:prstGeom prst="line">
-                    <a:avLst/>
-                  </a:prstGeom>
-                  <a:ln w="38100" cap="flat" cmpd="sng" algn="ctr">
-                    <a:solidFill>
-                      <a:schemeClr val="tx1"/>
-                    </a:solidFill>
-                    <a:prstDash val="solid"/>
-                    <a:miter lim="800000"/>
-                  </a:ln>
-                </p:spPr>
-                <p:style>
-                  <a:lnRef idx="1">
-                    <a:schemeClr val="accent1">
-                      <a:shade val="50000"/>
-                    </a:schemeClr>
-                  </a:lnRef>
-                  <a:fillRef idx="0">
-                    <a:schemeClr val="accent1"/>
-                  </a:fillRef>
-                  <a:effectRef idx="0">
-                    <a:schemeClr val="accent1"/>
-                  </a:effectRef>
-                  <a:fontRef idx="minor">
-                    <a:schemeClr val="tx1"/>
-                  </a:fontRef>
-                </p:style>
-              </p:cxnSp>
-              <p:cxnSp>
-                <p:nvCxnSpPr>
-                  <p:cNvPr id="1404345879" name=""/>
-                  <p:cNvCxnSpPr/>
-                  <p:nvPr/>
-                </p:nvCxnSpPr>
-                <p:spPr bwMode="auto">
-                  <a:xfrm rot="10800000" flipH="0" flipV="1">
-                    <a:off x="732690" y="1668753"/>
-                    <a:ext cx="970920" cy="0"/>
-                  </a:xfrm>
-                  <a:prstGeom prst="line">
-                    <a:avLst/>
-                  </a:prstGeom>
-                  <a:ln w="38100" cap="flat" cmpd="sng" algn="ctr">
-                    <a:solidFill>
-                      <a:schemeClr val="tx1"/>
-                    </a:solidFill>
-                    <a:prstDash val="solid"/>
-                    <a:miter lim="800000"/>
-                  </a:ln>
-                </p:spPr>
-                <p:style>
-                  <a:lnRef idx="1">
-                    <a:schemeClr val="accent1">
-                      <a:shade val="50000"/>
-                    </a:schemeClr>
-                  </a:lnRef>
-                  <a:fillRef idx="0">
-                    <a:schemeClr val="accent1"/>
-                  </a:fillRef>
-                  <a:effectRef idx="0">
-                    <a:schemeClr val="accent1"/>
-                  </a:effectRef>
-                  <a:fontRef idx="minor">
-                    <a:schemeClr val="tx1"/>
-                  </a:fontRef>
-                </p:style>
-              </p:cxnSp>
-              <p:cxnSp>
-                <p:nvCxnSpPr>
-                  <p:cNvPr id="1540731748" name=""/>
-                  <p:cNvCxnSpPr/>
-                  <p:nvPr/>
-                </p:nvCxnSpPr>
-                <p:spPr bwMode="auto">
-                  <a:xfrm rot="10800000" flipH="0" flipV="0">
-                    <a:off x="732690" y="366345"/>
-                    <a:ext cx="970920" cy="0"/>
-                  </a:xfrm>
-                  <a:prstGeom prst="line">
-                    <a:avLst/>
-                  </a:prstGeom>
-                  <a:ln w="38100" cap="flat" cmpd="sng" algn="ctr">
-                    <a:solidFill>
-                      <a:schemeClr val="tx1"/>
-                    </a:solidFill>
-                    <a:prstDash val="solid"/>
-                    <a:miter lim="800000"/>
-                  </a:ln>
-                </p:spPr>
-                <p:style>
-                  <a:lnRef idx="1">
-                    <a:schemeClr val="accent1">
-                      <a:shade val="50000"/>
-                    </a:schemeClr>
-                  </a:lnRef>
-                  <a:fillRef idx="0">
-                    <a:schemeClr val="accent1"/>
-                  </a:fillRef>
-                  <a:effectRef idx="0">
-                    <a:schemeClr val="accent1"/>
-                  </a:effectRef>
-                  <a:fontRef idx="minor">
-                    <a:schemeClr val="tx1"/>
-                  </a:fontRef>
-                </p:style>
-              </p:cxnSp>
-              <p:grpSp>
-                <p:nvGrpSpPr>
-                  <p:cNvPr id="757852487" name=""/>
-                  <p:cNvGrpSpPr/>
-                  <p:nvPr/>
-                </p:nvGrpSpPr>
-                <p:grpSpPr bwMode="auto">
-                  <a:xfrm>
-                    <a:off x="0" y="0"/>
-                    <a:ext cx="732690" cy="3337515"/>
-                    <a:chOff x="0" y="0"/>
-                    <a:chExt cx="732690" cy="3337515"/>
-                  </a:xfrm>
-                </p:grpSpPr>
-                <p:sp>
-                  <p:nvSpPr>
-                    <p:cNvPr id="34744910" name=""/>
-                    <p:cNvSpPr/>
-                    <p:nvPr/>
-                  </p:nvSpPr>
-                  <p:spPr bwMode="auto">
-                    <a:xfrm rot="0" flipH="0" flipV="0">
-                      <a:off x="0" y="2604825"/>
-                      <a:ext cx="732690" cy="732690"/>
-                    </a:xfrm>
-                    <a:prstGeom prst="ellipse">
-                      <a:avLst/>
-                    </a:prstGeom>
-                    <a:solidFill>
-                      <a:srgbClr val="FF4C4C"/>
-                    </a:solidFill>
-                    <a:ln w="38100" cap="flat" cmpd="sng" algn="ctr">
-                      <a:solidFill>
-                        <a:srgbClr val="000000"/>
-                      </a:solidFill>
-                      <a:prstDash val="solid"/>
-                      <a:miter lim="800000"/>
-                    </a:ln>
-                  </p:spPr>
-                  <p:style>
-                    <a:lnRef idx="2">
-                      <a:schemeClr val="accent1">
-                        <a:shade val="50000"/>
-                      </a:schemeClr>
-                    </a:lnRef>
-                    <a:fillRef idx="1">
-                      <a:schemeClr val="accent1"/>
-                    </a:fillRef>
-                    <a:effectRef idx="0">
-                      <a:schemeClr val="accent1"/>
-                    </a:effectRef>
-                    <a:fontRef idx="minor">
-                      <a:schemeClr val="lt1"/>
-                    </a:fontRef>
-                  </p:style>
-                </p:sp>
-                <p:sp>
-                  <p:nvSpPr>
-                    <p:cNvPr id="614265771" name=""/>
-                    <p:cNvSpPr/>
-                    <p:nvPr/>
-                  </p:nvSpPr>
-                  <p:spPr bwMode="auto">
-                    <a:xfrm rot="0" flipH="0" flipV="0">
-                      <a:off x="0" y="1302406"/>
-                      <a:ext cx="732690" cy="732690"/>
-                    </a:xfrm>
-                    <a:prstGeom prst="ellipse">
-                      <a:avLst/>
-                    </a:prstGeom>
-                    <a:solidFill>
-                      <a:srgbClr val="FF4C4C"/>
-                    </a:solidFill>
-                    <a:ln w="38100" cap="flat" cmpd="sng" algn="ctr">
-                      <a:solidFill>
-                        <a:srgbClr val="000000"/>
-                      </a:solidFill>
-                      <a:prstDash val="solid"/>
-                      <a:miter lim="800000"/>
-                    </a:ln>
-                  </p:spPr>
-                  <p:style>
-                    <a:lnRef idx="2">
-                      <a:schemeClr val="accent1">
-                        <a:shade val="50000"/>
-                      </a:schemeClr>
-                    </a:lnRef>
-                    <a:fillRef idx="1">
-                      <a:schemeClr val="accent1"/>
-                    </a:fillRef>
-                    <a:effectRef idx="0">
-                      <a:schemeClr val="accent1"/>
-                    </a:effectRef>
-                    <a:fontRef idx="minor">
-                      <a:schemeClr val="lt1"/>
-                    </a:fontRef>
-                  </p:style>
-                </p:sp>
-                <p:sp>
-                  <p:nvSpPr>
-                    <p:cNvPr id="1483676357" name=""/>
-                    <p:cNvSpPr/>
-                    <p:nvPr/>
-                  </p:nvSpPr>
-                  <p:spPr bwMode="auto">
-                    <a:xfrm rot="0" flipH="0" flipV="0">
-                      <a:off x="0" y="0"/>
-                      <a:ext cx="732690" cy="732690"/>
-                    </a:xfrm>
-                    <a:prstGeom prst="ellipse">
-                      <a:avLst/>
-                    </a:prstGeom>
-                    <a:solidFill>
-                      <a:srgbClr val="FF4C4C"/>
-                    </a:solidFill>
-                    <a:ln w="38100" cap="flat" cmpd="sng" algn="ctr">
-                      <a:solidFill>
-                        <a:srgbClr val="000000"/>
-                      </a:solidFill>
-                      <a:prstDash val="solid"/>
-                      <a:miter lim="800000"/>
-                    </a:ln>
-                  </p:spPr>
-                  <p:style>
-                    <a:lnRef idx="2">
-                      <a:schemeClr val="accent1">
-                        <a:shade val="50000"/>
-                      </a:schemeClr>
-                    </a:lnRef>
-                    <a:fillRef idx="1">
-                      <a:schemeClr val="accent1"/>
-                    </a:fillRef>
-                    <a:effectRef idx="0">
-                      <a:schemeClr val="accent1"/>
-                    </a:effectRef>
-                    <a:fontRef idx="minor">
-                      <a:schemeClr val="lt1"/>
-                    </a:fontRef>
-                  </p:style>
-                </p:sp>
-              </p:grpSp>
-              <p:grpSp>
-                <p:nvGrpSpPr>
-                  <p:cNvPr id="569130598" name=""/>
-                  <p:cNvGrpSpPr/>
-                  <p:nvPr/>
-                </p:nvGrpSpPr>
-                <p:grpSpPr bwMode="auto">
-                  <a:xfrm>
-                    <a:off x="1703610" y="0"/>
-                    <a:ext cx="732690" cy="3337515"/>
-                    <a:chOff x="0" y="0"/>
-                    <a:chExt cx="732690" cy="3337515"/>
-                  </a:xfrm>
-                </p:grpSpPr>
-                <p:sp>
-                  <p:nvSpPr>
-                    <p:cNvPr id="1602059064" name=""/>
-                    <p:cNvSpPr/>
-                    <p:nvPr/>
-                  </p:nvSpPr>
-                  <p:spPr bwMode="auto">
-                    <a:xfrm rot="0" flipH="0" flipV="0">
-                      <a:off x="0" y="2604825"/>
-                      <a:ext cx="732690" cy="732690"/>
-                    </a:xfrm>
-                    <a:prstGeom prst="ellipse">
-                      <a:avLst/>
-                    </a:prstGeom>
-                    <a:solidFill>
-                      <a:srgbClr val="FFC926"/>
-                    </a:solidFill>
-                    <a:ln w="38100" cap="flat" cmpd="sng" algn="ctr">
-                      <a:solidFill>
-                        <a:schemeClr val="tx1"/>
-                      </a:solidFill>
-                      <a:prstDash val="sysDash"/>
-                      <a:miter lim="800000"/>
-                    </a:ln>
-                  </p:spPr>
-                  <p:style>
-                    <a:lnRef idx="2">
-                      <a:schemeClr val="accent1">
-                        <a:shade val="50000"/>
-                      </a:schemeClr>
-                    </a:lnRef>
-                    <a:fillRef idx="1">
-                      <a:schemeClr val="accent1"/>
-                    </a:fillRef>
-                    <a:effectRef idx="0">
-                      <a:schemeClr val="accent1"/>
-                    </a:effectRef>
-                    <a:fontRef idx="minor">
-                      <a:schemeClr val="lt1"/>
-                    </a:fontRef>
-                  </p:style>
-                </p:sp>
-                <p:sp>
-                  <p:nvSpPr>
-                    <p:cNvPr id="1528945361" name=""/>
-                    <p:cNvSpPr/>
-                    <p:nvPr/>
-                  </p:nvSpPr>
-                  <p:spPr bwMode="auto">
-                    <a:xfrm rot="0" flipH="0" flipV="0">
-                      <a:off x="0" y="1302406"/>
-                      <a:ext cx="732690" cy="732690"/>
-                    </a:xfrm>
-                    <a:prstGeom prst="ellipse">
-                      <a:avLst/>
-                    </a:prstGeom>
-                    <a:solidFill>
-                      <a:srgbClr val="FFC926"/>
-                    </a:solidFill>
-                    <a:ln w="38100" cap="flat" cmpd="sng" algn="ctr">
-                      <a:solidFill>
-                        <a:schemeClr val="tx1"/>
-                      </a:solidFill>
-                      <a:prstDash val="sysDash"/>
-                      <a:miter lim="800000"/>
-                    </a:ln>
-                  </p:spPr>
-                  <p:style>
-                    <a:lnRef idx="2">
-                      <a:schemeClr val="accent1">
-                        <a:shade val="50000"/>
-                      </a:schemeClr>
-                    </a:lnRef>
-                    <a:fillRef idx="1">
-                      <a:schemeClr val="accent1"/>
-                    </a:fillRef>
-                    <a:effectRef idx="0">
-                      <a:schemeClr val="accent1"/>
-                    </a:effectRef>
-                    <a:fontRef idx="minor">
-                      <a:schemeClr val="lt1"/>
-                    </a:fontRef>
-                  </p:style>
-                </p:sp>
-                <p:sp>
-                  <p:nvSpPr>
-                    <p:cNvPr id="991956603" name=""/>
-                    <p:cNvSpPr/>
-                    <p:nvPr/>
-                  </p:nvSpPr>
-                  <p:spPr bwMode="auto">
-                    <a:xfrm rot="0" flipH="0" flipV="0">
-                      <a:off x="0" y="0"/>
-                      <a:ext cx="732690" cy="732690"/>
-                    </a:xfrm>
-                    <a:prstGeom prst="ellipse">
-                      <a:avLst/>
-                    </a:prstGeom>
-                    <a:solidFill>
-                      <a:srgbClr val="FFC926"/>
-                    </a:solidFill>
-                    <a:ln w="38100" cap="flat" cmpd="sng" algn="ctr">
-                      <a:solidFill>
-                        <a:schemeClr val="tx1"/>
-                      </a:solidFill>
-                      <a:prstDash val="sysDash"/>
-                      <a:miter lim="800000"/>
-                    </a:ln>
-                  </p:spPr>
-                  <p:style>
-                    <a:lnRef idx="2">
-                      <a:schemeClr val="accent1">
-                        <a:shade val="50000"/>
-                      </a:schemeClr>
-                    </a:lnRef>
-                    <a:fillRef idx="1">
-                      <a:schemeClr val="accent1"/>
-                    </a:fillRef>
-                    <a:effectRef idx="0">
-                      <a:schemeClr val="accent1"/>
-                    </a:effectRef>
-                    <a:fontRef idx="minor">
-                      <a:schemeClr val="lt1"/>
-                    </a:fontRef>
-                  </p:style>
-                </p:sp>
-              </p:grpSp>
-            </p:grpSp>
-            <p:grpSp>
-              <p:nvGrpSpPr>
-                <p:cNvPr id="947574836" name=""/>
-                <p:cNvGrpSpPr/>
-                <p:nvPr/>
-              </p:nvGrpSpPr>
-              <p:grpSpPr bwMode="auto">
-                <a:xfrm>
-                  <a:off x="495296" y="0"/>
-                  <a:ext cx="3924297" cy="1066378"/>
-                  <a:chOff x="0" y="0"/>
-                  <a:chExt cx="3924297" cy="1066378"/>
-                </a:xfrm>
-              </p:grpSpPr>
-              <p:sp>
-                <p:nvSpPr>
-                  <p:cNvPr id="4675470" name=""/>
-                  <p:cNvSpPr/>
-                  <p:nvPr/>
-                </p:nvSpPr>
-                <p:spPr bwMode="auto">
-                  <a:xfrm rot="5400000" flipH="0" flipV="0">
-                    <a:off x="1851862" y="-1006056"/>
-                    <a:ext cx="220572" cy="3924297"/>
-                  </a:xfrm>
-                  <a:prstGeom prst="leftBrace">
-                    <a:avLst>
-                      <a:gd name="adj1" fmla="val 101801"/>
-                      <a:gd name="adj2" fmla="val 50000"/>
-                    </a:avLst>
-                  </a:prstGeom>
-                  <a:ln w="38100" cap="flat" cmpd="sng" algn="ctr">
-                    <a:solidFill>
-                      <a:schemeClr val="tx1"/>
-                    </a:solidFill>
-                    <a:prstDash val="solid"/>
-                    <a:miter lim="800000"/>
-                  </a:ln>
-                </p:spPr>
-                <p:style>
-                  <a:lnRef idx="1">
-                    <a:schemeClr val="accent1">
-                      <a:shade val="50000"/>
-                    </a:schemeClr>
-                  </a:lnRef>
-                  <a:fillRef idx="0">
-                    <a:schemeClr val="accent1"/>
-                  </a:fillRef>
-                  <a:effectRef idx="0">
-                    <a:schemeClr val="accent1"/>
-                  </a:effectRef>
-                  <a:fontRef idx="minor">
-                    <a:schemeClr val="tx1"/>
-                  </a:fontRef>
-                </p:style>
-              </p:sp>
-              <p:sp>
-                <p:nvSpPr>
-                  <p:cNvPr id="1657431098" name=""/>
-                  <p:cNvSpPr txBox="1"/>
-                  <p:nvPr/>
-                </p:nvSpPr>
-                <p:spPr bwMode="auto">
-                  <a:xfrm rot="0" flipH="0" flipV="0">
-                    <a:off x="1268190" y="0"/>
-                    <a:ext cx="1401595" cy="762897"/>
-                  </a:xfrm>
-                  <a:prstGeom prst="rect">
-                    <a:avLst/>
-                  </a:prstGeom>
-                  <a:noFill/>
-                </p:spPr>
-                <p:txBody>
-                  <a:bodyPr vertOverflow="overflow" horzOverflow="overflow" vert="horz" wrap="square" lIns="91440" tIns="45720" rIns="91440" bIns="45720" numCol="1" spcCol="0" rtlCol="0" fromWordArt="0" anchor="t" anchorCtr="0" forceAA="0" upright="0" compatLnSpc="0">
-                    <a:spAutoFit/>
-                  </a:bodyPr>
-                  <a:p>
-                    <a:pPr algn="ctr">
-                      <a:defRPr/>
-                    </a:pPr>
-                    <a:r>
-                      <a:rPr lang="fr-FR" sz="2200" b="0">
-                        <a:latin typeface="CMU Serif"/>
-                        <a:ea typeface="CMU Serif"/>
-                        <a:cs typeface="CMU Serif"/>
-                      </a:rPr>
-                      <a:t>Half-RGS</a:t>
-                    </a:r>
-                    <a:br>
-                      <a:rPr sz="2200" b="0">
-                        <a:latin typeface="CMU Serif"/>
-                        <a:cs typeface="CMU Serif"/>
-                      </a:rPr>
-                    </a:br>
-                    <a:r>
-                      <a:rPr lang="fr-FR" sz="2200" b="0">
-                        <a:latin typeface="CMU Serif"/>
-                        <a:cs typeface="CMU Serif"/>
-                      </a:rPr>
-                      <a:t>(</a:t>
-                    </a:r>
-                    <a:r>
-                      <a:rPr lang="fr-FR" sz="2200" b="0" i="1" u="none" strike="noStrike" cap="none" spc="0">
-                        <a:solidFill>
-                          <a:schemeClr val="tx1"/>
-                        </a:solidFill>
-                        <a:latin typeface="CMU Serif"/>
-                        <a:ea typeface="CMU Serif"/>
-                        <a:cs typeface="CMU Serif"/>
-                      </a:rPr>
-                      <a:t>m </a:t>
-                    </a:r>
-                    <a:r>
-                      <a:rPr lang="fr-FR" sz="2200" b="0" i="0" u="none" strike="noStrike" cap="none" spc="0">
-                        <a:solidFill>
-                          <a:schemeClr val="tx1"/>
-                        </a:solidFill>
-                        <a:latin typeface="CMU Serif"/>
-                        <a:ea typeface="CMU Serif"/>
-                        <a:cs typeface="CMU Serif"/>
-                      </a:rPr>
-                      <a:t>arms)</a:t>
-                    </a:r>
-                    <a:endParaRPr sz="2200" b="0">
-                      <a:latin typeface="CMU Serif"/>
-                      <a:cs typeface="CMU Serif"/>
-                    </a:endParaRPr>
-                  </a:p>
-                </p:txBody>
-              </p:sp>
-            </p:grpSp>
-            <p:sp>
-              <p:nvSpPr>
-                <p:cNvPr id="1871346867" name=""/>
-                <p:cNvSpPr txBox="1"/>
-                <p:nvPr/>
-              </p:nvSpPr>
-              <p:spPr bwMode="auto">
-                <a:xfrm rot="5400000" flipH="0" flipV="0">
-                  <a:off x="2878667" y="3254227"/>
-                  <a:ext cx="668323" cy="640440"/>
-                </a:xfrm>
-                <a:prstGeom prst="rect">
-                  <a:avLst/>
-                </a:prstGeom>
-                <a:noFill/>
-              </p:spPr>
-              <p:txBody>
-                <a:bodyPr vertOverflow="overflow" horzOverflow="overflow" vert="horz" wrap="square" lIns="91440" tIns="45720" rIns="91440" bIns="45720" numCol="1" spcCol="0" rtlCol="0" fromWordArt="0" anchor="t" anchorCtr="0" forceAA="0" upright="0" compatLnSpc="0">
-                  <a:spAutoFit/>
-                </a:bodyPr>
-                <a:p>
-                  <a:pPr>
-                    <a:defRPr/>
-                  </a:pPr>
-                  <a:r>
-                    <a:rPr lang="fr-FR" sz="3600" b="1" i="0" u="none" strike="noStrike" cap="none" spc="0">
-                      <a:solidFill>
-                        <a:schemeClr val="tx1"/>
-                      </a:solidFill>
-                      <a:latin typeface="Arial"/>
-                      <a:ea typeface="Arial"/>
-                      <a:cs typeface="Arial"/>
-                    </a:rPr>
-                    <a:t>…</a:t>
-                  </a:r>
-                  <a:endParaRPr sz="3600" b="1"/>
-                </a:p>
-              </p:txBody>
-            </p:sp>
-            <p:sp>
-              <p:nvSpPr>
-                <p:cNvPr id="2064214414" name=""/>
-                <p:cNvSpPr txBox="1"/>
-                <p:nvPr/>
-              </p:nvSpPr>
-              <p:spPr bwMode="auto">
-                <a:xfrm rot="0" flipH="0" flipV="0">
-                  <a:off x="0" y="3499238"/>
-                  <a:ext cx="1288023" cy="762359"/>
-                </a:xfrm>
-                <a:prstGeom prst="rect">
-                  <a:avLst/>
-                </a:prstGeom>
-                <a:noFill/>
-              </p:spPr>
-              <p:txBody>
-                <a:bodyPr vertOverflow="overflow" horzOverflow="overflow" vert="horz" wrap="square" lIns="91440" tIns="45720" rIns="91440" bIns="45720" numCol="1" spcCol="0" rtlCol="0" fromWordArt="0" anchor="t" anchorCtr="0" forceAA="0" upright="0" compatLnSpc="0">
-                  <a:spAutoFit/>
-                </a:bodyPr>
-                <a:p>
-                  <a:pPr algn="ctr">
-                    <a:defRPr/>
-                  </a:pPr>
-                  <a:r>
-                    <a:rPr lang="fr-FR" sz="2200" b="1" i="0">
-                      <a:solidFill>
-                        <a:srgbClr val="DB4CFF"/>
-                      </a:solidFill>
-                      <a:latin typeface="CMU Serif"/>
-                      <a:ea typeface="CMU Serif"/>
-                      <a:cs typeface="CMU Serif"/>
-                    </a:rPr>
-                    <a:t>Anchor qubit</a:t>
-                  </a:r>
-                  <a:endParaRPr sz="2200" b="1" i="0">
-                    <a:solidFill>
-                      <a:srgbClr val="DB4CFF"/>
-                    </a:solidFill>
-                    <a:latin typeface="CMU Serif"/>
-                    <a:cs typeface="CMU Serif"/>
-                  </a:endParaRPr>
-                </a:p>
-              </p:txBody>
-            </p:sp>
-          </p:grpSp>
-          <p:grpSp>
-            <p:nvGrpSpPr>
-              <p:cNvPr id="1730090906" name=""/>
-              <p:cNvGrpSpPr/>
-              <p:nvPr/>
-            </p:nvGrpSpPr>
-            <p:grpSpPr bwMode="auto">
-              <a:xfrm rot="0" flipH="0" flipV="0">
-                <a:off x="6255239" y="1237590"/>
-                <a:ext cx="9238889" cy="3337515"/>
-                <a:chOff x="0" y="0"/>
-                <a:chExt cx="9238889" cy="3337515"/>
-              </a:xfrm>
-            </p:grpSpPr>
-            <p:grpSp>
-              <p:nvGrpSpPr>
-                <p:cNvPr id="182765170" name=""/>
-                <p:cNvGrpSpPr/>
-                <p:nvPr/>
-              </p:nvGrpSpPr>
-              <p:grpSpPr bwMode="auto">
-                <a:xfrm>
-                  <a:off x="0" y="0"/>
-                  <a:ext cx="9238889" cy="3337515"/>
-                  <a:chOff x="0" y="0"/>
-                  <a:chExt cx="9238889" cy="3337515"/>
-                </a:xfrm>
-              </p:grpSpPr>
-              <p:cxnSp>
-                <p:nvCxnSpPr>
-                  <p:cNvPr id="1409867181" name=""/>
-                  <p:cNvCxnSpPr/>
-                  <p:nvPr/>
-                </p:nvCxnSpPr>
-                <p:spPr bwMode="auto">
-                  <a:xfrm rot="0" flipH="0" flipV="1">
-                    <a:off x="3974225" y="1668757"/>
-                    <a:ext cx="1290442" cy="0"/>
-                  </a:xfrm>
-                  <a:prstGeom prst="line">
-                    <a:avLst/>
-                  </a:prstGeom>
-                  <a:ln w="50800" cap="flat" cmpd="sng" algn="ctr">
-                    <a:solidFill>
-                      <a:srgbClr val="FF9900"/>
-                    </a:solidFill>
-                    <a:prstDash val="solid"/>
-                    <a:miter lim="800000"/>
-                  </a:ln>
-                </p:spPr>
-                <p:style>
-                  <a:lnRef idx="1">
-                    <a:schemeClr val="accent1">
-                      <a:shade val="50000"/>
-                    </a:schemeClr>
-                  </a:lnRef>
-                  <a:fillRef idx="0">
-                    <a:schemeClr val="accent1"/>
-                  </a:fillRef>
-                  <a:effectRef idx="0">
-                    <a:schemeClr val="accent1"/>
-                  </a:effectRef>
-                  <a:fontRef idx="minor">
-                    <a:schemeClr val="tx1"/>
-                  </a:fontRef>
-                </p:style>
-              </p:cxnSp>
-              <p:grpSp>
-                <p:nvGrpSpPr>
-                  <p:cNvPr id="1024688950" name=""/>
-                  <p:cNvGrpSpPr/>
-                  <p:nvPr/>
-                </p:nvGrpSpPr>
-                <p:grpSpPr bwMode="auto">
-                  <a:xfrm>
-                    <a:off x="0" y="0"/>
-                    <a:ext cx="3974220" cy="3337515"/>
-                    <a:chOff x="0" y="0"/>
-                    <a:chExt cx="3974220" cy="3337515"/>
-                  </a:xfrm>
-                </p:grpSpPr>
-                <p:cxnSp>
-                  <p:nvCxnSpPr>
-                    <p:cNvPr id="1254372657" name=""/>
-                    <p:cNvCxnSpPr/>
-                    <p:nvPr/>
-                  </p:nvCxnSpPr>
-                  <p:spPr bwMode="auto">
-                    <a:xfrm rot="10800000" flipH="0" flipV="0">
-                      <a:off x="2436300" y="1668754"/>
-                      <a:ext cx="805230" cy="0"/>
-                    </a:xfrm>
-                    <a:prstGeom prst="line">
-                      <a:avLst/>
-                    </a:prstGeom>
-                    <a:ln w="38100" cap="flat" cmpd="sng" algn="ctr">
-                      <a:solidFill>
-                        <a:srgbClr val="000000"/>
-                      </a:solidFill>
-                      <a:prstDash val="solid"/>
-                      <a:miter lim="800000"/>
-                    </a:ln>
-                  </p:spPr>
-                  <p:style>
-                    <a:lnRef idx="1">
-                      <a:schemeClr val="accent1">
-                        <a:shade val="50000"/>
-                      </a:schemeClr>
-                    </a:lnRef>
-                    <a:fillRef idx="0">
-                      <a:schemeClr val="accent1"/>
-                    </a:fillRef>
-                    <a:effectRef idx="0">
-                      <a:schemeClr val="accent1"/>
-                    </a:effectRef>
-                    <a:fontRef idx="minor">
-                      <a:schemeClr val="tx1"/>
-                    </a:fontRef>
-                  </p:style>
-                </p:cxnSp>
-                <p:cxnSp>
-                  <p:nvCxnSpPr>
-                    <p:cNvPr id="964976295" name=""/>
-                    <p:cNvCxnSpPr/>
-                    <p:nvPr/>
-                  </p:nvCxnSpPr>
-                  <p:spPr bwMode="auto">
-                    <a:xfrm rot="16199998" flipH="0" flipV="1">
-                      <a:off x="2370881" y="431760"/>
-                      <a:ext cx="1043366" cy="912529"/>
-                    </a:xfrm>
-                    <a:prstGeom prst="line">
-                      <a:avLst/>
-                    </a:prstGeom>
-                    <a:ln w="38100" cap="flat" cmpd="sng" algn="ctr">
-                      <a:solidFill>
-                        <a:srgbClr val="000000"/>
-                      </a:solidFill>
-                      <a:prstDash val="solid"/>
-                      <a:miter lim="800000"/>
-                    </a:ln>
-                  </p:spPr>
-                  <p:style>
-                    <a:lnRef idx="1">
-                      <a:schemeClr val="accent1">
-                        <a:shade val="50000"/>
-                      </a:schemeClr>
-                    </a:lnRef>
-                    <a:fillRef idx="0">
-                      <a:schemeClr val="accent1"/>
-                    </a:fillRef>
-                    <a:effectRef idx="0">
-                      <a:schemeClr val="accent1"/>
-                    </a:effectRef>
-                    <a:fontRef idx="minor">
-                      <a:schemeClr val="tx1"/>
-                    </a:fontRef>
-                  </p:style>
-                </p:cxnSp>
-                <p:cxnSp>
-                  <p:nvCxnSpPr>
-                    <p:cNvPr id="1449603712" name=""/>
-                    <p:cNvCxnSpPr/>
-                    <p:nvPr/>
-                  </p:nvCxnSpPr>
-                  <p:spPr bwMode="auto">
-                    <a:xfrm rot="5399997" flipH="0" flipV="0">
-                      <a:off x="2370882" y="1993221"/>
-                      <a:ext cx="1043364" cy="912529"/>
-                    </a:xfrm>
-                    <a:prstGeom prst="line">
-                      <a:avLst/>
-                    </a:prstGeom>
-                    <a:ln w="38100" cap="flat" cmpd="sng" algn="ctr">
-                      <a:solidFill>
-                        <a:srgbClr val="000000"/>
-                      </a:solidFill>
-                      <a:prstDash val="solid"/>
-                      <a:miter lim="800000"/>
-                    </a:ln>
-                  </p:spPr>
-                  <p:style>
-                    <a:lnRef idx="1">
-                      <a:schemeClr val="accent1">
-                        <a:shade val="50000"/>
-                      </a:schemeClr>
-                    </a:lnRef>
-                    <a:fillRef idx="0">
-                      <a:schemeClr val="accent1"/>
-                    </a:fillRef>
-                    <a:effectRef idx="0">
-                      <a:schemeClr val="accent1"/>
-                    </a:effectRef>
-                    <a:fontRef idx="minor">
-                      <a:schemeClr val="tx1"/>
-                    </a:fontRef>
-                  </p:style>
-                </p:cxnSp>
-                <p:sp>
-                  <p:nvSpPr>
-                    <p:cNvPr id="919123189" name=""/>
-                    <p:cNvSpPr/>
-                    <p:nvPr/>
-                  </p:nvSpPr>
-                  <p:spPr bwMode="auto">
-                    <a:xfrm rot="0" flipH="0" flipV="0">
-                      <a:off x="3241530" y="1302409"/>
-                      <a:ext cx="732690" cy="732690"/>
-                    </a:xfrm>
-                    <a:prstGeom prst="ellipse">
-                      <a:avLst/>
-                    </a:prstGeom>
-                    <a:solidFill>
-                      <a:srgbClr val="E173FF"/>
-                    </a:solidFill>
-                    <a:ln w="38100" cap="flat" cmpd="sng" algn="ctr">
-                      <a:solidFill>
-                        <a:srgbClr val="000000"/>
-                      </a:solidFill>
-                      <a:prstDash val="solid"/>
-                      <a:miter lim="800000"/>
-                    </a:ln>
-                  </p:spPr>
-                  <p:style>
-                    <a:lnRef idx="2">
-                      <a:schemeClr val="accent1">
-                        <a:shade val="50000"/>
-                      </a:schemeClr>
-                    </a:lnRef>
-                    <a:fillRef idx="1">
-                      <a:schemeClr val="accent1"/>
-                    </a:fillRef>
-                    <a:effectRef idx="0">
-                      <a:schemeClr val="accent1"/>
-                    </a:effectRef>
-                    <a:fontRef idx="minor">
-                      <a:schemeClr val="lt1"/>
-                    </a:fontRef>
-                  </p:style>
-                </p:sp>
-                <p:cxnSp>
-                  <p:nvCxnSpPr>
-                    <p:cNvPr id="1612973621" name=""/>
-                    <p:cNvCxnSpPr/>
-                    <p:nvPr/>
-                  </p:nvCxnSpPr>
-                  <p:spPr bwMode="auto">
-                    <a:xfrm rot="10800000" flipH="0" flipV="0">
-                      <a:off x="732690" y="2971170"/>
-                      <a:ext cx="970920" cy="0"/>
-                    </a:xfrm>
-                    <a:prstGeom prst="line">
-                      <a:avLst/>
-                    </a:prstGeom>
-                    <a:ln w="38100" cap="flat" cmpd="sng" algn="ctr">
-                      <a:solidFill>
-                        <a:schemeClr val="tx1"/>
-                      </a:solidFill>
-                      <a:prstDash val="solid"/>
-                      <a:miter lim="800000"/>
-                    </a:ln>
-                  </p:spPr>
-                  <p:style>
-                    <a:lnRef idx="1">
-                      <a:schemeClr val="accent1">
-                        <a:shade val="50000"/>
-                      </a:schemeClr>
-                    </a:lnRef>
-                    <a:fillRef idx="0">
-                      <a:schemeClr val="accent1"/>
-                    </a:fillRef>
-                    <a:effectRef idx="0">
-                      <a:schemeClr val="accent1"/>
-                    </a:effectRef>
-                    <a:fontRef idx="minor">
-                      <a:schemeClr val="tx1"/>
-                    </a:fontRef>
-                  </p:style>
-                </p:cxnSp>
-                <p:cxnSp>
-                  <p:nvCxnSpPr>
-                    <p:cNvPr id="846460079" name=""/>
-                    <p:cNvCxnSpPr/>
-                    <p:nvPr/>
-                  </p:nvCxnSpPr>
-                  <p:spPr bwMode="auto">
-                    <a:xfrm rot="10800000" flipH="0" flipV="1">
-                      <a:off x="732690" y="1668754"/>
-                      <a:ext cx="970920" cy="0"/>
-                    </a:xfrm>
-                    <a:prstGeom prst="line">
-                      <a:avLst/>
-                    </a:prstGeom>
-                    <a:ln w="38100" cap="flat" cmpd="sng" algn="ctr">
-                      <a:solidFill>
-                        <a:schemeClr val="tx1"/>
-                      </a:solidFill>
-                      <a:prstDash val="solid"/>
-                      <a:miter lim="800000"/>
-                    </a:ln>
-                  </p:spPr>
-                  <p:style>
-                    <a:lnRef idx="1">
-                      <a:schemeClr val="accent1">
-                        <a:shade val="50000"/>
-                      </a:schemeClr>
-                    </a:lnRef>
-                    <a:fillRef idx="0">
-                      <a:schemeClr val="accent1"/>
-                    </a:fillRef>
-                    <a:effectRef idx="0">
-                      <a:schemeClr val="accent1"/>
-                    </a:effectRef>
-                    <a:fontRef idx="minor">
-                      <a:schemeClr val="tx1"/>
-                    </a:fontRef>
-                  </p:style>
-                </p:cxnSp>
-                <p:cxnSp>
-                  <p:nvCxnSpPr>
-                    <p:cNvPr id="521196869" name=""/>
-                    <p:cNvCxnSpPr/>
-                    <p:nvPr/>
-                  </p:nvCxnSpPr>
-                  <p:spPr bwMode="auto">
-                    <a:xfrm rot="10800000" flipH="0" flipV="0">
-                      <a:off x="732690" y="366345"/>
-                      <a:ext cx="970920" cy="0"/>
-                    </a:xfrm>
-                    <a:prstGeom prst="line">
-                      <a:avLst/>
-                    </a:prstGeom>
-                    <a:ln w="38100" cap="flat" cmpd="sng" algn="ctr">
-                      <a:solidFill>
-                        <a:schemeClr val="tx1"/>
-                      </a:solidFill>
-                      <a:prstDash val="solid"/>
-                      <a:miter lim="800000"/>
-                    </a:ln>
-                  </p:spPr>
-                  <p:style>
-                    <a:lnRef idx="1">
-                      <a:schemeClr val="accent1">
-                        <a:shade val="50000"/>
-                      </a:schemeClr>
-                    </a:lnRef>
-                    <a:fillRef idx="0">
-                      <a:schemeClr val="accent1"/>
-                    </a:fillRef>
-                    <a:effectRef idx="0">
-                      <a:schemeClr val="accent1"/>
-                    </a:effectRef>
-                    <a:fontRef idx="minor">
-                      <a:schemeClr val="tx1"/>
-                    </a:fontRef>
-                  </p:style>
-                </p:cxnSp>
-                <p:grpSp>
-                  <p:nvGrpSpPr>
-                    <p:cNvPr id="1977284577" name=""/>
-                    <p:cNvGrpSpPr/>
-                    <p:nvPr/>
-                  </p:nvGrpSpPr>
-                  <p:grpSpPr bwMode="auto">
-                    <a:xfrm>
-                      <a:off x="0" y="0"/>
-                      <a:ext cx="732690" cy="3337515"/>
-                      <a:chOff x="0" y="0"/>
-                      <a:chExt cx="732690" cy="3337515"/>
-                    </a:xfrm>
-                  </p:grpSpPr>
-                  <p:sp>
-                    <p:nvSpPr>
-                      <p:cNvPr id="1154907552" name=""/>
-                      <p:cNvSpPr/>
-                      <p:nvPr/>
-                    </p:nvSpPr>
-                    <p:spPr bwMode="auto">
-                      <a:xfrm rot="0" flipH="0" flipV="0">
-                        <a:off x="0" y="2604825"/>
-                        <a:ext cx="732690" cy="732690"/>
-                      </a:xfrm>
-                      <a:prstGeom prst="ellipse">
-                        <a:avLst/>
-                      </a:prstGeom>
-                      <a:solidFill>
-                        <a:srgbClr val="FF4C4C"/>
-                      </a:solidFill>
-                      <a:ln w="38100" cap="flat" cmpd="sng" algn="ctr">
-                        <a:solidFill>
-                          <a:srgbClr val="000000"/>
-                        </a:solidFill>
-                        <a:prstDash val="solid"/>
-                        <a:miter lim="800000"/>
-                      </a:ln>
-                    </p:spPr>
-                    <p:style>
-                      <a:lnRef idx="2">
-                        <a:schemeClr val="accent1">
-                          <a:shade val="50000"/>
-                        </a:schemeClr>
-                      </a:lnRef>
-                      <a:fillRef idx="1">
-                        <a:schemeClr val="accent1"/>
-                      </a:fillRef>
-                      <a:effectRef idx="0">
-                        <a:schemeClr val="accent1"/>
-                      </a:effectRef>
-                      <a:fontRef idx="minor">
-                        <a:schemeClr val="lt1"/>
-                      </a:fontRef>
-                    </p:style>
-                  </p:sp>
-                  <p:sp>
-                    <p:nvSpPr>
-                      <p:cNvPr id="949888695" name=""/>
-                      <p:cNvSpPr/>
-                      <p:nvPr/>
-                    </p:nvSpPr>
-                    <p:spPr bwMode="auto">
-                      <a:xfrm rot="0" flipH="0" flipV="0">
-                        <a:off x="0" y="1302407"/>
-                        <a:ext cx="732690" cy="732690"/>
-                      </a:xfrm>
-                      <a:prstGeom prst="ellipse">
-                        <a:avLst/>
-                      </a:prstGeom>
-                      <a:solidFill>
-                        <a:srgbClr val="FF4C4C"/>
-                      </a:solidFill>
-                      <a:ln w="38100" cap="flat" cmpd="sng" algn="ctr">
-                        <a:solidFill>
-                          <a:srgbClr val="000000"/>
-                        </a:solidFill>
-                        <a:prstDash val="solid"/>
-                        <a:miter lim="800000"/>
-                      </a:ln>
-                    </p:spPr>
-                    <p:style>
-                      <a:lnRef idx="2">
-                        <a:schemeClr val="accent1">
-                          <a:shade val="50000"/>
-                        </a:schemeClr>
-                      </a:lnRef>
-                      <a:fillRef idx="1">
-                        <a:schemeClr val="accent1"/>
-                      </a:fillRef>
-                      <a:effectRef idx="0">
-                        <a:schemeClr val="accent1"/>
-                      </a:effectRef>
-                      <a:fontRef idx="minor">
-                        <a:schemeClr val="lt1"/>
-                      </a:fontRef>
-                    </p:style>
-                  </p:sp>
-                  <p:sp>
-                    <p:nvSpPr>
-                      <p:cNvPr id="868553331" name=""/>
-                      <p:cNvSpPr/>
-                      <p:nvPr/>
-                    </p:nvSpPr>
-                    <p:spPr bwMode="auto">
-                      <a:xfrm rot="0" flipH="0" flipV="0">
-                        <a:off x="0" y="0"/>
-                        <a:ext cx="732690" cy="732690"/>
-                      </a:xfrm>
-                      <a:prstGeom prst="ellipse">
-                        <a:avLst/>
-                      </a:prstGeom>
-                      <a:solidFill>
-                        <a:srgbClr val="FF4C4C"/>
-                      </a:solidFill>
-                      <a:ln w="38100" cap="flat" cmpd="sng" algn="ctr">
-                        <a:solidFill>
-                          <a:srgbClr val="000000"/>
-                        </a:solidFill>
-                        <a:prstDash val="solid"/>
-                        <a:miter lim="800000"/>
-                      </a:ln>
-                    </p:spPr>
-                    <p:style>
-                      <a:lnRef idx="2">
-                        <a:schemeClr val="accent1">
-                          <a:shade val="50000"/>
-                        </a:schemeClr>
-                      </a:lnRef>
-                      <a:fillRef idx="1">
-                        <a:schemeClr val="accent1"/>
-                      </a:fillRef>
-                      <a:effectRef idx="0">
-                        <a:schemeClr val="accent1"/>
-                      </a:effectRef>
-                      <a:fontRef idx="minor">
-                        <a:schemeClr val="lt1"/>
-                      </a:fontRef>
-                    </p:style>
-                  </p:sp>
-                </p:grpSp>
-                <p:grpSp>
-                  <p:nvGrpSpPr>
-                    <p:cNvPr id="1411680971" name=""/>
-                    <p:cNvGrpSpPr/>
-                    <p:nvPr/>
-                  </p:nvGrpSpPr>
-                  <p:grpSpPr bwMode="auto">
-                    <a:xfrm>
-                      <a:off x="1703610" y="0"/>
-                      <a:ext cx="732690" cy="3337515"/>
-                      <a:chOff x="0" y="0"/>
-                      <a:chExt cx="732690" cy="3337515"/>
-                    </a:xfrm>
-                  </p:grpSpPr>
-                  <p:sp>
-                    <p:nvSpPr>
-                      <p:cNvPr id="1786411738" name=""/>
-                      <p:cNvSpPr/>
-                      <p:nvPr/>
-                    </p:nvSpPr>
-                    <p:spPr bwMode="auto">
-                      <a:xfrm rot="0" flipH="0" flipV="0">
-                        <a:off x="0" y="2604825"/>
-                        <a:ext cx="732690" cy="732690"/>
-                      </a:xfrm>
-                      <a:prstGeom prst="ellipse">
-                        <a:avLst/>
-                      </a:prstGeom>
-                      <a:solidFill>
-                        <a:srgbClr val="FFC926"/>
-                      </a:solidFill>
-                      <a:ln w="38100" cap="flat" cmpd="sng" algn="ctr">
-                        <a:solidFill>
-                          <a:schemeClr val="tx1"/>
-                        </a:solidFill>
-                        <a:prstDash val="sysDash"/>
-                        <a:miter lim="800000"/>
-                      </a:ln>
-                    </p:spPr>
-                    <p:style>
-                      <a:lnRef idx="2">
-                        <a:schemeClr val="accent1">
-                          <a:shade val="50000"/>
-                        </a:schemeClr>
-                      </a:lnRef>
-                      <a:fillRef idx="1">
-                        <a:schemeClr val="accent1"/>
-                      </a:fillRef>
-                      <a:effectRef idx="0">
-                        <a:schemeClr val="accent1"/>
-                      </a:effectRef>
-                      <a:fontRef idx="minor">
-                        <a:schemeClr val="lt1"/>
-                      </a:fontRef>
-                    </p:style>
-                  </p:sp>
-                  <p:sp>
-                    <p:nvSpPr>
-                      <p:cNvPr id="1886639013" name=""/>
-                      <p:cNvSpPr/>
-                      <p:nvPr/>
-                    </p:nvSpPr>
-                    <p:spPr bwMode="auto">
-                      <a:xfrm rot="0" flipH="0" flipV="0">
-                        <a:off x="0" y="1302407"/>
-                        <a:ext cx="732690" cy="732690"/>
-                      </a:xfrm>
-                      <a:prstGeom prst="ellipse">
-                        <a:avLst/>
-                      </a:prstGeom>
-                      <a:solidFill>
-                        <a:srgbClr val="FFC926"/>
-                      </a:solidFill>
-                      <a:ln w="38100" cap="flat" cmpd="sng" algn="ctr">
-                        <a:solidFill>
-                          <a:schemeClr val="tx1"/>
-                        </a:solidFill>
-                        <a:prstDash val="sysDash"/>
-                        <a:miter lim="800000"/>
-                      </a:ln>
-                    </p:spPr>
-                    <p:style>
-                      <a:lnRef idx="2">
-                        <a:schemeClr val="accent1">
-                          <a:shade val="50000"/>
-                        </a:schemeClr>
-                      </a:lnRef>
-                      <a:fillRef idx="1">
-                        <a:schemeClr val="accent1"/>
-                      </a:fillRef>
-                      <a:effectRef idx="0">
-                        <a:schemeClr val="accent1"/>
-                      </a:effectRef>
-                      <a:fontRef idx="minor">
-                        <a:schemeClr val="lt1"/>
-                      </a:fontRef>
-                    </p:style>
-                  </p:sp>
-                  <p:sp>
-                    <p:nvSpPr>
-                      <p:cNvPr id="202573799" name=""/>
-                      <p:cNvSpPr/>
-                      <p:nvPr/>
-                    </p:nvSpPr>
-                    <p:spPr bwMode="auto">
-                      <a:xfrm rot="0" flipH="0" flipV="0">
-                        <a:off x="0" y="0"/>
-                        <a:ext cx="732690" cy="732690"/>
-                      </a:xfrm>
-                      <a:prstGeom prst="ellipse">
-                        <a:avLst/>
-                      </a:prstGeom>
-                      <a:solidFill>
-                        <a:srgbClr val="FFC926"/>
-                      </a:solidFill>
-                      <a:ln w="38100" cap="flat" cmpd="sng" algn="ctr">
-                        <a:solidFill>
-                          <a:schemeClr val="tx1"/>
-                        </a:solidFill>
-                        <a:prstDash val="sysDash"/>
-                        <a:miter lim="800000"/>
-                      </a:ln>
-                    </p:spPr>
-                    <p:style>
-                      <a:lnRef idx="2">
-                        <a:schemeClr val="accent1">
-                          <a:shade val="50000"/>
-                        </a:schemeClr>
-                      </a:lnRef>
-                      <a:fillRef idx="1">
-                        <a:schemeClr val="accent1"/>
-                      </a:fillRef>
-                      <a:effectRef idx="0">
-                        <a:schemeClr val="accent1"/>
-                      </a:effectRef>
-                      <a:fontRef idx="minor">
-                        <a:schemeClr val="lt1"/>
-                      </a:fontRef>
-                    </p:style>
-                  </p:sp>
-                </p:grpSp>
-              </p:grpSp>
-              <p:grpSp>
-                <p:nvGrpSpPr>
-                  <p:cNvPr id="47262191" name=""/>
-                  <p:cNvGrpSpPr/>
-                  <p:nvPr/>
-                </p:nvGrpSpPr>
-                <p:grpSpPr bwMode="auto">
-                  <a:xfrm rot="10800000">
-                    <a:off x="5264669" y="0"/>
-                    <a:ext cx="3974220" cy="3337515"/>
-                    <a:chOff x="0" y="0"/>
-                    <a:chExt cx="3974220" cy="3337515"/>
-                  </a:xfrm>
-                </p:grpSpPr>
-                <p:cxnSp>
-                  <p:nvCxnSpPr>
-                    <p:cNvPr id="1936295763" name=""/>
-                    <p:cNvCxnSpPr/>
-                    <p:nvPr/>
-                  </p:nvCxnSpPr>
-                  <p:spPr bwMode="auto">
-                    <a:xfrm rot="10800000" flipH="0" flipV="0">
-                      <a:off x="2436300" y="1668754"/>
-                      <a:ext cx="805230" cy="0"/>
-                    </a:xfrm>
-                    <a:prstGeom prst="line">
-                      <a:avLst/>
-                    </a:prstGeom>
-                    <a:ln w="38100" cap="flat" cmpd="sng" algn="ctr">
-                      <a:solidFill>
-                        <a:srgbClr val="000000"/>
-                      </a:solidFill>
-                      <a:prstDash val="solid"/>
-                      <a:miter lim="800000"/>
-                    </a:ln>
-                  </p:spPr>
-                  <p:style>
-                    <a:lnRef idx="1">
-                      <a:schemeClr val="accent1">
-                        <a:shade val="50000"/>
-                      </a:schemeClr>
-                    </a:lnRef>
-                    <a:fillRef idx="0">
-                      <a:schemeClr val="accent1"/>
-                    </a:fillRef>
-                    <a:effectRef idx="0">
-                      <a:schemeClr val="accent1"/>
-                    </a:effectRef>
-                    <a:fontRef idx="minor">
-                      <a:schemeClr val="tx1"/>
-                    </a:fontRef>
-                  </p:style>
-                </p:cxnSp>
-                <p:cxnSp>
-                  <p:nvCxnSpPr>
-                    <p:cNvPr id="423529484" name=""/>
-                    <p:cNvCxnSpPr/>
-                    <p:nvPr/>
-                  </p:nvCxnSpPr>
-                  <p:spPr bwMode="auto">
-                    <a:xfrm rot="16199998" flipH="0" flipV="1">
-                      <a:off x="2370880" y="431759"/>
-                      <a:ext cx="1043366" cy="912529"/>
-                    </a:xfrm>
-                    <a:prstGeom prst="line">
-                      <a:avLst/>
-                    </a:prstGeom>
-                    <a:ln w="38100" cap="flat" cmpd="sng" algn="ctr">
-                      <a:solidFill>
-                        <a:srgbClr val="000000"/>
-                      </a:solidFill>
-                      <a:prstDash val="solid"/>
-                      <a:miter lim="800000"/>
-                    </a:ln>
-                  </p:spPr>
-                  <p:style>
-                    <a:lnRef idx="1">
-                      <a:schemeClr val="accent1">
-                        <a:shade val="50000"/>
-                      </a:schemeClr>
-                    </a:lnRef>
-                    <a:fillRef idx="0">
-                      <a:schemeClr val="accent1"/>
-                    </a:fillRef>
-                    <a:effectRef idx="0">
-                      <a:schemeClr val="accent1"/>
-                    </a:effectRef>
-                    <a:fontRef idx="minor">
-                      <a:schemeClr val="tx1"/>
-                    </a:fontRef>
-                  </p:style>
-                </p:cxnSp>
-                <p:cxnSp>
-                  <p:nvCxnSpPr>
-                    <p:cNvPr id="1748051533" name=""/>
-                    <p:cNvCxnSpPr/>
-                    <p:nvPr/>
-                  </p:nvCxnSpPr>
-                  <p:spPr bwMode="auto">
-                    <a:xfrm rot="5399997" flipH="0" flipV="0">
-                      <a:off x="2370882" y="1993221"/>
-                      <a:ext cx="1043364" cy="912529"/>
-                    </a:xfrm>
-                    <a:prstGeom prst="line">
-                      <a:avLst/>
-                    </a:prstGeom>
-                    <a:ln w="38100" cap="flat" cmpd="sng" algn="ctr">
-                      <a:solidFill>
-                        <a:srgbClr val="000000"/>
-                      </a:solidFill>
-                      <a:prstDash val="solid"/>
-                      <a:miter lim="800000"/>
-                    </a:ln>
-                  </p:spPr>
-                  <p:style>
-                    <a:lnRef idx="1">
-                      <a:schemeClr val="accent1">
-                        <a:shade val="50000"/>
-                      </a:schemeClr>
-                    </a:lnRef>
-                    <a:fillRef idx="0">
-                      <a:schemeClr val="accent1"/>
-                    </a:fillRef>
-                    <a:effectRef idx="0">
-                      <a:schemeClr val="accent1"/>
-                    </a:effectRef>
-                    <a:fontRef idx="minor">
-                      <a:schemeClr val="tx1"/>
-                    </a:fontRef>
-                  </p:style>
-                </p:cxnSp>
-                <p:sp>
-                  <p:nvSpPr>
-                    <p:cNvPr id="726083617" name=""/>
-                    <p:cNvSpPr/>
-                    <p:nvPr/>
-                  </p:nvSpPr>
-                  <p:spPr bwMode="auto">
-                    <a:xfrm rot="0" flipH="0" flipV="0">
-                      <a:off x="3241530" y="1302407"/>
-                      <a:ext cx="732690" cy="732690"/>
-                    </a:xfrm>
-                    <a:prstGeom prst="ellipse">
-                      <a:avLst/>
-                    </a:prstGeom>
-                    <a:solidFill>
-                      <a:srgbClr val="E173FF"/>
-                    </a:solidFill>
-                    <a:ln w="38100" cap="flat" cmpd="sng" algn="ctr">
-                      <a:solidFill>
-                        <a:srgbClr val="000000"/>
-                      </a:solidFill>
-                      <a:prstDash val="solid"/>
-                      <a:miter lim="800000"/>
-                    </a:ln>
-                  </p:spPr>
-                  <p:style>
-                    <a:lnRef idx="2">
-                      <a:schemeClr val="accent1">
-                        <a:shade val="50000"/>
-                      </a:schemeClr>
-                    </a:lnRef>
-                    <a:fillRef idx="1">
-                      <a:schemeClr val="accent1"/>
-                    </a:fillRef>
-                    <a:effectRef idx="0">
-                      <a:schemeClr val="accent1"/>
-                    </a:effectRef>
-                    <a:fontRef idx="minor">
-                      <a:schemeClr val="lt1"/>
-                    </a:fontRef>
-                  </p:style>
-                </p:sp>
-                <p:cxnSp>
-                  <p:nvCxnSpPr>
-                    <p:cNvPr id="2134081959" name=""/>
-                    <p:cNvCxnSpPr/>
-                    <p:nvPr/>
-                  </p:nvCxnSpPr>
-                  <p:spPr bwMode="auto">
-                    <a:xfrm rot="10800000" flipH="0" flipV="0">
-                      <a:off x="732690" y="2971170"/>
-                      <a:ext cx="970920" cy="0"/>
-                    </a:xfrm>
-                    <a:prstGeom prst="line">
-                      <a:avLst/>
-                    </a:prstGeom>
-                    <a:ln w="38100" cap="flat" cmpd="sng" algn="ctr">
-                      <a:solidFill>
-                        <a:schemeClr val="tx1"/>
-                      </a:solidFill>
-                      <a:prstDash val="solid"/>
-                      <a:miter lim="800000"/>
-                    </a:ln>
-                  </p:spPr>
-                  <p:style>
-                    <a:lnRef idx="1">
-                      <a:schemeClr val="accent1">
-                        <a:shade val="50000"/>
-                      </a:schemeClr>
-                    </a:lnRef>
-                    <a:fillRef idx="0">
-                      <a:schemeClr val="accent1"/>
-                    </a:fillRef>
-                    <a:effectRef idx="0">
-                      <a:schemeClr val="accent1"/>
-                    </a:effectRef>
-                    <a:fontRef idx="minor">
-                      <a:schemeClr val="tx1"/>
-                    </a:fontRef>
-                  </p:style>
-                </p:cxnSp>
-                <p:cxnSp>
-                  <p:nvCxnSpPr>
-                    <p:cNvPr id="1582850948" name=""/>
-                    <p:cNvCxnSpPr/>
-                    <p:nvPr/>
-                  </p:nvCxnSpPr>
-                  <p:spPr bwMode="auto">
-                    <a:xfrm rot="10800000" flipH="0" flipV="1">
-                      <a:off x="732690" y="1668753"/>
-                      <a:ext cx="970920" cy="0"/>
-                    </a:xfrm>
-                    <a:prstGeom prst="line">
-                      <a:avLst/>
-                    </a:prstGeom>
-                    <a:ln w="38100" cap="flat" cmpd="sng" algn="ctr">
-                      <a:solidFill>
-                        <a:schemeClr val="tx1"/>
-                      </a:solidFill>
-                      <a:prstDash val="solid"/>
-                      <a:miter lim="800000"/>
-                    </a:ln>
-                  </p:spPr>
-                  <p:style>
-                    <a:lnRef idx="1">
-                      <a:schemeClr val="accent1">
-                        <a:shade val="50000"/>
-                      </a:schemeClr>
-                    </a:lnRef>
-                    <a:fillRef idx="0">
-                      <a:schemeClr val="accent1"/>
-                    </a:fillRef>
-                    <a:effectRef idx="0">
-                      <a:schemeClr val="accent1"/>
-                    </a:effectRef>
-                    <a:fontRef idx="minor">
-                      <a:schemeClr val="tx1"/>
-                    </a:fontRef>
-                  </p:style>
-                </p:cxnSp>
-                <p:cxnSp>
-                  <p:nvCxnSpPr>
-                    <p:cNvPr id="452502548" name=""/>
-                    <p:cNvCxnSpPr/>
-                    <p:nvPr/>
-                  </p:nvCxnSpPr>
-                  <p:spPr bwMode="auto">
-                    <a:xfrm rot="10800000" flipH="0" flipV="0">
-                      <a:off x="732690" y="366345"/>
-                      <a:ext cx="970920" cy="0"/>
-                    </a:xfrm>
-                    <a:prstGeom prst="line">
-                      <a:avLst/>
-                    </a:prstGeom>
-                    <a:ln w="38100" cap="flat" cmpd="sng" algn="ctr">
-                      <a:solidFill>
-                        <a:schemeClr val="tx1"/>
-                      </a:solidFill>
-                      <a:prstDash val="solid"/>
-                      <a:miter lim="800000"/>
-                    </a:ln>
-                  </p:spPr>
-                  <p:style>
-                    <a:lnRef idx="1">
-                      <a:schemeClr val="accent1">
-                        <a:shade val="50000"/>
-                      </a:schemeClr>
-                    </a:lnRef>
-                    <a:fillRef idx="0">
-                      <a:schemeClr val="accent1"/>
-                    </a:fillRef>
-                    <a:effectRef idx="0">
-                      <a:schemeClr val="accent1"/>
-                    </a:effectRef>
-                    <a:fontRef idx="minor">
-                      <a:schemeClr val="tx1"/>
-                    </a:fontRef>
-                  </p:style>
-                </p:cxnSp>
-                <p:grpSp>
-                  <p:nvGrpSpPr>
-                    <p:cNvPr id="599803752" name=""/>
-                    <p:cNvGrpSpPr/>
-                    <p:nvPr/>
-                  </p:nvGrpSpPr>
-                  <p:grpSpPr bwMode="auto">
-                    <a:xfrm>
-                      <a:off x="0" y="0"/>
-                      <a:ext cx="732690" cy="3337515"/>
-                      <a:chOff x="0" y="0"/>
-                      <a:chExt cx="732690" cy="3337515"/>
-                    </a:xfrm>
-                  </p:grpSpPr>
-                  <p:sp>
-                    <p:nvSpPr>
-                      <p:cNvPr id="1540941237" name=""/>
-                      <p:cNvSpPr/>
-                      <p:nvPr/>
-                    </p:nvSpPr>
-                    <p:spPr bwMode="auto">
-                      <a:xfrm rot="0" flipH="0" flipV="0">
-                        <a:off x="0" y="2604825"/>
-                        <a:ext cx="732690" cy="732690"/>
-                      </a:xfrm>
-                      <a:prstGeom prst="ellipse">
-                        <a:avLst/>
-                      </a:prstGeom>
-                      <a:solidFill>
-                        <a:srgbClr val="FF4C4C"/>
-                      </a:solidFill>
-                      <a:ln w="38100" cap="flat" cmpd="sng" algn="ctr">
-                        <a:solidFill>
-                          <a:srgbClr val="000000"/>
-                        </a:solidFill>
-                        <a:prstDash val="solid"/>
-                        <a:miter lim="800000"/>
-                      </a:ln>
-                    </p:spPr>
-                    <p:style>
-                      <a:lnRef idx="2">
-                        <a:schemeClr val="accent1">
-                          <a:shade val="50000"/>
-                        </a:schemeClr>
-                      </a:lnRef>
-                      <a:fillRef idx="1">
-                        <a:schemeClr val="accent1"/>
-                      </a:fillRef>
-                      <a:effectRef idx="0">
-                        <a:schemeClr val="accent1"/>
-                      </a:effectRef>
-                      <a:fontRef idx="minor">
-                        <a:schemeClr val="lt1"/>
-                      </a:fontRef>
-                    </p:style>
-                  </p:sp>
-                  <p:sp>
-                    <p:nvSpPr>
-                      <p:cNvPr id="1614257956" name=""/>
-                      <p:cNvSpPr/>
-                      <p:nvPr/>
-                    </p:nvSpPr>
-                    <p:spPr bwMode="auto">
-                      <a:xfrm rot="0" flipH="0" flipV="0">
-                        <a:off x="0" y="1302407"/>
-                        <a:ext cx="732690" cy="732690"/>
-                      </a:xfrm>
-                      <a:prstGeom prst="ellipse">
-                        <a:avLst/>
-                      </a:prstGeom>
-                      <a:solidFill>
-                        <a:srgbClr val="FF4C4C"/>
-                      </a:solidFill>
-                      <a:ln w="38100" cap="flat" cmpd="sng" algn="ctr">
-                        <a:solidFill>
-                          <a:srgbClr val="000000"/>
-                        </a:solidFill>
-                        <a:prstDash val="solid"/>
-                        <a:miter lim="800000"/>
-                      </a:ln>
-                    </p:spPr>
-                    <p:style>
-                      <a:lnRef idx="2">
-                        <a:schemeClr val="accent1">
-                          <a:shade val="50000"/>
-                        </a:schemeClr>
-                      </a:lnRef>
-                      <a:fillRef idx="1">
-                        <a:schemeClr val="accent1"/>
-                      </a:fillRef>
-                      <a:effectRef idx="0">
-                        <a:schemeClr val="accent1"/>
-                      </a:effectRef>
-                      <a:fontRef idx="minor">
-                        <a:schemeClr val="lt1"/>
-                      </a:fontRef>
-                    </p:style>
-                  </p:sp>
-                  <p:sp>
-                    <p:nvSpPr>
-                      <p:cNvPr id="2085572702" name=""/>
-                      <p:cNvSpPr/>
-                      <p:nvPr/>
-                    </p:nvSpPr>
-                    <p:spPr bwMode="auto">
-                      <a:xfrm rot="0" flipH="0" flipV="0">
-                        <a:off x="0" y="0"/>
-                        <a:ext cx="732690" cy="732690"/>
-                      </a:xfrm>
-                      <a:prstGeom prst="ellipse">
-                        <a:avLst/>
-                      </a:prstGeom>
-                      <a:solidFill>
-                        <a:srgbClr val="FF4C4C"/>
-                      </a:solidFill>
-                      <a:ln w="38100" cap="flat" cmpd="sng" algn="ctr">
-                        <a:solidFill>
-                          <a:srgbClr val="000000"/>
-                        </a:solidFill>
-                        <a:prstDash val="solid"/>
-                        <a:miter lim="800000"/>
-                      </a:ln>
-                    </p:spPr>
-                    <p:style>
-                      <a:lnRef idx="2">
-                        <a:schemeClr val="accent1">
-                          <a:shade val="50000"/>
-                        </a:schemeClr>
-                      </a:lnRef>
-                      <a:fillRef idx="1">
-                        <a:schemeClr val="accent1"/>
-                      </a:fillRef>
-                      <a:effectRef idx="0">
-                        <a:schemeClr val="accent1"/>
-                      </a:effectRef>
-                      <a:fontRef idx="minor">
-                        <a:schemeClr val="lt1"/>
-                      </a:fontRef>
-                    </p:style>
-                  </p:sp>
-                </p:grpSp>
-                <p:grpSp>
-                  <p:nvGrpSpPr>
-                    <p:cNvPr id="797243715" name=""/>
-                    <p:cNvGrpSpPr/>
-                    <p:nvPr/>
-                  </p:nvGrpSpPr>
-                  <p:grpSpPr bwMode="auto">
-                    <a:xfrm>
-                      <a:off x="1703610" y="0"/>
-                      <a:ext cx="732690" cy="3337515"/>
-                      <a:chOff x="0" y="0"/>
-                      <a:chExt cx="732690" cy="3337515"/>
-                    </a:xfrm>
-                  </p:grpSpPr>
-                  <p:sp>
-                    <p:nvSpPr>
-                      <p:cNvPr id="1253004193" name=""/>
-                      <p:cNvSpPr/>
-                      <p:nvPr/>
-                    </p:nvSpPr>
-                    <p:spPr bwMode="auto">
-                      <a:xfrm rot="0" flipH="0" flipV="0">
-                        <a:off x="0" y="2604825"/>
-                        <a:ext cx="732690" cy="732690"/>
-                      </a:xfrm>
-                      <a:prstGeom prst="ellipse">
-                        <a:avLst/>
-                      </a:prstGeom>
-                      <a:solidFill>
-                        <a:srgbClr val="FFC926"/>
-                      </a:solidFill>
-                      <a:ln w="38100" cap="flat" cmpd="sng" algn="ctr">
-                        <a:solidFill>
-                          <a:schemeClr val="tx1"/>
-                        </a:solidFill>
-                        <a:prstDash val="sysDash"/>
-                        <a:miter lim="800000"/>
-                      </a:ln>
-                    </p:spPr>
-                    <p:style>
-                      <a:lnRef idx="2">
-                        <a:schemeClr val="accent1">
-                          <a:shade val="50000"/>
-                        </a:schemeClr>
-                      </a:lnRef>
-                      <a:fillRef idx="1">
-                        <a:schemeClr val="accent1"/>
-                      </a:fillRef>
-                      <a:effectRef idx="0">
-                        <a:schemeClr val="accent1"/>
-                      </a:effectRef>
-                      <a:fontRef idx="minor">
-                        <a:schemeClr val="lt1"/>
-                      </a:fontRef>
-                    </p:style>
-                  </p:sp>
-                  <p:sp>
-                    <p:nvSpPr>
-                      <p:cNvPr id="465040461" name=""/>
-                      <p:cNvSpPr/>
-                      <p:nvPr/>
-                    </p:nvSpPr>
-                    <p:spPr bwMode="auto">
-                      <a:xfrm rot="0" flipH="0" flipV="0">
-                        <a:off x="0" y="1302407"/>
-                        <a:ext cx="732690" cy="732690"/>
-                      </a:xfrm>
-                      <a:prstGeom prst="ellipse">
-                        <a:avLst/>
-                      </a:prstGeom>
-                      <a:solidFill>
-                        <a:srgbClr val="FFC926"/>
-                      </a:solidFill>
-                      <a:ln w="38100" cap="flat" cmpd="sng" algn="ctr">
-                        <a:solidFill>
-                          <a:schemeClr val="tx1"/>
-                        </a:solidFill>
-                        <a:prstDash val="sysDash"/>
-                        <a:miter lim="800000"/>
-                      </a:ln>
-                    </p:spPr>
-                    <p:style>
-                      <a:lnRef idx="2">
-                        <a:schemeClr val="accent1">
-                          <a:shade val="50000"/>
-                        </a:schemeClr>
-                      </a:lnRef>
-                      <a:fillRef idx="1">
-                        <a:schemeClr val="accent1"/>
-                      </a:fillRef>
-                      <a:effectRef idx="0">
-                        <a:schemeClr val="accent1"/>
-                      </a:effectRef>
-                      <a:fontRef idx="minor">
-                        <a:schemeClr val="lt1"/>
-                      </a:fontRef>
-                    </p:style>
-                  </p:sp>
-                  <p:sp>
-                    <p:nvSpPr>
-                      <p:cNvPr id="1726292688" name=""/>
-                      <p:cNvSpPr/>
-                      <p:nvPr/>
-                    </p:nvSpPr>
-                    <p:spPr bwMode="auto">
-                      <a:xfrm rot="0" flipH="0" flipV="0">
-                        <a:off x="0" y="0"/>
-                        <a:ext cx="732690" cy="732690"/>
-                      </a:xfrm>
-                      <a:prstGeom prst="ellipse">
-                        <a:avLst/>
-                      </a:prstGeom>
-                      <a:solidFill>
-                        <a:srgbClr val="FFC926"/>
-                      </a:solidFill>
-                      <a:ln w="38100" cap="flat" cmpd="sng" algn="ctr">
-                        <a:solidFill>
-                          <a:schemeClr val="tx1"/>
-                        </a:solidFill>
-                        <a:prstDash val="sysDash"/>
-                        <a:miter lim="800000"/>
-                      </a:ln>
-                    </p:spPr>
-                    <p:style>
-                      <a:lnRef idx="2">
-                        <a:schemeClr val="accent1">
-                          <a:shade val="50000"/>
-                        </a:schemeClr>
-                      </a:lnRef>
-                      <a:fillRef idx="1">
-                        <a:schemeClr val="accent1"/>
-                      </a:fillRef>
-                      <a:effectRef idx="0">
-                        <a:schemeClr val="accent1"/>
-                      </a:effectRef>
-                      <a:fontRef idx="minor">
-                        <a:schemeClr val="lt1"/>
-                      </a:fontRef>
-                    </p:style>
-                  </p:sp>
-                </p:grpSp>
-              </p:grpSp>
-              <p:sp>
-                <p:nvSpPr>
-                  <p:cNvPr id="550111007" name=""/>
-                  <p:cNvSpPr txBox="1"/>
-                  <p:nvPr/>
-                </p:nvSpPr>
-                <p:spPr bwMode="auto">
-                  <a:xfrm rot="0" flipH="0" flipV="0">
-                    <a:off x="4234261" y="1037943"/>
-                    <a:ext cx="791103" cy="518519"/>
-                  </a:xfrm>
-                  <a:prstGeom prst="rect">
-                    <a:avLst/>
-                  </a:prstGeom>
-                  <a:noFill/>
-                </p:spPr>
-                <p:txBody>
-                  <a:bodyPr vertOverflow="overflow" horzOverflow="overflow" vert="horz" wrap="square" lIns="91440" tIns="45720" rIns="91440" bIns="45720" numCol="1" spcCol="0" rtlCol="0" fromWordArt="0" anchor="t" anchorCtr="0" forceAA="0" upright="0" compatLnSpc="0">
-                    <a:spAutoFit/>
-                  </a:bodyPr>
-                  <a:p>
-                    <a:pPr>
-                      <a:defRPr/>
-                    </a:pPr>
-                    <a:r>
-                      <a:rPr lang="fr-FR" sz="2800" b="1" i="1">
-                        <a:solidFill>
-                          <a:srgbClr val="FF9900"/>
-                        </a:solidFill>
-                        <a:latin typeface="CMU Serif"/>
-                        <a:ea typeface="CMU Serif"/>
-                        <a:cs typeface="CMU Serif"/>
-                      </a:rPr>
-                      <a:t>CZ</a:t>
-                    </a:r>
-                    <a:endParaRPr sz="2800" b="1" i="1">
-                      <a:solidFill>
-                        <a:srgbClr val="FF9900"/>
-                      </a:solidFill>
-                      <a:latin typeface="CMU Serif"/>
-                      <a:cs typeface="CMU Serif"/>
-                    </a:endParaRPr>
-                  </a:p>
-                </p:txBody>
-              </p:sp>
-              <p:sp>
-                <p:nvSpPr>
-                  <p:cNvPr id="824713188" name=""/>
-                  <p:cNvSpPr txBox="1"/>
-                  <p:nvPr/>
-                </p:nvSpPr>
-                <p:spPr bwMode="auto">
-                  <a:xfrm rot="0" flipH="0" flipV="0">
-                    <a:off x="3863369" y="1941093"/>
-                    <a:ext cx="1513231" cy="762359"/>
-                  </a:xfrm>
-                  <a:prstGeom prst="rect">
-                    <a:avLst/>
-                  </a:prstGeom>
-                  <a:noFill/>
-                </p:spPr>
-                <p:txBody>
-                  <a:bodyPr vertOverflow="overflow" horzOverflow="overflow" vert="horz" wrap="square" lIns="91440" tIns="45720" rIns="91440" bIns="45720" numCol="1" spcCol="0" rtlCol="0" fromWordArt="0" anchor="t" anchorCtr="0" forceAA="0" upright="0" compatLnSpc="0">
-                    <a:spAutoFit/>
-                  </a:bodyPr>
-                  <a:p>
-                    <a:pPr algn="ctr">
-                      <a:defRPr/>
-                    </a:pPr>
-                    <a:r>
-                      <a:rPr lang="fr-FR" sz="2200" b="1" i="0">
-                        <a:solidFill>
-                          <a:srgbClr val="DB4CFF"/>
-                        </a:solidFill>
-                        <a:latin typeface="CMU Serif"/>
-                        <a:ea typeface="CMU Serif"/>
-                        <a:cs typeface="CMU Serif"/>
-                      </a:rPr>
-                      <a:t>Anchor qubit</a:t>
-                    </a:r>
-                    <a:r>
-                      <a:rPr lang="fr-FR" sz="2200" b="1" i="0">
-                        <a:solidFill>
-                          <a:srgbClr val="DB4CFF"/>
-                        </a:solidFill>
-                        <a:latin typeface="CMU Serif"/>
-                        <a:cs typeface="CMU Serif"/>
-                      </a:rPr>
-                      <a:t>s</a:t>
-                    </a:r>
-                    <a:endParaRPr sz="2200" b="1" i="0">
-                      <a:solidFill>
-                        <a:srgbClr val="DB4CFF"/>
-                      </a:solidFill>
-                      <a:latin typeface="CMU Serif"/>
-                      <a:cs typeface="CMU Serif"/>
-                    </a:endParaRPr>
-                  </a:p>
-                </p:txBody>
-              </p:sp>
-            </p:grpSp>
-            <p:sp>
-              <p:nvSpPr>
-                <p:cNvPr id="148885205" name=""/>
-                <p:cNvSpPr txBox="1"/>
-                <p:nvPr/>
-              </p:nvSpPr>
-              <p:spPr bwMode="auto">
-                <a:xfrm rot="0" flipH="0" flipV="0">
-                  <a:off x="4239347" y="118237"/>
-                  <a:ext cx="795782" cy="518519"/>
-                </a:xfrm>
-                <a:prstGeom prst="rect">
-                  <a:avLst/>
-                </a:prstGeom>
-                <a:noFill/>
-              </p:spPr>
-              <p:txBody>
-                <a:bodyPr vertOverflow="overflow" horzOverflow="overflow" vert="horz" wrap="square" lIns="91440" tIns="45720" rIns="91440" bIns="45720" numCol="1" spcCol="0" rtlCol="0" fromWordArt="0" anchor="t" anchorCtr="0" forceAA="0" upright="0" compatLnSpc="0">
-                  <a:spAutoFit/>
-                </a:bodyPr>
-                <a:p>
-                  <a:pPr>
-                    <a:defRPr/>
-                  </a:pPr>
-                  <mc:AlternateContent xmlns:mc="http://schemas.openxmlformats.org/markup-compatibility/2006" xmlns:m="http://schemas.openxmlformats.org/officeDocument/2006/math">
-                    <mc:Choice xmlns:a14="http://schemas.microsoft.com/office/drawing/2010/main" Requires="a14">
-                      <a14:m>
-                        <m:oMathPara>
-                          <m:oMathParaPr/>
-                          <m:oMath>
-                            <m:sSub>
-                              <m:sSubPr>
-                                <m:ctrlPr>
-                                  <a:rPr lang="en-US" sz="2800" b="1" i="1" u="none" strike="noStrike" cap="none" spc="0">
-                                    <a:solidFill>
-                                      <a:schemeClr val="tx1"/>
-                                    </a:solidFill>
-                                    <a:latin typeface="Cambria Math"/>
-                                    <a:ea typeface="Cambria Math"/>
-                                    <a:cs typeface="Cambria Math"/>
-                                  </a:rPr>
-                                </m:ctrlPr>
-                              </m:sSubPr>
-                              <m:e>
-                                <m:r>
-                                  <m:rPr>
-                                    <m:sty m:val="bi"/>
-                                  </m:rPr>
-                                  <a:rPr lang="en-US" sz="2800" u="none" strike="noStrike" cap="none" spc="0">
-                                    <a:solidFill>
-                                      <a:schemeClr val="tx1"/>
-                                    </a:solidFill>
-                                    <a:latin typeface="Cambria Math"/>
-                                    <a:ea typeface="Cambria Math"/>
-                                    <a:cs typeface="Cambria Math"/>
-                                  </a:rPr>
-                                  <m:t>M</m:t>
-                                </m:r>
-                              </m:e>
-                              <m:sub>
-                                <m:r>
-                                  <m:rPr>
-                                    <m:sty m:val="bi"/>
-                                  </m:rPr>
-                                  <a:rPr lang="en-US" sz="2800" u="none" strike="noStrike" cap="none" spc="0">
-                                    <a:solidFill>
-                                      <a:schemeClr val="tx1"/>
-                                    </a:solidFill>
-                                    <a:latin typeface="Cambria Math"/>
-                                    <a:ea typeface="Cambria Math"/>
-                                    <a:cs typeface="Cambria Math"/>
-                                  </a:rPr>
-                                  <m:t>X</m:t>
-                                </m:r>
-                              </m:sub>
-                            </m:sSub>
-                          </m:oMath>
-                        </m:oMathPara>
-                      </a14:m>
-                    </mc:Choice>
-                    <mc:Fallback/>
-                  </mc:AlternateContent>
-                  <a:endParaRPr sz="2800" b="1" i="1">
-                    <a:solidFill>
-                      <a:schemeClr val="tx1"/>
-                    </a:solidFill>
-                    <a:latin typeface="C059"/>
-                    <a:cs typeface="C059"/>
-                  </a:endParaRPr>
-                </a:p>
-              </p:txBody>
-            </p:sp>
-            <p:cxnSp>
-              <p:nvCxnSpPr>
-                <p:cNvPr id="1204818874" name=""/>
-                <p:cNvCxnSpPr/>
-                <p:nvPr/>
-              </p:nvCxnSpPr>
-              <p:spPr bwMode="auto">
-                <a:xfrm rot="10800000" flipH="0" flipV="1">
-                  <a:off x="3858489" y="645691"/>
-                  <a:ext cx="514348" cy="590548"/>
-                </a:xfrm>
-                <a:prstGeom prst="line">
-                  <a:avLst/>
-                </a:prstGeom>
-                <a:ln w="28575" cap="flat" cmpd="sng" algn="ctr">
-                  <a:solidFill>
-                    <a:schemeClr val="tx1"/>
-                  </a:solidFill>
-                  <a:prstDash val="solid"/>
-                  <a:miter lim="800000"/>
-                  <a:tailEnd type="arrow" len="med"/>
-                </a:ln>
-              </p:spPr>
-              <p:style>
-                <a:lnRef idx="1">
-                  <a:schemeClr val="accent1">
-                    <a:shade val="50000"/>
-                  </a:schemeClr>
-                </a:lnRef>
-                <a:fillRef idx="0">
-                  <a:schemeClr val="accent1"/>
-                </a:fillRef>
-                <a:effectRef idx="0">
-                  <a:schemeClr val="accent1"/>
-                </a:effectRef>
-                <a:fontRef idx="minor">
-                  <a:schemeClr val="tx1"/>
-                </a:fontRef>
-              </p:style>
-            </p:cxnSp>
-            <p:cxnSp>
-              <p:nvCxnSpPr>
-                <p:cNvPr id="87981786" name=""/>
-                <p:cNvCxnSpPr/>
-                <p:nvPr/>
-              </p:nvCxnSpPr>
-              <p:spPr bwMode="auto">
-                <a:xfrm rot="10800000" flipH="1" flipV="1">
-                  <a:off x="4868136" y="607590"/>
-                  <a:ext cx="514347" cy="590548"/>
-                </a:xfrm>
-                <a:prstGeom prst="line">
-                  <a:avLst/>
-                </a:prstGeom>
-                <a:ln w="28575" cap="flat" cmpd="sng" algn="ctr">
-                  <a:solidFill>
-                    <a:schemeClr val="tx1"/>
-                  </a:solidFill>
-                  <a:prstDash val="solid"/>
-                  <a:miter lim="800000"/>
-                  <a:tailEnd type="arrow" len="med"/>
-                </a:ln>
-              </p:spPr>
-              <p:style>
-                <a:lnRef idx="1">
-                  <a:schemeClr val="accent1">
-                    <a:shade val="50000"/>
-                  </a:schemeClr>
-                </a:lnRef>
-                <a:fillRef idx="0">
-                  <a:schemeClr val="accent1"/>
-                </a:fillRef>
-                <a:effectRef idx="0">
-                  <a:schemeClr val="accent1"/>
-                </a:effectRef>
-                <a:fontRef idx="minor">
-                  <a:schemeClr val="tx1"/>
-                </a:fontRef>
-              </p:style>
-            </p:cxnSp>
-            <p:sp>
-              <p:nvSpPr>
-                <p:cNvPr id="567028311" name=""/>
-                <p:cNvSpPr txBox="1"/>
-                <p:nvPr/>
-              </p:nvSpPr>
-              <p:spPr bwMode="auto">
-                <a:xfrm rot="5400000" flipH="0" flipV="0">
-                  <a:off x="990824" y="2055438"/>
-                  <a:ext cx="667965" cy="640440"/>
-                </a:xfrm>
-                <a:prstGeom prst="rect">
-                  <a:avLst/>
-                </a:prstGeom>
-                <a:noFill/>
-              </p:spPr>
-              <p:txBody>
-                <a:bodyPr vertOverflow="overflow" horzOverflow="overflow" vert="horz" wrap="square" lIns="91440" tIns="45720" rIns="91440" bIns="45720" numCol="1" spcCol="0" rtlCol="0" fromWordArt="0" anchor="t" anchorCtr="0" forceAA="0" upright="0" compatLnSpc="0">
-                  <a:spAutoFit/>
-                </a:bodyPr>
-                <a:p>
-                  <a:pPr>
-                    <a:defRPr/>
-                  </a:pPr>
-                  <a:r>
-                    <a:rPr lang="fr-FR" sz="3600" b="1" i="0" u="none" strike="noStrike" cap="none" spc="0">
-                      <a:solidFill>
-                        <a:schemeClr val="tx1"/>
-                      </a:solidFill>
-                      <a:latin typeface="Arial"/>
-                      <a:ea typeface="Arial"/>
-                      <a:cs typeface="Arial"/>
-                    </a:rPr>
-                    <a:t>…</a:t>
-                  </a:r>
-                  <a:endParaRPr sz="3600" b="1"/>
-                </a:p>
-              </p:txBody>
-            </p:sp>
-            <p:sp>
-              <p:nvSpPr>
-                <p:cNvPr id="1783442873" name=""/>
-                <p:cNvSpPr txBox="1"/>
-                <p:nvPr/>
-              </p:nvSpPr>
-              <p:spPr bwMode="auto">
-                <a:xfrm rot="5400000" flipH="0" flipV="0">
-                  <a:off x="7907793" y="2055616"/>
-                  <a:ext cx="668323" cy="640440"/>
-                </a:xfrm>
-                <a:prstGeom prst="rect">
-                  <a:avLst/>
-                </a:prstGeom>
-                <a:noFill/>
-              </p:spPr>
-              <p:txBody>
-                <a:bodyPr vertOverflow="overflow" horzOverflow="overflow" vert="horz" wrap="square" lIns="91440" tIns="45720" rIns="91440" bIns="45720" numCol="1" spcCol="0" rtlCol="0" fromWordArt="0" anchor="t" anchorCtr="0" forceAA="0" upright="0" compatLnSpc="0">
-                  <a:spAutoFit/>
-                </a:bodyPr>
-                <a:p>
-                  <a:pPr>
-                    <a:defRPr/>
-                  </a:pPr>
-                  <a:r>
-                    <a:rPr lang="fr-FR" sz="3600" b="1" i="0" u="none" strike="noStrike" cap="none" spc="0">
-                      <a:solidFill>
-                        <a:schemeClr val="tx1"/>
-                      </a:solidFill>
-                      <a:latin typeface="Arial"/>
-                      <a:ea typeface="Arial"/>
-                      <a:cs typeface="Arial"/>
-                    </a:rPr>
-                    <a:t>…</a:t>
-                  </a:r>
-                  <a:endParaRPr sz="3600" b="1"/>
-                </a:p>
-              </p:txBody>
-            </p:sp>
-          </p:grpSp>
-          <p:sp>
-            <p:nvSpPr>
-              <p:cNvPr id="281951974" name=""/>
-              <p:cNvSpPr txBox="1"/>
-              <p:nvPr/>
-            </p:nvSpPr>
-            <p:spPr bwMode="auto">
-              <a:xfrm rot="0" flipH="0" flipV="0">
-                <a:off x="8451285" y="4922815"/>
-                <a:ext cx="4666057" cy="457560"/>
-              </a:xfrm>
-              <a:prstGeom prst="rect">
-                <a:avLst/>
-              </a:prstGeom>
-              <a:noFill/>
-            </p:spPr>
-            <p:txBody>
-              <a:bodyPr vertOverflow="overflow" horzOverflow="overflow" vert="horz" wrap="square" lIns="91440" tIns="45720" rIns="91440" bIns="45720" numCol="1" spcCol="0" rtlCol="0" fromWordArt="0" anchor="t" anchorCtr="0" forceAA="0" upright="0" compatLnSpc="0">
-                <a:spAutoFit/>
-              </a:bodyPr>
-              <a:p>
-                <a:pPr algn="ctr">
-                  <a:defRPr/>
-                </a:pPr>
-                <a:r>
-                  <a:rPr lang="fr-FR" sz="2400" b="1">
-                    <a:latin typeface="CMU Serif"/>
-                    <a:ea typeface="CMU Serif"/>
-                    <a:cs typeface="CMU Serif"/>
-                  </a:rPr>
-                  <a:t>(b)  XXXXXXXXXXXXX</a:t>
-                </a:r>
-                <a:endParaRPr sz="2400" b="1" i="0">
-                  <a:latin typeface="CMU Serif"/>
-                  <a:cs typeface="CMU Serif"/>
-                </a:endParaRPr>
-              </a:p>
-            </p:txBody>
-          </p:sp>
-          <p:sp>
-            <p:nvSpPr>
-              <p:cNvPr id="640037127" name=""/>
-              <p:cNvSpPr txBox="1"/>
-              <p:nvPr/>
-            </p:nvSpPr>
-            <p:spPr bwMode="auto">
-              <a:xfrm rot="0" flipH="0" flipV="0">
-                <a:off x="0" y="4841172"/>
-                <a:ext cx="4613276" cy="457560"/>
-              </a:xfrm>
-              <a:prstGeom prst="rect">
-                <a:avLst/>
-              </a:prstGeom>
-              <a:noFill/>
-            </p:spPr>
-            <p:txBody>
-              <a:bodyPr vertOverflow="overflow" horzOverflow="overflow" vert="horz" wrap="square" lIns="91440" tIns="45720" rIns="91440" bIns="45720" numCol="1" spcCol="0" rtlCol="0" fromWordArt="0" anchor="t" anchorCtr="0" forceAA="0" upright="0" compatLnSpc="0">
-                <a:spAutoFit/>
-              </a:bodyPr>
-              <a:p>
-                <a:pPr marL="327936" indent="-327936" algn="ctr">
-                  <a:buAutoNum type="alphaLcParenBoth"/>
-                  <a:defRPr/>
-                </a:pPr>
-                <a:r>
-                  <a:rPr lang="fr-FR" sz="2400" b="1">
-                    <a:latin typeface="CMU Serif"/>
-                    <a:ea typeface="CMU Serif"/>
-                    <a:cs typeface="CMU Serif"/>
-                  </a:rPr>
-                  <a:t> XXXXXXXXXXXXX</a:t>
-                </a:r>
-                <a:endParaRPr sz="2400" b="1" i="0">
-                  <a:latin typeface="CMU Serif"/>
-                  <a:cs typeface="CMU Serif"/>
-                </a:endParaRPr>
-              </a:p>
-            </p:txBody>
-          </p:sp>
-        </p:grpSp>
-        <p:sp>
-          <p:nvSpPr>
-            <p:cNvPr id="540732767" name=""/>
-            <p:cNvSpPr txBox="1"/>
-            <p:nvPr/>
-          </p:nvSpPr>
-          <p:spPr bwMode="auto">
-            <a:xfrm rot="0" flipH="0" flipV="0">
-              <a:off x="14859000" y="443209"/>
-              <a:ext cx="816428" cy="366119"/>
-            </a:xfrm>
-            <a:prstGeom prst="rect">
-              <a:avLst/>
-            </a:prstGeom>
-            <a:noFill/>
-          </p:spPr>
-          <p:txBody>
-            <a:bodyPr vertOverflow="overflow" horzOverflow="overflow" vert="horz" wrap="square" lIns="91440" tIns="45720" rIns="91440" bIns="45720" numCol="1" spcCol="0" rtlCol="0" fromWordArt="0" anchor="t" anchorCtr="0" forceAA="0" upright="0" compatLnSpc="0">
-              <a:spAutoFit/>
-            </a:bodyPr>
-            <a:p>
-              <a:pPr>
-                <a:defRPr/>
-              </a:pPr>
-              <a:endParaRPr/>
-            </a:p>
-          </p:txBody>
-        </p:sp>
-      </p:grpSp>
-      <p:grpSp>
-        <p:nvGrpSpPr>
-          <p:cNvPr id="795451299" name=""/>
-          <p:cNvGrpSpPr/>
-          <p:nvPr/>
-        </p:nvGrpSpPr>
-        <p:grpSpPr bwMode="auto">
-          <a:xfrm rot="0" flipH="0" flipV="0">
-            <a:off x="4829418" y="4668672"/>
-            <a:ext cx="19142212" cy="5928923"/>
-            <a:chOff x="0" y="0"/>
-            <a:chExt cx="19142212" cy="5928923"/>
+            <a:chExt cx="19142209" cy="5708487"/>
           </a:xfrm>
         </p:grpSpPr>
         <p:grpSp>
@@ -8460,9 +5950,9 @@
           <p:grpSpPr bwMode="auto">
             <a:xfrm rot="0" flipH="0" flipV="0">
               <a:off x="0" y="0"/>
-              <a:ext cx="9036464" cy="5249812"/>
+              <a:ext cx="9036463" cy="5249811"/>
               <a:chOff x="0" y="0"/>
-              <a:chExt cx="9036464" cy="5249812"/>
+              <a:chExt cx="9036463" cy="5249811"/>
             </a:xfrm>
           </p:grpSpPr>
           <p:sp>
@@ -8473,7 +5963,7 @@
             </p:nvSpPr>
             <p:spPr bwMode="auto">
               <a:xfrm rot="5400000" flipH="0" flipV="0">
-                <a:off x="1939032" y="-510430"/>
+                <a:off x="1939032" y="-510429"/>
                 <a:ext cx="220570" cy="3246900"/>
               </a:xfrm>
               <a:prstGeom prst="leftBrace">
@@ -8515,7 +6005,7 @@
             </p:nvSpPr>
             <p:spPr bwMode="auto">
               <a:xfrm rot="5400000" flipH="0" flipV="0">
-                <a:off x="7332504" y="-480655"/>
+                <a:off x="7332503" y="-480654"/>
                 <a:ext cx="220570" cy="3187350"/>
               </a:xfrm>
               <a:prstGeom prst="leftBrace">
@@ -8566,7 +6056,7 @@
             </p:nvSpPr>
             <p:spPr bwMode="auto">
               <a:xfrm rot="0" flipH="0" flipV="0">
-                <a:off x="6044964" y="0"/>
+                <a:off x="6044963" y="0"/>
                 <a:ext cx="2717670" cy="885225"/>
               </a:xfrm>
               <a:prstGeom prst="rect">
@@ -8712,7 +6202,7 @@
             </p:nvSpPr>
             <p:spPr bwMode="auto">
               <a:xfrm rot="0" flipH="0" flipV="0">
-                <a:off x="1745442" y="4304550"/>
+                <a:off x="1745442" y="4304549"/>
                 <a:ext cx="2764327" cy="884279"/>
               </a:xfrm>
               <a:prstGeom prst="rect">
@@ -8790,7 +6280,7 @@
             </p:nvSpPr>
             <p:spPr bwMode="auto">
               <a:xfrm rot="0" flipH="0" flipV="0">
-                <a:off x="0" y="4365533"/>
+                <a:off x="0" y="4365532"/>
                 <a:ext cx="1621240" cy="884279"/>
               </a:xfrm>
               <a:prstGeom prst="rect">
@@ -8846,10 +6336,10 @@
             </p:nvGrpSpPr>
             <p:grpSpPr bwMode="auto">
               <a:xfrm rot="0" flipH="0" flipV="0">
-                <a:off x="509946" y="1173740"/>
-                <a:ext cx="8417995" cy="3368270"/>
+                <a:off x="509945" y="1173739"/>
+                <a:ext cx="8417993" cy="3368270"/>
                 <a:chOff x="0" y="0"/>
-                <a:chExt cx="8417995" cy="3368270"/>
+                <a:chExt cx="8417993" cy="3368270"/>
               </a:xfrm>
             </p:grpSpPr>
             <p:cxnSp>
@@ -8899,10 +6389,10 @@
               </p:nvGrpSpPr>
               <p:grpSpPr bwMode="auto">
                 <a:xfrm>
-                  <a:off x="0" y="139953"/>
-                  <a:ext cx="8417995" cy="2956510"/>
+                  <a:off x="0" y="139952"/>
+                  <a:ext cx="8417993" cy="2956509"/>
                   <a:chOff x="0" y="0"/>
-                  <a:chExt cx="8417995" cy="2956510"/>
+                  <a:chExt cx="8417993" cy="2956509"/>
                 </a:xfrm>
               </p:grpSpPr>
               <p:grpSp>
@@ -8914,9 +6404,9 @@
                 <p:grpSpPr bwMode="auto">
                   <a:xfrm rot="0" flipH="0" flipV="0">
                     <a:off x="0" y="0"/>
-                    <a:ext cx="8417995" cy="2956510"/>
+                    <a:ext cx="8417993" cy="2956509"/>
                     <a:chOff x="0" y="0"/>
-                    <a:chExt cx="8417995" cy="2956510"/>
+                    <a:chExt cx="8417993" cy="2956509"/>
                   </a:xfrm>
                 </p:grpSpPr>
                 <p:grpSp>
@@ -8927,7 +6417,7 @@
                   </p:nvGrpSpPr>
                   <p:grpSpPr bwMode="auto">
                     <a:xfrm rot="0" flipH="0" flipV="0">
-                      <a:off x="2431908" y="366340"/>
+                      <a:off x="2431908" y="366339"/>
                       <a:ext cx="3554183" cy="2231694"/>
                       <a:chOff x="0" y="0"/>
                       <a:chExt cx="3554183" cy="2231694"/>
@@ -9022,7 +6512,7 @@
                     </p:nvCxnSpPr>
                     <p:spPr bwMode="auto">
                       <a:xfrm rot="0" flipH="0" flipV="0">
-                        <a:off x="0" y="1111909"/>
+                        <a:off x="0" y="1111908"/>
                         <a:ext cx="2957563" cy="1111912"/>
                       </a:xfrm>
                       <a:prstGeom prst="line">
@@ -9301,9 +6791,9 @@
                   <p:grpSpPr bwMode="auto">
                     <a:xfrm>
                       <a:off x="0" y="0"/>
-                      <a:ext cx="3028523" cy="2956510"/>
+                      <a:ext cx="3028522" cy="2956509"/>
                       <a:chOff x="0" y="0"/>
-                      <a:chExt cx="3028523" cy="2956510"/>
+                      <a:chExt cx="3028522" cy="2956509"/>
                     </a:xfrm>
                   </p:grpSpPr>
                   <p:sp>
@@ -9314,7 +6804,7 @@
                     </p:nvSpPr>
                     <p:spPr bwMode="auto">
                       <a:xfrm rot="0" flipH="0" flipV="0">
-                        <a:off x="1699218" y="1111907"/>
+                        <a:off x="1699218" y="1111906"/>
                         <a:ext cx="732690" cy="732690"/>
                       </a:xfrm>
                       <a:prstGeom prst="ellipse">
@@ -9356,7 +6846,7 @@
                     </p:nvSpPr>
                     <p:spPr bwMode="auto">
                       <a:xfrm rot="0" flipH="0" flipV="0">
-                        <a:off x="2295833" y="2223820"/>
+                        <a:off x="2295832" y="2223819"/>
                         <a:ext cx="732690" cy="732690"/>
                       </a:xfrm>
                       <a:prstGeom prst="ellipse">
@@ -9398,7 +6888,7 @@
                     </p:nvSpPr>
                     <p:spPr bwMode="auto">
                       <a:xfrm rot="0" flipH="0" flipV="0">
-                        <a:off x="2295833" y="0"/>
+                        <a:off x="2295832" y="0"/>
                         <a:ext cx="732690" cy="732690"/>
                       </a:xfrm>
                       <a:prstGeom prst="ellipse">
@@ -9440,7 +6930,7 @@
                     </p:nvSpPr>
                     <p:spPr bwMode="auto">
                       <a:xfrm rot="0" flipH="0" flipV="0">
-                        <a:off x="0" y="1111907"/>
+                        <a:off x="0" y="1111906"/>
                         <a:ext cx="732690" cy="732690"/>
                       </a:xfrm>
                       <a:prstGeom prst="ellipse">
@@ -9482,7 +6972,7 @@
                     </p:nvSpPr>
                     <p:spPr bwMode="auto">
                       <a:xfrm rot="0" flipH="0" flipV="0">
-                        <a:off x="0" y="2223820"/>
+                        <a:off x="0" y="2223819"/>
                         <a:ext cx="732690" cy="732690"/>
                       </a:xfrm>
                       <a:prstGeom prst="ellipse">
@@ -9605,7 +7095,7 @@
                     </p:nvCxnSpPr>
                     <p:spPr bwMode="auto">
                       <a:xfrm rot="0" flipH="0" flipV="0">
-                        <a:off x="732690" y="1478252"/>
+                        <a:off x="732690" y="1478251"/>
                         <a:ext cx="966528" cy="0"/>
                       </a:xfrm>
                       <a:prstGeom prst="line">
@@ -9644,7 +7134,7 @@
                     </p:nvCxnSpPr>
                     <p:spPr bwMode="auto">
                       <a:xfrm rot="0" flipH="0" flipV="0">
-                        <a:off x="732690" y="2590165"/>
+                        <a:off x="732690" y="2590164"/>
                         <a:ext cx="1563145" cy="0"/>
                       </a:xfrm>
                       <a:prstGeom prst="line">
@@ -9684,10 +7174,10 @@
                   </p:nvGrpSpPr>
                   <p:grpSpPr bwMode="auto">
                     <a:xfrm rot="10800000">
-                      <a:off x="5389471" y="0"/>
-                      <a:ext cx="3028523" cy="2956510"/>
+                      <a:off x="5389470" y="0"/>
+                      <a:ext cx="3028522" cy="2956509"/>
                       <a:chOff x="0" y="0"/>
-                      <a:chExt cx="3028523" cy="2956510"/>
+                      <a:chExt cx="3028522" cy="2956509"/>
                     </a:xfrm>
                   </p:grpSpPr>
                   <p:sp>
@@ -9749,7 +7239,7 @@
                     </p:nvSpPr>
                     <p:spPr bwMode="auto">
                       <a:xfrm rot="0" flipH="0" flipV="0">
-                        <a:off x="2295833" y="2223820"/>
+                        <a:off x="2295832" y="2223819"/>
                         <a:ext cx="732690" cy="732690"/>
                       </a:xfrm>
                       <a:prstGeom prst="ellipse">
@@ -9791,7 +7281,7 @@
                     </p:nvSpPr>
                     <p:spPr bwMode="auto">
                       <a:xfrm rot="0" flipH="0" flipV="0">
-                        <a:off x="2295833" y="0"/>
+                        <a:off x="2295832" y="0"/>
                         <a:ext cx="732690" cy="732690"/>
                       </a:xfrm>
                       <a:prstGeom prst="ellipse">
@@ -9875,7 +7365,7 @@
                     </p:nvSpPr>
                     <p:spPr bwMode="auto">
                       <a:xfrm rot="0" flipH="0" flipV="0">
-                        <a:off x="0" y="2223820"/>
+                        <a:off x="0" y="2223819"/>
                         <a:ext cx="732690" cy="732690"/>
                       </a:xfrm>
                       <a:prstGeom prst="ellipse">
@@ -9998,7 +7488,7 @@
                     </p:nvCxnSpPr>
                     <p:spPr bwMode="auto">
                       <a:xfrm rot="0" flipH="0" flipV="0">
-                        <a:off x="732690" y="1478252"/>
+                        <a:off x="732690" y="1478251"/>
                         <a:ext cx="966528" cy="0"/>
                       </a:xfrm>
                       <a:prstGeom prst="line">
@@ -10078,7 +7568,7 @@
                 </p:nvSpPr>
                 <p:spPr bwMode="auto">
                   <a:xfrm rot="5400000" flipH="0" flipV="0">
-                    <a:off x="1111214" y="1779942"/>
+                    <a:off x="1111213" y="1779941"/>
                     <a:ext cx="667605" cy="640440"/>
                   </a:xfrm>
                   <a:prstGeom prst="rect">
@@ -10114,7 +7604,7 @@
                 </p:nvSpPr>
                 <p:spPr bwMode="auto">
                   <a:xfrm rot="5400000" flipH="0" flipV="0">
-                    <a:off x="6974318" y="1779942"/>
+                    <a:off x="6974317" y="1779941"/>
                     <a:ext cx="668323" cy="640440"/>
                   </a:xfrm>
                   <a:prstGeom prst="rect">
@@ -10156,10 +7646,10 @@
           </p:nvGrpSpPr>
           <p:grpSpPr bwMode="auto">
             <a:xfrm rot="0" flipH="0" flipV="0">
-              <a:off x="10534639" y="474824"/>
-              <a:ext cx="8607573" cy="3918478"/>
+              <a:off x="10534638" y="474823"/>
+              <a:ext cx="8607570" cy="3918477"/>
               <a:chOff x="0" y="0"/>
-              <a:chExt cx="8607573" cy="3918478"/>
+              <a:chExt cx="8607570" cy="3918477"/>
             </a:xfrm>
           </p:grpSpPr>
           <p:grpSp>
@@ -10171,9 +7661,9 @@
             <p:grpSpPr bwMode="auto">
               <a:xfrm flipH="0" flipV="0">
                 <a:off x="827019" y="0"/>
-                <a:ext cx="7780552" cy="3918478"/>
+                <a:ext cx="7780551" cy="3918477"/>
                 <a:chOff x="0" y="0"/>
-                <a:chExt cx="7780552" cy="3918478"/>
+                <a:chExt cx="7780551" cy="3918477"/>
               </a:xfrm>
             </p:grpSpPr>
             <p:sp>
@@ -10184,7 +7674,7 @@
               </p:nvSpPr>
               <p:spPr bwMode="auto">
                 <a:xfrm rot="10800000" flipH="0" flipV="0">
-                  <a:off x="1895586" y="1459973"/>
+                  <a:off x="1895585" y="1459972"/>
                   <a:ext cx="636631" cy="636631"/>
                 </a:xfrm>
                 <a:prstGeom prst="ellipse">
@@ -10310,7 +7800,7 @@
               </p:nvCxnSpPr>
               <p:spPr bwMode="auto">
                 <a:xfrm rot="16199998" flipH="0" flipV="1">
-                  <a:off x="2399671" y="2042690"/>
+                  <a:off x="2399670" y="2042689"/>
                   <a:ext cx="318811" cy="240180"/>
                 </a:xfrm>
                 <a:prstGeom prst="line">
@@ -10349,7 +7839,7 @@
               </p:nvCxnSpPr>
               <p:spPr bwMode="auto">
                 <a:xfrm rot="16199998" flipH="0" flipV="0">
-                  <a:off x="1722247" y="2055616"/>
+                  <a:off x="1722246" y="2055615"/>
                   <a:ext cx="318811" cy="214327"/>
                 </a:xfrm>
                 <a:prstGeom prst="line">
@@ -10388,7 +7878,7 @@
               </p:nvSpPr>
               <p:spPr bwMode="auto">
                 <a:xfrm rot="10800000" flipH="0" flipV="0">
-                  <a:off x="3604394" y="1459973"/>
+                  <a:off x="3604393" y="1459972"/>
                   <a:ext cx="636631" cy="636631"/>
                 </a:xfrm>
                 <a:prstGeom prst="ellipse">
@@ -10439,7 +7929,7 @@
               </p:nvSpPr>
               <p:spPr bwMode="auto">
                 <a:xfrm rot="10800000" flipH="0" flipV="0">
-                  <a:off x="4066593" y="2322189"/>
+                  <a:off x="4066592" y="2322189"/>
                   <a:ext cx="636631" cy="636631"/>
                 </a:xfrm>
                 <a:prstGeom prst="ellipse">
@@ -10523,7 +8013,7 @@
               </p:nvCxnSpPr>
               <p:spPr bwMode="auto">
                 <a:xfrm rot="16199998" flipH="0" flipV="1">
-                  <a:off x="4105413" y="2042692"/>
+                  <a:off x="4105413" y="2042691"/>
                   <a:ext cx="318813" cy="240178"/>
                 </a:xfrm>
                 <a:prstGeom prst="line">
@@ -10562,7 +8052,7 @@
               </p:nvCxnSpPr>
               <p:spPr bwMode="auto">
                 <a:xfrm rot="16199998" flipH="0" flipV="0">
-                  <a:off x="3427989" y="2055616"/>
+                  <a:off x="3427988" y="2055615"/>
                   <a:ext cx="318811" cy="214327"/>
                 </a:xfrm>
                 <a:prstGeom prst="line">
@@ -10601,7 +8091,7 @@
               </p:nvSpPr>
               <p:spPr bwMode="auto">
                 <a:xfrm rot="10800000" flipH="0" flipV="0">
-                  <a:off x="5307070" y="1477109"/>
+                  <a:off x="5307069" y="1477108"/>
                   <a:ext cx="636631" cy="636631"/>
                 </a:xfrm>
                 <a:prstGeom prst="ellipse">
@@ -10643,7 +8133,7 @@
               </p:nvSpPr>
               <p:spPr bwMode="auto">
                 <a:xfrm rot="10800000" flipH="0" flipV="0">
-                  <a:off x="5772334" y="2339325"/>
+                  <a:off x="5772333" y="2339325"/>
                   <a:ext cx="636631" cy="636631"/>
                 </a:xfrm>
                 <a:prstGeom prst="ellipse">
@@ -10685,7 +8175,7 @@
               </p:nvSpPr>
               <p:spPr bwMode="auto">
                 <a:xfrm rot="10800000" flipH="0" flipV="0">
-                  <a:off x="4867655" y="2339325"/>
+                  <a:off x="4867654" y="2339325"/>
                   <a:ext cx="636631" cy="636631"/>
                 </a:xfrm>
                 <a:prstGeom prst="ellipse">
@@ -10727,7 +8217,7 @@
               </p:nvCxnSpPr>
               <p:spPr bwMode="auto">
                 <a:xfrm rot="16199998" flipH="0" flipV="1">
-                  <a:off x="5811153" y="2059827"/>
+                  <a:off x="5811152" y="2059826"/>
                   <a:ext cx="318813" cy="240178"/>
                 </a:xfrm>
                 <a:prstGeom prst="line">
@@ -10766,7 +8256,7 @@
               </p:nvCxnSpPr>
               <p:spPr bwMode="auto">
                 <a:xfrm rot="16199998" flipH="0" flipV="0">
-                  <a:off x="5133730" y="2072752"/>
+                  <a:off x="5133729" y="2072751"/>
                   <a:ext cx="318811" cy="214327"/>
                 </a:xfrm>
                 <a:prstGeom prst="line">
@@ -10805,7 +8295,7 @@
               </p:nvSpPr>
               <p:spPr bwMode="auto">
                 <a:xfrm rot="10800000" flipH="0" flipV="0">
-                  <a:off x="2360853" y="3264710"/>
+                  <a:off x="2360853" y="3264709"/>
                   <a:ext cx="636631" cy="636631"/>
                 </a:xfrm>
                 <a:prstGeom prst="ellipse">
@@ -10847,7 +8337,7 @@
               </p:nvSpPr>
               <p:spPr bwMode="auto">
                 <a:xfrm rot="10800000" flipH="0" flipV="0">
-                  <a:off x="1456173" y="3264709"/>
+                  <a:off x="1456173" y="3264708"/>
                   <a:ext cx="636631" cy="636631"/>
                 </a:xfrm>
                 <a:prstGeom prst="ellipse">
@@ -10889,7 +8379,7 @@
               </p:nvSpPr>
               <p:spPr bwMode="auto">
                 <a:xfrm rot="10800000" flipH="0" flipV="0">
-                  <a:off x="4066592" y="3264710"/>
+                  <a:off x="4066591" y="3264709"/>
                   <a:ext cx="636631" cy="636631"/>
                 </a:xfrm>
                 <a:prstGeom prst="ellipse">
@@ -10931,7 +8421,7 @@
               </p:nvSpPr>
               <p:spPr bwMode="auto">
                 <a:xfrm rot="10800000" flipH="0" flipV="0">
-                  <a:off x="3161913" y="3264709"/>
+                  <a:off x="3161912" y="3264708"/>
                   <a:ext cx="636631" cy="636631"/>
                 </a:xfrm>
                 <a:prstGeom prst="ellipse">
@@ -10973,7 +8463,7 @@
               </p:nvSpPr>
               <p:spPr bwMode="auto">
                 <a:xfrm rot="10800000" flipH="0" flipV="0">
-                  <a:off x="5772333" y="3281847"/>
+                  <a:off x="5772332" y="3281846"/>
                   <a:ext cx="636631" cy="636631"/>
                 </a:xfrm>
                 <a:prstGeom prst="ellipse">
@@ -11015,7 +8505,7 @@
               </p:nvSpPr>
               <p:spPr bwMode="auto">
                 <a:xfrm rot="10800000" flipH="0" flipV="0">
-                  <a:off x="4867655" y="3281844"/>
+                  <a:off x="4867654" y="3281843"/>
                   <a:ext cx="636631" cy="636631"/>
                 </a:xfrm>
                 <a:prstGeom prst="ellipse">
@@ -11057,7 +8547,7 @@
               </p:nvCxnSpPr>
               <p:spPr bwMode="auto">
                 <a:xfrm rot="16199998" flipH="0" flipV="1">
-                  <a:off x="1621546" y="3111766"/>
+                  <a:off x="1621545" y="3111765"/>
                   <a:ext cx="305884" cy="0"/>
                 </a:xfrm>
                 <a:prstGeom prst="line">
@@ -11096,7 +8586,7 @@
               </p:nvCxnSpPr>
               <p:spPr bwMode="auto">
                 <a:xfrm rot="16199998" flipH="0" flipV="0">
-                  <a:off x="2526226" y="3111766"/>
+                  <a:off x="2526225" y="3111765"/>
                   <a:ext cx="305884" cy="0"/>
                 </a:xfrm>
                 <a:prstGeom prst="line">
@@ -11135,7 +8625,7 @@
               </p:nvCxnSpPr>
               <p:spPr bwMode="auto">
                 <a:xfrm rot="16199998" flipH="0" flipV="0">
-                  <a:off x="3327287" y="3111766"/>
+                  <a:off x="3327286" y="3111765"/>
                   <a:ext cx="305884" cy="0"/>
                 </a:xfrm>
                 <a:prstGeom prst="line">
@@ -11174,7 +8664,7 @@
               </p:nvCxnSpPr>
               <p:spPr bwMode="auto">
                 <a:xfrm rot="16199998" flipH="0" flipV="0">
-                  <a:off x="4231966" y="3111766"/>
+                  <a:off x="4231965" y="3111765"/>
                   <a:ext cx="305884" cy="0"/>
                 </a:xfrm>
                 <a:prstGeom prst="line">
@@ -11213,7 +8703,7 @@
               </p:nvCxnSpPr>
               <p:spPr bwMode="auto">
                 <a:xfrm rot="16199998" flipH="0" flipV="0">
-                  <a:off x="5033029" y="3128901"/>
+                  <a:off x="5033028" y="3128900"/>
                   <a:ext cx="305884" cy="0"/>
                 </a:xfrm>
                 <a:prstGeom prst="line">
@@ -11252,7 +8742,7 @@
               </p:nvCxnSpPr>
               <p:spPr bwMode="auto">
                 <a:xfrm rot="16199998" flipH="0" flipV="0">
-                  <a:off x="5937707" y="3128901"/>
+                  <a:off x="5937706" y="3128900"/>
                   <a:ext cx="305884" cy="0"/>
                 </a:xfrm>
                 <a:prstGeom prst="line">
@@ -11291,7 +8781,7 @@
               </p:nvCxnSpPr>
               <p:spPr bwMode="auto">
                 <a:xfrm rot="16199998" flipH="0" flipV="1">
-                  <a:off x="4421718" y="273443"/>
+                  <a:off x="4421718" y="273442"/>
                   <a:ext cx="929742" cy="1477591"/>
                 </a:xfrm>
                 <a:prstGeom prst="line">
@@ -11330,7 +8820,7 @@
               </p:nvCxnSpPr>
               <p:spPr bwMode="auto">
                 <a:xfrm rot="16199998" flipH="0" flipV="0">
-                  <a:off x="3513024" y="1067423"/>
+                  <a:off x="3513024" y="1067422"/>
                   <a:ext cx="819374" cy="0"/>
                 </a:xfrm>
                 <a:prstGeom prst="line">
@@ -11530,7 +9020,7 @@
               </p:nvCxnSpPr>
               <p:spPr bwMode="auto">
                 <a:xfrm rot="0" flipH="0" flipV="0">
-                  <a:off x="1447080" y="2193107"/>
+                  <a:off x="1447079" y="2193106"/>
                   <a:ext cx="5021063" cy="0"/>
                 </a:xfrm>
                 <a:prstGeom prst="line">
@@ -11569,7 +9059,7 @@
               </p:nvCxnSpPr>
               <p:spPr bwMode="auto">
                 <a:xfrm rot="0" flipH="0" flipV="0">
-                  <a:off x="1447080" y="3095916"/>
+                  <a:off x="1447079" y="3095915"/>
                   <a:ext cx="5021063" cy="0"/>
                 </a:xfrm>
                 <a:prstGeom prst="line">
@@ -11608,7 +9098,7 @@
               </p:nvCxnSpPr>
               <p:spPr bwMode="auto">
                 <a:xfrm rot="0" flipH="0" flipV="0">
-                  <a:off x="1799533" y="1228011"/>
+                  <a:off x="1799532" y="1228010"/>
                   <a:ext cx="4316158" cy="0"/>
                 </a:xfrm>
                 <a:prstGeom prst="line">
@@ -11647,7 +9137,7 @@
               </p:nvSpPr>
               <p:spPr bwMode="auto">
                 <a:xfrm rot="0" flipH="0" flipV="0">
-                  <a:off x="6099129" y="1500973"/>
+                  <a:off x="6099129" y="1500972"/>
                   <a:ext cx="1262612" cy="488039"/>
                 </a:xfrm>
                 <a:prstGeom prst="rect">
@@ -11753,7 +9243,7 @@
               </p:nvSpPr>
               <p:spPr bwMode="auto">
                 <a:xfrm rot="0" flipH="0" flipV="0">
-                  <a:off x="6437011" y="2433697"/>
+                  <a:off x="6437010" y="2433696"/>
                   <a:ext cx="1343541" cy="488039"/>
                 </a:xfrm>
                 <a:prstGeom prst="rect">
@@ -11859,7 +9349,7 @@
               </p:nvSpPr>
               <p:spPr bwMode="auto">
                 <a:xfrm rot="0" flipH="0" flipV="0">
-                  <a:off x="6470238" y="3341616"/>
+                  <a:off x="6470237" y="3341615"/>
                   <a:ext cx="1310314" cy="488039"/>
                 </a:xfrm>
                 <a:prstGeom prst="rect">
@@ -11965,7 +9455,7 @@
               </p:nvSpPr>
               <p:spPr bwMode="auto">
                 <a:xfrm rot="0" flipH="0" flipV="0">
-                  <a:off x="109588" y="1836032"/>
+                  <a:off x="109587" y="1836031"/>
                   <a:ext cx="877406" cy="823320"/>
                 </a:xfrm>
                 <a:prstGeom prst="rect">
@@ -12002,7 +9492,7 @@
             </p:nvSpPr>
             <p:spPr bwMode="auto">
               <a:xfrm rot="0" flipH="0" flipV="0">
-                <a:off x="0" y="1938804"/>
+                <a:off x="0" y="1938803"/>
                 <a:ext cx="766766" cy="766766"/>
               </a:xfrm>
               <a:prstGeom prst="ellipse">
@@ -12054,7 +9544,7 @@
           </p:nvSpPr>
           <p:spPr bwMode="auto">
             <a:xfrm rot="0" flipH="0" flipV="0">
-              <a:off x="13963358" y="4528272"/>
+              <a:off x="13963357" y="4528271"/>
               <a:ext cx="2944499" cy="488039"/>
             </a:xfrm>
             <a:prstGeom prst="rect">
@@ -12099,48 +9589,8 @@
           </p:nvSpPr>
           <p:spPr bwMode="auto">
             <a:xfrm rot="0" flipH="0" flipV="0">
-              <a:off x="1237203" y="5471363"/>
-              <a:ext cx="6509172" cy="457560"/>
-            </a:xfrm>
-            <a:prstGeom prst="rect">
-              <a:avLst/>
-            </a:prstGeom>
-            <a:noFill/>
-          </p:spPr>
-          <p:txBody>
-            <a:bodyPr vertOverflow="overflow" horzOverflow="overflow" vert="horz" wrap="square" lIns="91440" tIns="45720" rIns="91440" bIns="45720" numCol="1" spcCol="0" rtlCol="0" fromWordArt="0" anchor="t" anchorCtr="0" forceAA="0" upright="0" compatLnSpc="0">
-              <a:spAutoFit/>
-            </a:bodyPr>
-            <a:p>
-              <a:pPr marL="327936" indent="-327936" algn="ctr">
-                <a:buAutoNum type="alphaLcParenBoth"/>
-                <a:defRPr/>
-              </a:pPr>
-              <a:r>
-                <a:rPr lang="fr-FR" sz="2400" b="1">
-                  <a:latin typeface="CMU Serif"/>
-                  <a:ea typeface="CMU Serif"/>
-                  <a:cs typeface="CMU Serif"/>
-                </a:rPr>
-                <a:t> XXXXXXXXXXXXX</a:t>
-              </a:r>
-              <a:endParaRPr sz="2400" b="1" i="0">
-                <a:latin typeface="CMU Serif"/>
-                <a:cs typeface="CMU Serif"/>
-              </a:endParaRPr>
-            </a:p>
-          </p:txBody>
-        </p:sp>
-        <p:sp>
-          <p:nvSpPr>
-            <p:cNvPr id="2048893674" name=""/>
-            <p:cNvSpPr txBox="1"/>
-            <p:nvPr/>
-          </p:nvSpPr>
-          <p:spPr bwMode="auto">
-            <a:xfrm rot="0" flipH="0" flipV="0">
-              <a:off x="10393902" y="5414213"/>
-              <a:ext cx="6512411" cy="457560"/>
+              <a:off x="4296925" y="5068047"/>
+              <a:ext cx="890201" cy="640440"/>
             </a:xfrm>
             <a:prstGeom prst="rect">
               <a:avLst/>
@@ -12156,17 +9606,2292 @@
                 <a:defRPr/>
               </a:pPr>
               <a:r>
-                <a:rPr lang="fr-FR" sz="2400" b="1">
+                <a:rPr lang="fr-FR" sz="3600" b="1">
                   <a:latin typeface="CMU Serif"/>
                   <a:ea typeface="CMU Serif"/>
                   <a:cs typeface="CMU Serif"/>
                 </a:rPr>
-                <a:t>(b)  XXXXXXXXXXXXX</a:t>
+                <a:t>(a)</a:t>
               </a:r>
-              <a:endParaRPr sz="2400" b="1" i="0">
+              <a:endParaRPr sz="3600" b="1" i="0">
                 <a:latin typeface="CMU Serif"/>
                 <a:cs typeface="CMU Serif"/>
               </a:endParaRPr>
+            </a:p>
+          </p:txBody>
+        </p:sp>
+        <p:sp>
+          <p:nvSpPr>
+            <p:cNvPr id="2048893674" name=""/>
+            <p:cNvSpPr txBox="1"/>
+            <p:nvPr/>
+          </p:nvSpPr>
+          <p:spPr bwMode="auto">
+            <a:xfrm rot="0" flipH="0" flipV="0">
+              <a:off x="14836543" y="5068047"/>
+              <a:ext cx="967770" cy="640440"/>
+            </a:xfrm>
+            <a:prstGeom prst="rect">
+              <a:avLst/>
+            </a:prstGeom>
+            <a:noFill/>
+          </p:spPr>
+          <p:txBody>
+            <a:bodyPr vertOverflow="overflow" horzOverflow="overflow" vert="horz" wrap="square" lIns="91440" tIns="45720" rIns="91440" bIns="45720" numCol="1" spcCol="0" rtlCol="0" fromWordArt="0" anchor="t" anchorCtr="0" forceAA="0" upright="0" compatLnSpc="0">
+              <a:spAutoFit/>
+            </a:bodyPr>
+            <a:p>
+              <a:pPr algn="ctr">
+                <a:defRPr/>
+              </a:pPr>
+              <a:r>
+                <a:rPr lang="fr-FR" sz="3600" b="1">
+                  <a:latin typeface="CMU Serif"/>
+                  <a:ea typeface="CMU Serif"/>
+                  <a:cs typeface="CMU Serif"/>
+                </a:rPr>
+                <a:t>(b)</a:t>
+              </a:r>
+              <a:endParaRPr sz="3600" b="1" i="0">
+                <a:latin typeface="CMU Serif"/>
+                <a:cs typeface="CMU Serif"/>
+              </a:endParaRPr>
+            </a:p>
+          </p:txBody>
+        </p:sp>
+      </p:grpSp>
+      <p:grpSp>
+        <p:nvGrpSpPr>
+          <p:cNvPr id="717195356" name=""/>
+          <p:cNvGrpSpPr/>
+          <p:nvPr/>
+        </p:nvGrpSpPr>
+        <p:grpSpPr bwMode="auto">
+          <a:xfrm>
+            <a:off x="5259765" y="10144729"/>
+            <a:ext cx="15560472" cy="5712933"/>
+            <a:chOff x="0" y="0"/>
+            <a:chExt cx="15560472" cy="5712933"/>
+          </a:xfrm>
+        </p:grpSpPr>
+        <p:grpSp>
+          <p:nvGrpSpPr>
+            <p:cNvPr id="1367443478" name=""/>
+            <p:cNvGrpSpPr/>
+            <p:nvPr/>
+          </p:nvGrpSpPr>
+          <p:grpSpPr bwMode="auto">
+            <a:xfrm rot="0" flipH="0" flipV="0">
+              <a:off x="0" y="0"/>
+              <a:ext cx="4691006" cy="4673709"/>
+              <a:chOff x="0" y="0"/>
+              <a:chExt cx="4691006" cy="4673709"/>
+            </a:xfrm>
+          </p:grpSpPr>
+          <p:grpSp>
+            <p:nvGrpSpPr>
+              <p:cNvPr id="1447600443" name=""/>
+              <p:cNvGrpSpPr/>
+              <p:nvPr/>
+            </p:nvGrpSpPr>
+            <p:grpSpPr bwMode="auto">
+              <a:xfrm rot="10800000">
+                <a:off x="571500" y="1336194"/>
+                <a:ext cx="3974220" cy="3337515"/>
+                <a:chOff x="0" y="0"/>
+                <a:chExt cx="3974220" cy="3337515"/>
+              </a:xfrm>
+            </p:grpSpPr>
+            <p:cxnSp>
+              <p:nvCxnSpPr>
+                <p:cNvPr id="646056537" name=""/>
+                <p:cNvCxnSpPr/>
+                <p:nvPr/>
+              </p:nvCxnSpPr>
+              <p:spPr bwMode="auto">
+                <a:xfrm rot="10800000" flipH="0" flipV="0">
+                  <a:off x="2436300" y="1668753"/>
+                  <a:ext cx="805230" cy="0"/>
+                </a:xfrm>
+                <a:prstGeom prst="line">
+                  <a:avLst/>
+                </a:prstGeom>
+                <a:ln w="38100" cap="flat" cmpd="sng" algn="ctr">
+                  <a:solidFill>
+                    <a:srgbClr val="000000"/>
+                  </a:solidFill>
+                  <a:prstDash val="solid"/>
+                  <a:miter lim="800000"/>
+                </a:ln>
+              </p:spPr>
+              <p:style>
+                <a:lnRef idx="1">
+                  <a:schemeClr val="accent1">
+                    <a:shade val="50000"/>
+                  </a:schemeClr>
+                </a:lnRef>
+                <a:fillRef idx="0">
+                  <a:schemeClr val="accent1"/>
+                </a:fillRef>
+                <a:effectRef idx="0">
+                  <a:schemeClr val="accent1"/>
+                </a:effectRef>
+                <a:fontRef idx="minor">
+                  <a:schemeClr val="tx1"/>
+                </a:fontRef>
+              </p:style>
+            </p:cxnSp>
+            <p:cxnSp>
+              <p:nvCxnSpPr>
+                <p:cNvPr id="1117192866" name=""/>
+                <p:cNvCxnSpPr/>
+                <p:nvPr/>
+              </p:nvCxnSpPr>
+              <p:spPr bwMode="auto">
+                <a:xfrm rot="16199998" flipH="0" flipV="1">
+                  <a:off x="2370879" y="431757"/>
+                  <a:ext cx="1043366" cy="912529"/>
+                </a:xfrm>
+                <a:prstGeom prst="line">
+                  <a:avLst/>
+                </a:prstGeom>
+                <a:ln w="38100" cap="flat" cmpd="sng" algn="ctr">
+                  <a:solidFill>
+                    <a:srgbClr val="000000"/>
+                  </a:solidFill>
+                  <a:prstDash val="solid"/>
+                  <a:miter lim="800000"/>
+                </a:ln>
+              </p:spPr>
+              <p:style>
+                <a:lnRef idx="1">
+                  <a:schemeClr val="accent1">
+                    <a:shade val="50000"/>
+                  </a:schemeClr>
+                </a:lnRef>
+                <a:fillRef idx="0">
+                  <a:schemeClr val="accent1"/>
+                </a:fillRef>
+                <a:effectRef idx="0">
+                  <a:schemeClr val="accent1"/>
+                </a:effectRef>
+                <a:fontRef idx="minor">
+                  <a:schemeClr val="tx1"/>
+                </a:fontRef>
+              </p:style>
+            </p:cxnSp>
+            <p:cxnSp>
+              <p:nvCxnSpPr>
+                <p:cNvPr id="1004321018" name=""/>
+                <p:cNvCxnSpPr/>
+                <p:nvPr/>
+              </p:nvCxnSpPr>
+              <p:spPr bwMode="auto">
+                <a:xfrm rot="5399997" flipH="0" flipV="0">
+                  <a:off x="2370880" y="1993221"/>
+                  <a:ext cx="1043364" cy="912529"/>
+                </a:xfrm>
+                <a:prstGeom prst="line">
+                  <a:avLst/>
+                </a:prstGeom>
+                <a:ln w="38100" cap="flat" cmpd="sng" algn="ctr">
+                  <a:solidFill>
+                    <a:srgbClr val="000000"/>
+                  </a:solidFill>
+                  <a:prstDash val="solid"/>
+                  <a:miter lim="800000"/>
+                </a:ln>
+              </p:spPr>
+              <p:style>
+                <a:lnRef idx="1">
+                  <a:schemeClr val="accent1">
+                    <a:shade val="50000"/>
+                  </a:schemeClr>
+                </a:lnRef>
+                <a:fillRef idx="0">
+                  <a:schemeClr val="accent1"/>
+                </a:fillRef>
+                <a:effectRef idx="0">
+                  <a:schemeClr val="accent1"/>
+                </a:effectRef>
+                <a:fontRef idx="minor">
+                  <a:schemeClr val="tx1"/>
+                </a:fontRef>
+              </p:style>
+            </p:cxnSp>
+            <p:sp>
+              <p:nvSpPr>
+                <p:cNvPr id="981816707" name=""/>
+                <p:cNvSpPr/>
+                <p:nvPr/>
+              </p:nvSpPr>
+              <p:spPr bwMode="auto">
+                <a:xfrm rot="0" flipH="0" flipV="0">
+                  <a:off x="3241530" y="1302405"/>
+                  <a:ext cx="732690" cy="732690"/>
+                </a:xfrm>
+                <a:prstGeom prst="ellipse">
+                  <a:avLst/>
+                </a:prstGeom>
+                <a:solidFill>
+                  <a:srgbClr val="E173FF"/>
+                </a:solidFill>
+                <a:ln w="38100" cap="flat" cmpd="sng" algn="ctr">
+                  <a:solidFill>
+                    <a:srgbClr val="000000"/>
+                  </a:solidFill>
+                  <a:prstDash val="solid"/>
+                  <a:miter lim="800000"/>
+                </a:ln>
+              </p:spPr>
+              <p:style>
+                <a:lnRef idx="2">
+                  <a:schemeClr val="accent1">
+                    <a:shade val="50000"/>
+                  </a:schemeClr>
+                </a:lnRef>
+                <a:fillRef idx="1">
+                  <a:schemeClr val="accent1"/>
+                </a:fillRef>
+                <a:effectRef idx="0">
+                  <a:schemeClr val="accent1"/>
+                </a:effectRef>
+                <a:fontRef idx="minor">
+                  <a:schemeClr val="lt1"/>
+                </a:fontRef>
+              </p:style>
+            </p:sp>
+            <p:cxnSp>
+              <p:nvCxnSpPr>
+                <p:cNvPr id="264740111" name=""/>
+                <p:cNvCxnSpPr/>
+                <p:nvPr/>
+              </p:nvCxnSpPr>
+              <p:spPr bwMode="auto">
+                <a:xfrm rot="10800000" flipH="0" flipV="0">
+                  <a:off x="732690" y="2971170"/>
+                  <a:ext cx="970920" cy="0"/>
+                </a:xfrm>
+                <a:prstGeom prst="line">
+                  <a:avLst/>
+                </a:prstGeom>
+                <a:ln w="38100" cap="flat" cmpd="sng" algn="ctr">
+                  <a:solidFill>
+                    <a:schemeClr val="tx1"/>
+                  </a:solidFill>
+                  <a:prstDash val="solid"/>
+                  <a:miter lim="800000"/>
+                </a:ln>
+              </p:spPr>
+              <p:style>
+                <a:lnRef idx="1">
+                  <a:schemeClr val="accent1">
+                    <a:shade val="50000"/>
+                  </a:schemeClr>
+                </a:lnRef>
+                <a:fillRef idx="0">
+                  <a:schemeClr val="accent1"/>
+                </a:fillRef>
+                <a:effectRef idx="0">
+                  <a:schemeClr val="accent1"/>
+                </a:effectRef>
+                <a:fontRef idx="minor">
+                  <a:schemeClr val="tx1"/>
+                </a:fontRef>
+              </p:style>
+            </p:cxnSp>
+            <p:cxnSp>
+              <p:nvCxnSpPr>
+                <p:cNvPr id="1404345879" name=""/>
+                <p:cNvCxnSpPr/>
+                <p:nvPr/>
+              </p:nvCxnSpPr>
+              <p:spPr bwMode="auto">
+                <a:xfrm rot="10800000" flipH="0" flipV="1">
+                  <a:off x="732690" y="1668753"/>
+                  <a:ext cx="970920" cy="0"/>
+                </a:xfrm>
+                <a:prstGeom prst="line">
+                  <a:avLst/>
+                </a:prstGeom>
+                <a:ln w="38100" cap="flat" cmpd="sng" algn="ctr">
+                  <a:solidFill>
+                    <a:schemeClr val="tx1"/>
+                  </a:solidFill>
+                  <a:prstDash val="solid"/>
+                  <a:miter lim="800000"/>
+                </a:ln>
+              </p:spPr>
+              <p:style>
+                <a:lnRef idx="1">
+                  <a:schemeClr val="accent1">
+                    <a:shade val="50000"/>
+                  </a:schemeClr>
+                </a:lnRef>
+                <a:fillRef idx="0">
+                  <a:schemeClr val="accent1"/>
+                </a:fillRef>
+                <a:effectRef idx="0">
+                  <a:schemeClr val="accent1"/>
+                </a:effectRef>
+                <a:fontRef idx="minor">
+                  <a:schemeClr val="tx1"/>
+                </a:fontRef>
+              </p:style>
+            </p:cxnSp>
+            <p:cxnSp>
+              <p:nvCxnSpPr>
+                <p:cNvPr id="1540731748" name=""/>
+                <p:cNvCxnSpPr/>
+                <p:nvPr/>
+              </p:nvCxnSpPr>
+              <p:spPr bwMode="auto">
+                <a:xfrm rot="10800000" flipH="0" flipV="0">
+                  <a:off x="732690" y="366345"/>
+                  <a:ext cx="970920" cy="0"/>
+                </a:xfrm>
+                <a:prstGeom prst="line">
+                  <a:avLst/>
+                </a:prstGeom>
+                <a:ln w="38100" cap="flat" cmpd="sng" algn="ctr">
+                  <a:solidFill>
+                    <a:schemeClr val="tx1"/>
+                  </a:solidFill>
+                  <a:prstDash val="solid"/>
+                  <a:miter lim="800000"/>
+                </a:ln>
+              </p:spPr>
+              <p:style>
+                <a:lnRef idx="1">
+                  <a:schemeClr val="accent1">
+                    <a:shade val="50000"/>
+                  </a:schemeClr>
+                </a:lnRef>
+                <a:fillRef idx="0">
+                  <a:schemeClr val="accent1"/>
+                </a:fillRef>
+                <a:effectRef idx="0">
+                  <a:schemeClr val="accent1"/>
+                </a:effectRef>
+                <a:fontRef idx="minor">
+                  <a:schemeClr val="tx1"/>
+                </a:fontRef>
+              </p:style>
+            </p:cxnSp>
+            <p:grpSp>
+              <p:nvGrpSpPr>
+                <p:cNvPr id="757852487" name=""/>
+                <p:cNvGrpSpPr/>
+                <p:nvPr/>
+              </p:nvGrpSpPr>
+              <p:grpSpPr bwMode="auto">
+                <a:xfrm>
+                  <a:off x="0" y="0"/>
+                  <a:ext cx="732690" cy="3337515"/>
+                  <a:chOff x="0" y="0"/>
+                  <a:chExt cx="732690" cy="3337515"/>
+                </a:xfrm>
+              </p:grpSpPr>
+              <p:sp>
+                <p:nvSpPr>
+                  <p:cNvPr id="34744910" name=""/>
+                  <p:cNvSpPr/>
+                  <p:nvPr/>
+                </p:nvSpPr>
+                <p:spPr bwMode="auto">
+                  <a:xfrm rot="0" flipH="0" flipV="0">
+                    <a:off x="0" y="2604825"/>
+                    <a:ext cx="732690" cy="732690"/>
+                  </a:xfrm>
+                  <a:prstGeom prst="ellipse">
+                    <a:avLst/>
+                  </a:prstGeom>
+                  <a:solidFill>
+                    <a:srgbClr val="FF4C4C"/>
+                  </a:solidFill>
+                  <a:ln w="38100" cap="flat" cmpd="sng" algn="ctr">
+                    <a:solidFill>
+                      <a:srgbClr val="000000"/>
+                    </a:solidFill>
+                    <a:prstDash val="solid"/>
+                    <a:miter lim="800000"/>
+                  </a:ln>
+                </p:spPr>
+                <p:style>
+                  <a:lnRef idx="2">
+                    <a:schemeClr val="accent1">
+                      <a:shade val="50000"/>
+                    </a:schemeClr>
+                  </a:lnRef>
+                  <a:fillRef idx="1">
+                    <a:schemeClr val="accent1"/>
+                  </a:fillRef>
+                  <a:effectRef idx="0">
+                    <a:schemeClr val="accent1"/>
+                  </a:effectRef>
+                  <a:fontRef idx="minor">
+                    <a:schemeClr val="lt1"/>
+                  </a:fontRef>
+                </p:style>
+              </p:sp>
+              <p:sp>
+                <p:nvSpPr>
+                  <p:cNvPr id="614265771" name=""/>
+                  <p:cNvSpPr/>
+                  <p:nvPr/>
+                </p:nvSpPr>
+                <p:spPr bwMode="auto">
+                  <a:xfrm rot="0" flipH="0" flipV="0">
+                    <a:off x="0" y="1302405"/>
+                    <a:ext cx="732690" cy="732690"/>
+                  </a:xfrm>
+                  <a:prstGeom prst="ellipse">
+                    <a:avLst/>
+                  </a:prstGeom>
+                  <a:solidFill>
+                    <a:srgbClr val="FF4C4C"/>
+                  </a:solidFill>
+                  <a:ln w="38100" cap="flat" cmpd="sng" algn="ctr">
+                    <a:solidFill>
+                      <a:srgbClr val="000000"/>
+                    </a:solidFill>
+                    <a:prstDash val="solid"/>
+                    <a:miter lim="800000"/>
+                  </a:ln>
+                </p:spPr>
+                <p:style>
+                  <a:lnRef idx="2">
+                    <a:schemeClr val="accent1">
+                      <a:shade val="50000"/>
+                    </a:schemeClr>
+                  </a:lnRef>
+                  <a:fillRef idx="1">
+                    <a:schemeClr val="accent1"/>
+                  </a:fillRef>
+                  <a:effectRef idx="0">
+                    <a:schemeClr val="accent1"/>
+                  </a:effectRef>
+                  <a:fontRef idx="minor">
+                    <a:schemeClr val="lt1"/>
+                  </a:fontRef>
+                </p:style>
+              </p:sp>
+              <p:sp>
+                <p:nvSpPr>
+                  <p:cNvPr id="1483676357" name=""/>
+                  <p:cNvSpPr/>
+                  <p:nvPr/>
+                </p:nvSpPr>
+                <p:spPr bwMode="auto">
+                  <a:xfrm rot="0" flipH="0" flipV="0">
+                    <a:off x="0" y="0"/>
+                    <a:ext cx="732690" cy="732690"/>
+                  </a:xfrm>
+                  <a:prstGeom prst="ellipse">
+                    <a:avLst/>
+                  </a:prstGeom>
+                  <a:solidFill>
+                    <a:srgbClr val="FF4C4C"/>
+                  </a:solidFill>
+                  <a:ln w="38100" cap="flat" cmpd="sng" algn="ctr">
+                    <a:solidFill>
+                      <a:srgbClr val="000000"/>
+                    </a:solidFill>
+                    <a:prstDash val="solid"/>
+                    <a:miter lim="800000"/>
+                  </a:ln>
+                </p:spPr>
+                <p:style>
+                  <a:lnRef idx="2">
+                    <a:schemeClr val="accent1">
+                      <a:shade val="50000"/>
+                    </a:schemeClr>
+                  </a:lnRef>
+                  <a:fillRef idx="1">
+                    <a:schemeClr val="accent1"/>
+                  </a:fillRef>
+                  <a:effectRef idx="0">
+                    <a:schemeClr val="accent1"/>
+                  </a:effectRef>
+                  <a:fontRef idx="minor">
+                    <a:schemeClr val="lt1"/>
+                  </a:fontRef>
+                </p:style>
+              </p:sp>
+            </p:grpSp>
+            <p:grpSp>
+              <p:nvGrpSpPr>
+                <p:cNvPr id="569130598" name=""/>
+                <p:cNvGrpSpPr/>
+                <p:nvPr/>
+              </p:nvGrpSpPr>
+              <p:grpSpPr bwMode="auto">
+                <a:xfrm>
+                  <a:off x="1703610" y="0"/>
+                  <a:ext cx="732690" cy="3337515"/>
+                  <a:chOff x="0" y="0"/>
+                  <a:chExt cx="732690" cy="3337515"/>
+                </a:xfrm>
+              </p:grpSpPr>
+              <p:sp>
+                <p:nvSpPr>
+                  <p:cNvPr id="1602059064" name=""/>
+                  <p:cNvSpPr/>
+                  <p:nvPr/>
+                </p:nvSpPr>
+                <p:spPr bwMode="auto">
+                  <a:xfrm rot="0" flipH="0" flipV="0">
+                    <a:off x="0" y="2604825"/>
+                    <a:ext cx="732690" cy="732690"/>
+                  </a:xfrm>
+                  <a:prstGeom prst="ellipse">
+                    <a:avLst/>
+                  </a:prstGeom>
+                  <a:solidFill>
+                    <a:srgbClr val="FFC926"/>
+                  </a:solidFill>
+                  <a:ln w="38100" cap="flat" cmpd="sng" algn="ctr">
+                    <a:solidFill>
+                      <a:schemeClr val="tx1"/>
+                    </a:solidFill>
+                    <a:prstDash val="sysDash"/>
+                    <a:miter lim="800000"/>
+                  </a:ln>
+                </p:spPr>
+                <p:style>
+                  <a:lnRef idx="2">
+                    <a:schemeClr val="accent1">
+                      <a:shade val="50000"/>
+                    </a:schemeClr>
+                  </a:lnRef>
+                  <a:fillRef idx="1">
+                    <a:schemeClr val="accent1"/>
+                  </a:fillRef>
+                  <a:effectRef idx="0">
+                    <a:schemeClr val="accent1"/>
+                  </a:effectRef>
+                  <a:fontRef idx="minor">
+                    <a:schemeClr val="lt1"/>
+                  </a:fontRef>
+                </p:style>
+              </p:sp>
+              <p:sp>
+                <p:nvSpPr>
+                  <p:cNvPr id="1528945361" name=""/>
+                  <p:cNvSpPr/>
+                  <p:nvPr/>
+                </p:nvSpPr>
+                <p:spPr bwMode="auto">
+                  <a:xfrm rot="0" flipH="0" flipV="0">
+                    <a:off x="0" y="1302405"/>
+                    <a:ext cx="732690" cy="732690"/>
+                  </a:xfrm>
+                  <a:prstGeom prst="ellipse">
+                    <a:avLst/>
+                  </a:prstGeom>
+                  <a:solidFill>
+                    <a:srgbClr val="FFC926"/>
+                  </a:solidFill>
+                  <a:ln w="38100" cap="flat" cmpd="sng" algn="ctr">
+                    <a:solidFill>
+                      <a:schemeClr val="tx1"/>
+                    </a:solidFill>
+                    <a:prstDash val="sysDash"/>
+                    <a:miter lim="800000"/>
+                  </a:ln>
+                </p:spPr>
+                <p:style>
+                  <a:lnRef idx="2">
+                    <a:schemeClr val="accent1">
+                      <a:shade val="50000"/>
+                    </a:schemeClr>
+                  </a:lnRef>
+                  <a:fillRef idx="1">
+                    <a:schemeClr val="accent1"/>
+                  </a:fillRef>
+                  <a:effectRef idx="0">
+                    <a:schemeClr val="accent1"/>
+                  </a:effectRef>
+                  <a:fontRef idx="minor">
+                    <a:schemeClr val="lt1"/>
+                  </a:fontRef>
+                </p:style>
+              </p:sp>
+              <p:sp>
+                <p:nvSpPr>
+                  <p:cNvPr id="991956603" name=""/>
+                  <p:cNvSpPr/>
+                  <p:nvPr/>
+                </p:nvSpPr>
+                <p:spPr bwMode="auto">
+                  <a:xfrm rot="0" flipH="0" flipV="0">
+                    <a:off x="0" y="0"/>
+                    <a:ext cx="732690" cy="732690"/>
+                  </a:xfrm>
+                  <a:prstGeom prst="ellipse">
+                    <a:avLst/>
+                  </a:prstGeom>
+                  <a:solidFill>
+                    <a:srgbClr val="FFC926"/>
+                  </a:solidFill>
+                  <a:ln w="38100" cap="flat" cmpd="sng" algn="ctr">
+                    <a:solidFill>
+                      <a:schemeClr val="tx1"/>
+                    </a:solidFill>
+                    <a:prstDash val="sysDash"/>
+                    <a:miter lim="800000"/>
+                  </a:ln>
+                </p:spPr>
+                <p:style>
+                  <a:lnRef idx="2">
+                    <a:schemeClr val="accent1">
+                      <a:shade val="50000"/>
+                    </a:schemeClr>
+                  </a:lnRef>
+                  <a:fillRef idx="1">
+                    <a:schemeClr val="accent1"/>
+                  </a:fillRef>
+                  <a:effectRef idx="0">
+                    <a:schemeClr val="accent1"/>
+                  </a:effectRef>
+                  <a:fontRef idx="minor">
+                    <a:schemeClr val="lt1"/>
+                  </a:fontRef>
+                </p:style>
+              </p:sp>
+            </p:grpSp>
+          </p:grpSp>
+          <p:grpSp>
+            <p:nvGrpSpPr>
+              <p:cNvPr id="947574836" name=""/>
+              <p:cNvGrpSpPr/>
+              <p:nvPr/>
+            </p:nvGrpSpPr>
+            <p:grpSpPr bwMode="auto">
+              <a:xfrm>
+                <a:off x="766709" y="0"/>
+                <a:ext cx="3924297" cy="1161628"/>
+                <a:chOff x="0" y="0"/>
+                <a:chExt cx="3924297" cy="1161628"/>
+              </a:xfrm>
+            </p:grpSpPr>
+            <p:sp>
+              <p:nvSpPr>
+                <p:cNvPr id="4675470" name=""/>
+                <p:cNvSpPr/>
+                <p:nvPr/>
+              </p:nvSpPr>
+              <p:spPr bwMode="auto">
+                <a:xfrm rot="5400000" flipH="0" flipV="0">
+                  <a:off x="1851862" y="-910805"/>
+                  <a:ext cx="220572" cy="3924297"/>
+                </a:xfrm>
+                <a:prstGeom prst="leftBrace">
+                  <a:avLst>
+                    <a:gd name="adj1" fmla="val 101801"/>
+                    <a:gd name="adj2" fmla="val 50000"/>
+                  </a:avLst>
+                </a:prstGeom>
+                <a:ln w="38100" cap="flat" cmpd="sng" algn="ctr">
+                  <a:solidFill>
+                    <a:schemeClr val="tx1"/>
+                  </a:solidFill>
+                  <a:prstDash val="solid"/>
+                  <a:miter lim="800000"/>
+                </a:ln>
+              </p:spPr>
+              <p:style>
+                <a:lnRef idx="1">
+                  <a:schemeClr val="accent1">
+                    <a:shade val="50000"/>
+                  </a:schemeClr>
+                </a:lnRef>
+                <a:fillRef idx="0">
+                  <a:schemeClr val="accent1"/>
+                </a:fillRef>
+                <a:effectRef idx="0">
+                  <a:schemeClr val="accent1"/>
+                </a:effectRef>
+                <a:fontRef idx="minor">
+                  <a:schemeClr val="tx1"/>
+                </a:fontRef>
+              </p:style>
+            </p:sp>
+            <p:sp>
+              <p:nvSpPr>
+                <p:cNvPr id="1657431098" name=""/>
+                <p:cNvSpPr txBox="1"/>
+                <p:nvPr/>
+              </p:nvSpPr>
+              <p:spPr bwMode="auto">
+                <a:xfrm rot="0" flipH="0" flipV="0">
+                  <a:off x="887190" y="0"/>
+                  <a:ext cx="2145915" cy="885225"/>
+                </a:xfrm>
+                <a:prstGeom prst="rect">
+                  <a:avLst/>
+                </a:prstGeom>
+                <a:noFill/>
+              </p:spPr>
+              <p:txBody>
+                <a:bodyPr vertOverflow="overflow" horzOverflow="overflow" vert="horz" wrap="square" lIns="91440" tIns="45720" rIns="91440" bIns="45720" numCol="1" spcCol="0" rtlCol="0" fromWordArt="0" anchor="t" anchorCtr="0" forceAA="0" upright="0" compatLnSpc="0">
+                  <a:spAutoFit/>
+                </a:bodyPr>
+                <a:p>
+                  <a:pPr algn="ctr">
+                    <a:defRPr/>
+                  </a:pPr>
+                  <a:r>
+                    <a:rPr lang="fr-FR" sz="2600" b="1">
+                      <a:latin typeface="CMU Serif"/>
+                      <a:ea typeface="CMU Serif"/>
+                      <a:cs typeface="CMU Serif"/>
+                    </a:rPr>
+                    <a:t>Half-RGS</a:t>
+                  </a:r>
+                  <a:br>
+                    <a:rPr sz="2600" b="1">
+                      <a:latin typeface="CMU Serif"/>
+                      <a:cs typeface="CMU Serif"/>
+                    </a:rPr>
+                  </a:br>
+                  <a:r>
+                    <a:rPr lang="fr-FR" sz="2600" b="1">
+                      <a:latin typeface="CMU Serif"/>
+                      <a:cs typeface="CMU Serif"/>
+                    </a:rPr>
+                    <a:t>(</a:t>
+                  </a:r>
+                  <a:r>
+                    <a:rPr lang="fr-FR" sz="2600" b="1" i="1" u="none" strike="noStrike" cap="none" spc="0">
+                      <a:solidFill>
+                        <a:schemeClr val="tx1"/>
+                      </a:solidFill>
+                      <a:latin typeface="CMU Serif"/>
+                      <a:ea typeface="CMU Serif"/>
+                      <a:cs typeface="CMU Serif"/>
+                    </a:rPr>
+                    <a:t>m </a:t>
+                  </a:r>
+                  <a:r>
+                    <a:rPr lang="fr-FR" sz="2600" b="1" i="0" u="none" strike="noStrike" cap="none" spc="0">
+                      <a:solidFill>
+                        <a:schemeClr val="tx1"/>
+                      </a:solidFill>
+                      <a:latin typeface="CMU Serif"/>
+                      <a:ea typeface="CMU Serif"/>
+                      <a:cs typeface="CMU Serif"/>
+                    </a:rPr>
+                    <a:t>arms)</a:t>
+                  </a:r>
+                  <a:endParaRPr sz="2600" b="1">
+                    <a:latin typeface="CMU Serif"/>
+                    <a:cs typeface="CMU Serif"/>
+                  </a:endParaRPr>
+                </a:p>
+              </p:txBody>
+            </p:sp>
+          </p:grpSp>
+          <p:sp>
+            <p:nvSpPr>
+              <p:cNvPr id="1871346867" name=""/>
+              <p:cNvSpPr txBox="1"/>
+              <p:nvPr/>
+            </p:nvSpPr>
+            <p:spPr bwMode="auto">
+              <a:xfrm rot="5400000" flipH="0" flipV="0">
+                <a:off x="3150081" y="3349476"/>
+                <a:ext cx="668323" cy="640440"/>
+              </a:xfrm>
+              <a:prstGeom prst="rect">
+                <a:avLst/>
+              </a:prstGeom>
+              <a:noFill/>
+            </p:spPr>
+            <p:txBody>
+              <a:bodyPr vertOverflow="overflow" horzOverflow="overflow" vert="horz" wrap="square" lIns="91440" tIns="45720" rIns="91440" bIns="45720" numCol="1" spcCol="0" rtlCol="0" fromWordArt="0" anchor="t" anchorCtr="0" forceAA="0" upright="0" compatLnSpc="0">
+                <a:spAutoFit/>
+              </a:bodyPr>
+              <a:p>
+                <a:pPr>
+                  <a:defRPr/>
+                </a:pPr>
+                <a:r>
+                  <a:rPr lang="fr-FR" sz="3600" b="1" i="0" u="none" strike="noStrike" cap="none" spc="0">
+                    <a:solidFill>
+                      <a:schemeClr val="tx1"/>
+                    </a:solidFill>
+                    <a:latin typeface="Arial"/>
+                    <a:ea typeface="Arial"/>
+                    <a:cs typeface="Arial"/>
+                  </a:rPr>
+                  <a:t>…</a:t>
+                </a:r>
+                <a:endParaRPr sz="3600" b="1"/>
+              </a:p>
+            </p:txBody>
+          </p:sp>
+          <p:sp>
+            <p:nvSpPr>
+              <p:cNvPr id="2064214414" name=""/>
+              <p:cNvSpPr txBox="1"/>
+              <p:nvPr/>
+            </p:nvSpPr>
+            <p:spPr bwMode="auto">
+              <a:xfrm rot="0" flipH="0" flipV="0">
+                <a:off x="0" y="3499237"/>
+                <a:ext cx="1538642" cy="884279"/>
+              </a:xfrm>
+              <a:prstGeom prst="rect">
+                <a:avLst/>
+              </a:prstGeom>
+              <a:noFill/>
+            </p:spPr>
+            <p:txBody>
+              <a:bodyPr vertOverflow="overflow" horzOverflow="overflow" vert="horz" wrap="square" lIns="91440" tIns="45720" rIns="91440" bIns="45720" numCol="1" spcCol="0" rtlCol="0" fromWordArt="0" anchor="t" anchorCtr="0" forceAA="0" upright="0" compatLnSpc="0">
+                <a:spAutoFit/>
+              </a:bodyPr>
+              <a:p>
+                <a:pPr algn="ctr">
+                  <a:defRPr/>
+                </a:pPr>
+                <a:r>
+                  <a:rPr lang="fr-FR" sz="2600" b="1" i="0">
+                    <a:solidFill>
+                      <a:srgbClr val="DB4CFF"/>
+                    </a:solidFill>
+                    <a:latin typeface="CMU Serif"/>
+                    <a:ea typeface="CMU Serif"/>
+                    <a:cs typeface="CMU Serif"/>
+                  </a:rPr>
+                  <a:t>Anchor qubit</a:t>
+                </a:r>
+                <a:endParaRPr sz="2600" b="1" i="0">
+                  <a:solidFill>
+                    <a:srgbClr val="DB4CFF"/>
+                  </a:solidFill>
+                  <a:latin typeface="CMU Serif"/>
+                  <a:cs typeface="CMU Serif"/>
+                </a:endParaRPr>
+              </a:p>
+            </p:txBody>
+          </p:sp>
+        </p:grpSp>
+        <p:grpSp>
+          <p:nvGrpSpPr>
+            <p:cNvPr id="1024688950" name=""/>
+            <p:cNvGrpSpPr/>
+            <p:nvPr/>
+          </p:nvGrpSpPr>
+          <p:grpSpPr bwMode="auto">
+            <a:xfrm rot="0" flipH="0" flipV="0">
+              <a:off x="6488552" y="1300436"/>
+              <a:ext cx="3974220" cy="3337515"/>
+              <a:chOff x="0" y="0"/>
+              <a:chExt cx="3974220" cy="3337515"/>
+            </a:xfrm>
+          </p:grpSpPr>
+          <p:cxnSp>
+            <p:nvCxnSpPr>
+              <p:cNvPr id="1254372657" name=""/>
+              <p:cNvCxnSpPr/>
+              <p:nvPr/>
+            </p:nvCxnSpPr>
+            <p:spPr bwMode="auto">
+              <a:xfrm rot="10800000" flipH="0" flipV="0">
+                <a:off x="2436300" y="1668753"/>
+                <a:ext cx="805230" cy="0"/>
+              </a:xfrm>
+              <a:prstGeom prst="line">
+                <a:avLst/>
+              </a:prstGeom>
+              <a:ln w="38100" cap="flat" cmpd="sng" algn="ctr">
+                <a:solidFill>
+                  <a:srgbClr val="000000"/>
+                </a:solidFill>
+                <a:prstDash val="solid"/>
+                <a:miter lim="800000"/>
+              </a:ln>
+            </p:spPr>
+            <p:style>
+              <a:lnRef idx="1">
+                <a:schemeClr val="accent1">
+                  <a:shade val="50000"/>
+                </a:schemeClr>
+              </a:lnRef>
+              <a:fillRef idx="0">
+                <a:schemeClr val="accent1"/>
+              </a:fillRef>
+              <a:effectRef idx="0">
+                <a:schemeClr val="accent1"/>
+              </a:effectRef>
+              <a:fontRef idx="minor">
+                <a:schemeClr val="tx1"/>
+              </a:fontRef>
+            </p:style>
+          </p:cxnSp>
+          <p:cxnSp>
+            <p:nvCxnSpPr>
+              <p:cNvPr id="964976295" name=""/>
+              <p:cNvCxnSpPr/>
+              <p:nvPr/>
+            </p:nvCxnSpPr>
+            <p:spPr bwMode="auto">
+              <a:xfrm rot="16199998" flipH="0" flipV="1">
+                <a:off x="2370880" y="431759"/>
+                <a:ext cx="1043366" cy="912529"/>
+              </a:xfrm>
+              <a:prstGeom prst="line">
+                <a:avLst/>
+              </a:prstGeom>
+              <a:ln w="38100" cap="flat" cmpd="sng" algn="ctr">
+                <a:solidFill>
+                  <a:srgbClr val="000000"/>
+                </a:solidFill>
+                <a:prstDash val="solid"/>
+                <a:miter lim="800000"/>
+              </a:ln>
+            </p:spPr>
+            <p:style>
+              <a:lnRef idx="1">
+                <a:schemeClr val="accent1">
+                  <a:shade val="50000"/>
+                </a:schemeClr>
+              </a:lnRef>
+              <a:fillRef idx="0">
+                <a:schemeClr val="accent1"/>
+              </a:fillRef>
+              <a:effectRef idx="0">
+                <a:schemeClr val="accent1"/>
+              </a:effectRef>
+              <a:fontRef idx="minor">
+                <a:schemeClr val="tx1"/>
+              </a:fontRef>
+            </p:style>
+          </p:cxnSp>
+          <p:cxnSp>
+            <p:nvCxnSpPr>
+              <p:cNvPr id="1449603712" name=""/>
+              <p:cNvCxnSpPr/>
+              <p:nvPr/>
+            </p:nvCxnSpPr>
+            <p:spPr bwMode="auto">
+              <a:xfrm rot="5399997" flipH="0" flipV="0">
+                <a:off x="2370881" y="1993221"/>
+                <a:ext cx="1043364" cy="912529"/>
+              </a:xfrm>
+              <a:prstGeom prst="line">
+                <a:avLst/>
+              </a:prstGeom>
+              <a:ln w="38100" cap="flat" cmpd="sng" algn="ctr">
+                <a:solidFill>
+                  <a:srgbClr val="000000"/>
+                </a:solidFill>
+                <a:prstDash val="solid"/>
+                <a:miter lim="800000"/>
+              </a:ln>
+            </p:spPr>
+            <p:style>
+              <a:lnRef idx="1">
+                <a:schemeClr val="accent1">
+                  <a:shade val="50000"/>
+                </a:schemeClr>
+              </a:lnRef>
+              <a:fillRef idx="0">
+                <a:schemeClr val="accent1"/>
+              </a:fillRef>
+              <a:effectRef idx="0">
+                <a:schemeClr val="accent1"/>
+              </a:effectRef>
+              <a:fontRef idx="minor">
+                <a:schemeClr val="tx1"/>
+              </a:fontRef>
+            </p:style>
+          </p:cxnSp>
+          <p:sp>
+            <p:nvSpPr>
+              <p:cNvPr id="919123189" name=""/>
+              <p:cNvSpPr/>
+              <p:nvPr/>
+            </p:nvSpPr>
+            <p:spPr bwMode="auto">
+              <a:xfrm rot="0" flipH="0" flipV="0">
+                <a:off x="3241530" y="1302408"/>
+                <a:ext cx="732690" cy="732690"/>
+              </a:xfrm>
+              <a:prstGeom prst="ellipse">
+                <a:avLst/>
+              </a:prstGeom>
+              <a:solidFill>
+                <a:srgbClr val="E173FF"/>
+              </a:solidFill>
+              <a:ln w="38100" cap="flat" cmpd="sng" algn="ctr">
+                <a:solidFill>
+                  <a:srgbClr val="000000"/>
+                </a:solidFill>
+                <a:prstDash val="solid"/>
+                <a:miter lim="800000"/>
+              </a:ln>
+            </p:spPr>
+            <p:style>
+              <a:lnRef idx="2">
+                <a:schemeClr val="accent1">
+                  <a:shade val="50000"/>
+                </a:schemeClr>
+              </a:lnRef>
+              <a:fillRef idx="1">
+                <a:schemeClr val="accent1"/>
+              </a:fillRef>
+              <a:effectRef idx="0">
+                <a:schemeClr val="accent1"/>
+              </a:effectRef>
+              <a:fontRef idx="minor">
+                <a:schemeClr val="lt1"/>
+              </a:fontRef>
+            </p:style>
+          </p:sp>
+          <p:cxnSp>
+            <p:nvCxnSpPr>
+              <p:cNvPr id="1612973621" name=""/>
+              <p:cNvCxnSpPr/>
+              <p:nvPr/>
+            </p:nvCxnSpPr>
+            <p:spPr bwMode="auto">
+              <a:xfrm rot="10800000" flipH="0" flipV="0">
+                <a:off x="732690" y="2971170"/>
+                <a:ext cx="970920" cy="0"/>
+              </a:xfrm>
+              <a:prstGeom prst="line">
+                <a:avLst/>
+              </a:prstGeom>
+              <a:ln w="38100" cap="flat" cmpd="sng" algn="ctr">
+                <a:solidFill>
+                  <a:schemeClr val="tx1"/>
+                </a:solidFill>
+                <a:prstDash val="solid"/>
+                <a:miter lim="800000"/>
+              </a:ln>
+            </p:spPr>
+            <p:style>
+              <a:lnRef idx="1">
+                <a:schemeClr val="accent1">
+                  <a:shade val="50000"/>
+                </a:schemeClr>
+              </a:lnRef>
+              <a:fillRef idx="0">
+                <a:schemeClr val="accent1"/>
+              </a:fillRef>
+              <a:effectRef idx="0">
+                <a:schemeClr val="accent1"/>
+              </a:effectRef>
+              <a:fontRef idx="minor">
+                <a:schemeClr val="tx1"/>
+              </a:fontRef>
+            </p:style>
+          </p:cxnSp>
+          <p:cxnSp>
+            <p:nvCxnSpPr>
+              <p:cNvPr id="846460079" name=""/>
+              <p:cNvCxnSpPr/>
+              <p:nvPr/>
+            </p:nvCxnSpPr>
+            <p:spPr bwMode="auto">
+              <a:xfrm rot="10800000" flipH="0" flipV="1">
+                <a:off x="732690" y="1668753"/>
+                <a:ext cx="970920" cy="0"/>
+              </a:xfrm>
+              <a:prstGeom prst="line">
+                <a:avLst/>
+              </a:prstGeom>
+              <a:ln w="38100" cap="flat" cmpd="sng" algn="ctr">
+                <a:solidFill>
+                  <a:schemeClr val="tx1"/>
+                </a:solidFill>
+                <a:prstDash val="solid"/>
+                <a:miter lim="800000"/>
+              </a:ln>
+            </p:spPr>
+            <p:style>
+              <a:lnRef idx="1">
+                <a:schemeClr val="accent1">
+                  <a:shade val="50000"/>
+                </a:schemeClr>
+              </a:lnRef>
+              <a:fillRef idx="0">
+                <a:schemeClr val="accent1"/>
+              </a:fillRef>
+              <a:effectRef idx="0">
+                <a:schemeClr val="accent1"/>
+              </a:effectRef>
+              <a:fontRef idx="minor">
+                <a:schemeClr val="tx1"/>
+              </a:fontRef>
+            </p:style>
+          </p:cxnSp>
+          <p:cxnSp>
+            <p:nvCxnSpPr>
+              <p:cNvPr id="521196869" name=""/>
+              <p:cNvCxnSpPr/>
+              <p:nvPr/>
+            </p:nvCxnSpPr>
+            <p:spPr bwMode="auto">
+              <a:xfrm rot="10800000" flipH="0" flipV="0">
+                <a:off x="732690" y="366345"/>
+                <a:ext cx="970920" cy="0"/>
+              </a:xfrm>
+              <a:prstGeom prst="line">
+                <a:avLst/>
+              </a:prstGeom>
+              <a:ln w="38100" cap="flat" cmpd="sng" algn="ctr">
+                <a:solidFill>
+                  <a:schemeClr val="tx1"/>
+                </a:solidFill>
+                <a:prstDash val="solid"/>
+                <a:miter lim="800000"/>
+              </a:ln>
+            </p:spPr>
+            <p:style>
+              <a:lnRef idx="1">
+                <a:schemeClr val="accent1">
+                  <a:shade val="50000"/>
+                </a:schemeClr>
+              </a:lnRef>
+              <a:fillRef idx="0">
+                <a:schemeClr val="accent1"/>
+              </a:fillRef>
+              <a:effectRef idx="0">
+                <a:schemeClr val="accent1"/>
+              </a:effectRef>
+              <a:fontRef idx="minor">
+                <a:schemeClr val="tx1"/>
+              </a:fontRef>
+            </p:style>
+          </p:cxnSp>
+          <p:grpSp>
+            <p:nvGrpSpPr>
+              <p:cNvPr id="1977284577" name=""/>
+              <p:cNvGrpSpPr/>
+              <p:nvPr/>
+            </p:nvGrpSpPr>
+            <p:grpSpPr bwMode="auto">
+              <a:xfrm>
+                <a:off x="0" y="0"/>
+                <a:ext cx="732690" cy="3337515"/>
+                <a:chOff x="0" y="0"/>
+                <a:chExt cx="732690" cy="3337515"/>
+              </a:xfrm>
+            </p:grpSpPr>
+            <p:sp>
+              <p:nvSpPr>
+                <p:cNvPr id="1154907552" name=""/>
+                <p:cNvSpPr/>
+                <p:nvPr/>
+              </p:nvSpPr>
+              <p:spPr bwMode="auto">
+                <a:xfrm rot="0" flipH="0" flipV="0">
+                  <a:off x="0" y="2604825"/>
+                  <a:ext cx="732690" cy="732690"/>
+                </a:xfrm>
+                <a:prstGeom prst="ellipse">
+                  <a:avLst/>
+                </a:prstGeom>
+                <a:solidFill>
+                  <a:srgbClr val="FF4C4C"/>
+                </a:solidFill>
+                <a:ln w="38100" cap="flat" cmpd="sng" algn="ctr">
+                  <a:solidFill>
+                    <a:srgbClr val="000000"/>
+                  </a:solidFill>
+                  <a:prstDash val="solid"/>
+                  <a:miter lim="800000"/>
+                </a:ln>
+              </p:spPr>
+              <p:style>
+                <a:lnRef idx="2">
+                  <a:schemeClr val="accent1">
+                    <a:shade val="50000"/>
+                  </a:schemeClr>
+                </a:lnRef>
+                <a:fillRef idx="1">
+                  <a:schemeClr val="accent1"/>
+                </a:fillRef>
+                <a:effectRef idx="0">
+                  <a:schemeClr val="accent1"/>
+                </a:effectRef>
+                <a:fontRef idx="minor">
+                  <a:schemeClr val="lt1"/>
+                </a:fontRef>
+              </p:style>
+            </p:sp>
+            <p:sp>
+              <p:nvSpPr>
+                <p:cNvPr id="949888695" name=""/>
+                <p:cNvSpPr/>
+                <p:nvPr/>
+              </p:nvSpPr>
+              <p:spPr bwMode="auto">
+                <a:xfrm rot="0" flipH="0" flipV="0">
+                  <a:off x="0" y="1302406"/>
+                  <a:ext cx="732690" cy="732690"/>
+                </a:xfrm>
+                <a:prstGeom prst="ellipse">
+                  <a:avLst/>
+                </a:prstGeom>
+                <a:solidFill>
+                  <a:srgbClr val="FF4C4C"/>
+                </a:solidFill>
+                <a:ln w="38100" cap="flat" cmpd="sng" algn="ctr">
+                  <a:solidFill>
+                    <a:srgbClr val="000000"/>
+                  </a:solidFill>
+                  <a:prstDash val="solid"/>
+                  <a:miter lim="800000"/>
+                </a:ln>
+              </p:spPr>
+              <p:style>
+                <a:lnRef idx="2">
+                  <a:schemeClr val="accent1">
+                    <a:shade val="50000"/>
+                  </a:schemeClr>
+                </a:lnRef>
+                <a:fillRef idx="1">
+                  <a:schemeClr val="accent1"/>
+                </a:fillRef>
+                <a:effectRef idx="0">
+                  <a:schemeClr val="accent1"/>
+                </a:effectRef>
+                <a:fontRef idx="minor">
+                  <a:schemeClr val="lt1"/>
+                </a:fontRef>
+              </p:style>
+            </p:sp>
+            <p:sp>
+              <p:nvSpPr>
+                <p:cNvPr id="868553331" name=""/>
+                <p:cNvSpPr/>
+                <p:nvPr/>
+              </p:nvSpPr>
+              <p:spPr bwMode="auto">
+                <a:xfrm rot="0" flipH="0" flipV="0">
+                  <a:off x="0" y="0"/>
+                  <a:ext cx="732690" cy="732690"/>
+                </a:xfrm>
+                <a:prstGeom prst="ellipse">
+                  <a:avLst/>
+                </a:prstGeom>
+                <a:solidFill>
+                  <a:srgbClr val="FF4C4C"/>
+                </a:solidFill>
+                <a:ln w="38100" cap="flat" cmpd="sng" algn="ctr">
+                  <a:solidFill>
+                    <a:srgbClr val="000000"/>
+                  </a:solidFill>
+                  <a:prstDash val="solid"/>
+                  <a:miter lim="800000"/>
+                </a:ln>
+              </p:spPr>
+              <p:style>
+                <a:lnRef idx="2">
+                  <a:schemeClr val="accent1">
+                    <a:shade val="50000"/>
+                  </a:schemeClr>
+                </a:lnRef>
+                <a:fillRef idx="1">
+                  <a:schemeClr val="accent1"/>
+                </a:fillRef>
+                <a:effectRef idx="0">
+                  <a:schemeClr val="accent1"/>
+                </a:effectRef>
+                <a:fontRef idx="minor">
+                  <a:schemeClr val="lt1"/>
+                </a:fontRef>
+              </p:style>
+            </p:sp>
+          </p:grpSp>
+          <p:grpSp>
+            <p:nvGrpSpPr>
+              <p:cNvPr id="1411680971" name=""/>
+              <p:cNvGrpSpPr/>
+              <p:nvPr/>
+            </p:nvGrpSpPr>
+            <p:grpSpPr bwMode="auto">
+              <a:xfrm>
+                <a:off x="1703610" y="0"/>
+                <a:ext cx="732690" cy="3337515"/>
+                <a:chOff x="0" y="0"/>
+                <a:chExt cx="732690" cy="3337515"/>
+              </a:xfrm>
+            </p:grpSpPr>
+            <p:sp>
+              <p:nvSpPr>
+                <p:cNvPr id="1786411738" name=""/>
+                <p:cNvSpPr/>
+                <p:nvPr/>
+              </p:nvSpPr>
+              <p:spPr bwMode="auto">
+                <a:xfrm rot="0" flipH="0" flipV="0">
+                  <a:off x="0" y="2604825"/>
+                  <a:ext cx="732690" cy="732690"/>
+                </a:xfrm>
+                <a:prstGeom prst="ellipse">
+                  <a:avLst/>
+                </a:prstGeom>
+                <a:solidFill>
+                  <a:srgbClr val="FFC926"/>
+                </a:solidFill>
+                <a:ln w="38100" cap="flat" cmpd="sng" algn="ctr">
+                  <a:solidFill>
+                    <a:schemeClr val="tx1"/>
+                  </a:solidFill>
+                  <a:prstDash val="sysDash"/>
+                  <a:miter lim="800000"/>
+                </a:ln>
+              </p:spPr>
+              <p:style>
+                <a:lnRef idx="2">
+                  <a:schemeClr val="accent1">
+                    <a:shade val="50000"/>
+                  </a:schemeClr>
+                </a:lnRef>
+                <a:fillRef idx="1">
+                  <a:schemeClr val="accent1"/>
+                </a:fillRef>
+                <a:effectRef idx="0">
+                  <a:schemeClr val="accent1"/>
+                </a:effectRef>
+                <a:fontRef idx="minor">
+                  <a:schemeClr val="lt1"/>
+                </a:fontRef>
+              </p:style>
+            </p:sp>
+            <p:sp>
+              <p:nvSpPr>
+                <p:cNvPr id="1886639013" name=""/>
+                <p:cNvSpPr/>
+                <p:nvPr/>
+              </p:nvSpPr>
+              <p:spPr bwMode="auto">
+                <a:xfrm rot="0" flipH="0" flipV="0">
+                  <a:off x="0" y="1302406"/>
+                  <a:ext cx="732690" cy="732690"/>
+                </a:xfrm>
+                <a:prstGeom prst="ellipse">
+                  <a:avLst/>
+                </a:prstGeom>
+                <a:solidFill>
+                  <a:srgbClr val="FFC926"/>
+                </a:solidFill>
+                <a:ln w="38100" cap="flat" cmpd="sng" algn="ctr">
+                  <a:solidFill>
+                    <a:schemeClr val="tx1"/>
+                  </a:solidFill>
+                  <a:prstDash val="sysDash"/>
+                  <a:miter lim="800000"/>
+                </a:ln>
+              </p:spPr>
+              <p:style>
+                <a:lnRef idx="2">
+                  <a:schemeClr val="accent1">
+                    <a:shade val="50000"/>
+                  </a:schemeClr>
+                </a:lnRef>
+                <a:fillRef idx="1">
+                  <a:schemeClr val="accent1"/>
+                </a:fillRef>
+                <a:effectRef idx="0">
+                  <a:schemeClr val="accent1"/>
+                </a:effectRef>
+                <a:fontRef idx="minor">
+                  <a:schemeClr val="lt1"/>
+                </a:fontRef>
+              </p:style>
+            </p:sp>
+            <p:sp>
+              <p:nvSpPr>
+                <p:cNvPr id="202573799" name=""/>
+                <p:cNvSpPr/>
+                <p:nvPr/>
+              </p:nvSpPr>
+              <p:spPr bwMode="auto">
+                <a:xfrm rot="0" flipH="0" flipV="0">
+                  <a:off x="0" y="0"/>
+                  <a:ext cx="732690" cy="732690"/>
+                </a:xfrm>
+                <a:prstGeom prst="ellipse">
+                  <a:avLst/>
+                </a:prstGeom>
+                <a:solidFill>
+                  <a:srgbClr val="FFC926"/>
+                </a:solidFill>
+                <a:ln w="38100" cap="flat" cmpd="sng" algn="ctr">
+                  <a:solidFill>
+                    <a:schemeClr val="tx1"/>
+                  </a:solidFill>
+                  <a:prstDash val="sysDash"/>
+                  <a:miter lim="800000"/>
+                </a:ln>
+              </p:spPr>
+              <p:style>
+                <a:lnRef idx="2">
+                  <a:schemeClr val="accent1">
+                    <a:shade val="50000"/>
+                  </a:schemeClr>
+                </a:lnRef>
+                <a:fillRef idx="1">
+                  <a:schemeClr val="accent1"/>
+                </a:fillRef>
+                <a:effectRef idx="0">
+                  <a:schemeClr val="accent1"/>
+                </a:effectRef>
+                <a:fontRef idx="minor">
+                  <a:schemeClr val="lt1"/>
+                </a:fontRef>
+              </p:style>
+            </p:sp>
+          </p:grpSp>
+        </p:grpSp>
+        <p:grpSp>
+          <p:nvGrpSpPr>
+            <p:cNvPr id="47262191" name=""/>
+            <p:cNvGrpSpPr/>
+            <p:nvPr/>
+          </p:nvGrpSpPr>
+          <p:grpSpPr bwMode="auto">
+            <a:xfrm rot="10800000" flipH="0" flipV="0">
+              <a:off x="11086471" y="1300436"/>
+              <a:ext cx="3974220" cy="3337515"/>
+              <a:chOff x="0" y="0"/>
+              <a:chExt cx="3974220" cy="3337515"/>
+            </a:xfrm>
+          </p:grpSpPr>
+          <p:cxnSp>
+            <p:nvCxnSpPr>
+              <p:cNvPr id="1936295763" name=""/>
+              <p:cNvCxnSpPr/>
+              <p:nvPr/>
+            </p:nvCxnSpPr>
+            <p:spPr bwMode="auto">
+              <a:xfrm rot="10800000" flipH="0" flipV="0">
+                <a:off x="2436300" y="1668753"/>
+                <a:ext cx="805230" cy="0"/>
+              </a:xfrm>
+              <a:prstGeom prst="line">
+                <a:avLst/>
+              </a:prstGeom>
+              <a:ln w="38100" cap="flat" cmpd="sng" algn="ctr">
+                <a:solidFill>
+                  <a:srgbClr val="000000"/>
+                </a:solidFill>
+                <a:prstDash val="solid"/>
+                <a:miter lim="800000"/>
+              </a:ln>
+            </p:spPr>
+            <p:style>
+              <a:lnRef idx="1">
+                <a:schemeClr val="accent1">
+                  <a:shade val="50000"/>
+                </a:schemeClr>
+              </a:lnRef>
+              <a:fillRef idx="0">
+                <a:schemeClr val="accent1"/>
+              </a:fillRef>
+              <a:effectRef idx="0">
+                <a:schemeClr val="accent1"/>
+              </a:effectRef>
+              <a:fontRef idx="minor">
+                <a:schemeClr val="tx1"/>
+              </a:fontRef>
+            </p:style>
+          </p:cxnSp>
+          <p:cxnSp>
+            <p:nvCxnSpPr>
+              <p:cNvPr id="423529484" name=""/>
+              <p:cNvCxnSpPr/>
+              <p:nvPr/>
+            </p:nvCxnSpPr>
+            <p:spPr bwMode="auto">
+              <a:xfrm rot="16199998" flipH="0" flipV="1">
+                <a:off x="2370879" y="431758"/>
+                <a:ext cx="1043366" cy="912529"/>
+              </a:xfrm>
+              <a:prstGeom prst="line">
+                <a:avLst/>
+              </a:prstGeom>
+              <a:ln w="38100" cap="flat" cmpd="sng" algn="ctr">
+                <a:solidFill>
+                  <a:srgbClr val="000000"/>
+                </a:solidFill>
+                <a:prstDash val="solid"/>
+                <a:miter lim="800000"/>
+              </a:ln>
+            </p:spPr>
+            <p:style>
+              <a:lnRef idx="1">
+                <a:schemeClr val="accent1">
+                  <a:shade val="50000"/>
+                </a:schemeClr>
+              </a:lnRef>
+              <a:fillRef idx="0">
+                <a:schemeClr val="accent1"/>
+              </a:fillRef>
+              <a:effectRef idx="0">
+                <a:schemeClr val="accent1"/>
+              </a:effectRef>
+              <a:fontRef idx="minor">
+                <a:schemeClr val="tx1"/>
+              </a:fontRef>
+            </p:style>
+          </p:cxnSp>
+          <p:cxnSp>
+            <p:nvCxnSpPr>
+              <p:cNvPr id="1748051533" name=""/>
+              <p:cNvCxnSpPr/>
+              <p:nvPr/>
+            </p:nvCxnSpPr>
+            <p:spPr bwMode="auto">
+              <a:xfrm rot="5399997" flipH="0" flipV="0">
+                <a:off x="2370881" y="1993221"/>
+                <a:ext cx="1043364" cy="912529"/>
+              </a:xfrm>
+              <a:prstGeom prst="line">
+                <a:avLst/>
+              </a:prstGeom>
+              <a:ln w="38100" cap="flat" cmpd="sng" algn="ctr">
+                <a:solidFill>
+                  <a:srgbClr val="000000"/>
+                </a:solidFill>
+                <a:prstDash val="solid"/>
+                <a:miter lim="800000"/>
+              </a:ln>
+            </p:spPr>
+            <p:style>
+              <a:lnRef idx="1">
+                <a:schemeClr val="accent1">
+                  <a:shade val="50000"/>
+                </a:schemeClr>
+              </a:lnRef>
+              <a:fillRef idx="0">
+                <a:schemeClr val="accent1"/>
+              </a:fillRef>
+              <a:effectRef idx="0">
+                <a:schemeClr val="accent1"/>
+              </a:effectRef>
+              <a:fontRef idx="minor">
+                <a:schemeClr val="tx1"/>
+              </a:fontRef>
+            </p:style>
+          </p:cxnSp>
+          <p:sp>
+            <p:nvSpPr>
+              <p:cNvPr id="726083617" name=""/>
+              <p:cNvSpPr/>
+              <p:nvPr/>
+            </p:nvSpPr>
+            <p:spPr bwMode="auto">
+              <a:xfrm rot="0" flipH="0" flipV="0">
+                <a:off x="3241530" y="1302406"/>
+                <a:ext cx="732690" cy="732690"/>
+              </a:xfrm>
+              <a:prstGeom prst="ellipse">
+                <a:avLst/>
+              </a:prstGeom>
+              <a:solidFill>
+                <a:srgbClr val="E173FF"/>
+              </a:solidFill>
+              <a:ln w="38100" cap="flat" cmpd="sng" algn="ctr">
+                <a:solidFill>
+                  <a:srgbClr val="000000"/>
+                </a:solidFill>
+                <a:prstDash val="solid"/>
+                <a:miter lim="800000"/>
+              </a:ln>
+            </p:spPr>
+            <p:style>
+              <a:lnRef idx="2">
+                <a:schemeClr val="accent1">
+                  <a:shade val="50000"/>
+                </a:schemeClr>
+              </a:lnRef>
+              <a:fillRef idx="1">
+                <a:schemeClr val="accent1"/>
+              </a:fillRef>
+              <a:effectRef idx="0">
+                <a:schemeClr val="accent1"/>
+              </a:effectRef>
+              <a:fontRef idx="minor">
+                <a:schemeClr val="lt1"/>
+              </a:fontRef>
+            </p:style>
+          </p:sp>
+          <p:cxnSp>
+            <p:nvCxnSpPr>
+              <p:cNvPr id="2134081959" name=""/>
+              <p:cNvCxnSpPr/>
+              <p:nvPr/>
+            </p:nvCxnSpPr>
+            <p:spPr bwMode="auto">
+              <a:xfrm rot="10800000" flipH="0" flipV="0">
+                <a:off x="732690" y="2971170"/>
+                <a:ext cx="970920" cy="0"/>
+              </a:xfrm>
+              <a:prstGeom prst="line">
+                <a:avLst/>
+              </a:prstGeom>
+              <a:ln w="38100" cap="flat" cmpd="sng" algn="ctr">
+                <a:solidFill>
+                  <a:schemeClr val="tx1"/>
+                </a:solidFill>
+                <a:prstDash val="solid"/>
+                <a:miter lim="800000"/>
+              </a:ln>
+            </p:spPr>
+            <p:style>
+              <a:lnRef idx="1">
+                <a:schemeClr val="accent1">
+                  <a:shade val="50000"/>
+                </a:schemeClr>
+              </a:lnRef>
+              <a:fillRef idx="0">
+                <a:schemeClr val="accent1"/>
+              </a:fillRef>
+              <a:effectRef idx="0">
+                <a:schemeClr val="accent1"/>
+              </a:effectRef>
+              <a:fontRef idx="minor">
+                <a:schemeClr val="tx1"/>
+              </a:fontRef>
+            </p:style>
+          </p:cxnSp>
+          <p:cxnSp>
+            <p:nvCxnSpPr>
+              <p:cNvPr id="1582850948" name=""/>
+              <p:cNvCxnSpPr/>
+              <p:nvPr/>
+            </p:nvCxnSpPr>
+            <p:spPr bwMode="auto">
+              <a:xfrm rot="10800000" flipH="0" flipV="1">
+                <a:off x="732690" y="1668753"/>
+                <a:ext cx="970920" cy="0"/>
+              </a:xfrm>
+              <a:prstGeom prst="line">
+                <a:avLst/>
+              </a:prstGeom>
+              <a:ln w="38100" cap="flat" cmpd="sng" algn="ctr">
+                <a:solidFill>
+                  <a:schemeClr val="tx1"/>
+                </a:solidFill>
+                <a:prstDash val="solid"/>
+                <a:miter lim="800000"/>
+              </a:ln>
+            </p:spPr>
+            <p:style>
+              <a:lnRef idx="1">
+                <a:schemeClr val="accent1">
+                  <a:shade val="50000"/>
+                </a:schemeClr>
+              </a:lnRef>
+              <a:fillRef idx="0">
+                <a:schemeClr val="accent1"/>
+              </a:fillRef>
+              <a:effectRef idx="0">
+                <a:schemeClr val="accent1"/>
+              </a:effectRef>
+              <a:fontRef idx="minor">
+                <a:schemeClr val="tx1"/>
+              </a:fontRef>
+            </p:style>
+          </p:cxnSp>
+          <p:cxnSp>
+            <p:nvCxnSpPr>
+              <p:cNvPr id="452502548" name=""/>
+              <p:cNvCxnSpPr/>
+              <p:nvPr/>
+            </p:nvCxnSpPr>
+            <p:spPr bwMode="auto">
+              <a:xfrm rot="10800000" flipH="0" flipV="0">
+                <a:off x="732690" y="366345"/>
+                <a:ext cx="970920" cy="0"/>
+              </a:xfrm>
+              <a:prstGeom prst="line">
+                <a:avLst/>
+              </a:prstGeom>
+              <a:ln w="38100" cap="flat" cmpd="sng" algn="ctr">
+                <a:solidFill>
+                  <a:schemeClr val="tx1"/>
+                </a:solidFill>
+                <a:prstDash val="solid"/>
+                <a:miter lim="800000"/>
+              </a:ln>
+            </p:spPr>
+            <p:style>
+              <a:lnRef idx="1">
+                <a:schemeClr val="accent1">
+                  <a:shade val="50000"/>
+                </a:schemeClr>
+              </a:lnRef>
+              <a:fillRef idx="0">
+                <a:schemeClr val="accent1"/>
+              </a:fillRef>
+              <a:effectRef idx="0">
+                <a:schemeClr val="accent1"/>
+              </a:effectRef>
+              <a:fontRef idx="minor">
+                <a:schemeClr val="tx1"/>
+              </a:fontRef>
+            </p:style>
+          </p:cxnSp>
+          <p:grpSp>
+            <p:nvGrpSpPr>
+              <p:cNvPr id="599803752" name=""/>
+              <p:cNvGrpSpPr/>
+              <p:nvPr/>
+            </p:nvGrpSpPr>
+            <p:grpSpPr bwMode="auto">
+              <a:xfrm>
+                <a:off x="0" y="0"/>
+                <a:ext cx="732690" cy="3337515"/>
+                <a:chOff x="0" y="0"/>
+                <a:chExt cx="732690" cy="3337515"/>
+              </a:xfrm>
+            </p:grpSpPr>
+            <p:sp>
+              <p:nvSpPr>
+                <p:cNvPr id="1540941237" name=""/>
+                <p:cNvSpPr/>
+                <p:nvPr/>
+              </p:nvSpPr>
+              <p:spPr bwMode="auto">
+                <a:xfrm rot="0" flipH="0" flipV="0">
+                  <a:off x="0" y="2604825"/>
+                  <a:ext cx="732690" cy="732690"/>
+                </a:xfrm>
+                <a:prstGeom prst="ellipse">
+                  <a:avLst/>
+                </a:prstGeom>
+                <a:solidFill>
+                  <a:srgbClr val="FF4C4C"/>
+                </a:solidFill>
+                <a:ln w="38100" cap="flat" cmpd="sng" algn="ctr">
+                  <a:solidFill>
+                    <a:srgbClr val="000000"/>
+                  </a:solidFill>
+                  <a:prstDash val="solid"/>
+                  <a:miter lim="800000"/>
+                </a:ln>
+              </p:spPr>
+              <p:style>
+                <a:lnRef idx="2">
+                  <a:schemeClr val="accent1">
+                    <a:shade val="50000"/>
+                  </a:schemeClr>
+                </a:lnRef>
+                <a:fillRef idx="1">
+                  <a:schemeClr val="accent1"/>
+                </a:fillRef>
+                <a:effectRef idx="0">
+                  <a:schemeClr val="accent1"/>
+                </a:effectRef>
+                <a:fontRef idx="minor">
+                  <a:schemeClr val="lt1"/>
+                </a:fontRef>
+              </p:style>
+            </p:sp>
+            <p:sp>
+              <p:nvSpPr>
+                <p:cNvPr id="1614257956" name=""/>
+                <p:cNvSpPr/>
+                <p:nvPr/>
+              </p:nvSpPr>
+              <p:spPr bwMode="auto">
+                <a:xfrm rot="0" flipH="0" flipV="0">
+                  <a:off x="0" y="1302406"/>
+                  <a:ext cx="732690" cy="732690"/>
+                </a:xfrm>
+                <a:prstGeom prst="ellipse">
+                  <a:avLst/>
+                </a:prstGeom>
+                <a:solidFill>
+                  <a:srgbClr val="FF4C4C"/>
+                </a:solidFill>
+                <a:ln w="38100" cap="flat" cmpd="sng" algn="ctr">
+                  <a:solidFill>
+                    <a:srgbClr val="000000"/>
+                  </a:solidFill>
+                  <a:prstDash val="solid"/>
+                  <a:miter lim="800000"/>
+                </a:ln>
+              </p:spPr>
+              <p:style>
+                <a:lnRef idx="2">
+                  <a:schemeClr val="accent1">
+                    <a:shade val="50000"/>
+                  </a:schemeClr>
+                </a:lnRef>
+                <a:fillRef idx="1">
+                  <a:schemeClr val="accent1"/>
+                </a:fillRef>
+                <a:effectRef idx="0">
+                  <a:schemeClr val="accent1"/>
+                </a:effectRef>
+                <a:fontRef idx="minor">
+                  <a:schemeClr val="lt1"/>
+                </a:fontRef>
+              </p:style>
+            </p:sp>
+            <p:sp>
+              <p:nvSpPr>
+                <p:cNvPr id="2085572702" name=""/>
+                <p:cNvSpPr/>
+                <p:nvPr/>
+              </p:nvSpPr>
+              <p:spPr bwMode="auto">
+                <a:xfrm rot="0" flipH="0" flipV="0">
+                  <a:off x="0" y="0"/>
+                  <a:ext cx="732690" cy="732690"/>
+                </a:xfrm>
+                <a:prstGeom prst="ellipse">
+                  <a:avLst/>
+                </a:prstGeom>
+                <a:solidFill>
+                  <a:srgbClr val="FF4C4C"/>
+                </a:solidFill>
+                <a:ln w="38100" cap="flat" cmpd="sng" algn="ctr">
+                  <a:solidFill>
+                    <a:srgbClr val="000000"/>
+                  </a:solidFill>
+                  <a:prstDash val="solid"/>
+                  <a:miter lim="800000"/>
+                </a:ln>
+              </p:spPr>
+              <p:style>
+                <a:lnRef idx="2">
+                  <a:schemeClr val="accent1">
+                    <a:shade val="50000"/>
+                  </a:schemeClr>
+                </a:lnRef>
+                <a:fillRef idx="1">
+                  <a:schemeClr val="accent1"/>
+                </a:fillRef>
+                <a:effectRef idx="0">
+                  <a:schemeClr val="accent1"/>
+                </a:effectRef>
+                <a:fontRef idx="minor">
+                  <a:schemeClr val="lt1"/>
+                </a:fontRef>
+              </p:style>
+            </p:sp>
+          </p:grpSp>
+          <p:grpSp>
+            <p:nvGrpSpPr>
+              <p:cNvPr id="797243715" name=""/>
+              <p:cNvGrpSpPr/>
+              <p:nvPr/>
+            </p:nvGrpSpPr>
+            <p:grpSpPr bwMode="auto">
+              <a:xfrm>
+                <a:off x="1703610" y="0"/>
+                <a:ext cx="732690" cy="3337515"/>
+                <a:chOff x="0" y="0"/>
+                <a:chExt cx="732690" cy="3337515"/>
+              </a:xfrm>
+            </p:grpSpPr>
+            <p:sp>
+              <p:nvSpPr>
+                <p:cNvPr id="1253004193" name=""/>
+                <p:cNvSpPr/>
+                <p:nvPr/>
+              </p:nvSpPr>
+              <p:spPr bwMode="auto">
+                <a:xfrm rot="0" flipH="0" flipV="0">
+                  <a:off x="0" y="2604825"/>
+                  <a:ext cx="732690" cy="732690"/>
+                </a:xfrm>
+                <a:prstGeom prst="ellipse">
+                  <a:avLst/>
+                </a:prstGeom>
+                <a:solidFill>
+                  <a:srgbClr val="FFC926"/>
+                </a:solidFill>
+                <a:ln w="38100" cap="flat" cmpd="sng" algn="ctr">
+                  <a:solidFill>
+                    <a:schemeClr val="tx1"/>
+                  </a:solidFill>
+                  <a:prstDash val="sysDash"/>
+                  <a:miter lim="800000"/>
+                </a:ln>
+              </p:spPr>
+              <p:style>
+                <a:lnRef idx="2">
+                  <a:schemeClr val="accent1">
+                    <a:shade val="50000"/>
+                  </a:schemeClr>
+                </a:lnRef>
+                <a:fillRef idx="1">
+                  <a:schemeClr val="accent1"/>
+                </a:fillRef>
+                <a:effectRef idx="0">
+                  <a:schemeClr val="accent1"/>
+                </a:effectRef>
+                <a:fontRef idx="minor">
+                  <a:schemeClr val="lt1"/>
+                </a:fontRef>
+              </p:style>
+            </p:sp>
+            <p:sp>
+              <p:nvSpPr>
+                <p:cNvPr id="465040461" name=""/>
+                <p:cNvSpPr/>
+                <p:nvPr/>
+              </p:nvSpPr>
+              <p:spPr bwMode="auto">
+                <a:xfrm rot="0" flipH="0" flipV="0">
+                  <a:off x="0" y="1302406"/>
+                  <a:ext cx="732690" cy="732690"/>
+                </a:xfrm>
+                <a:prstGeom prst="ellipse">
+                  <a:avLst/>
+                </a:prstGeom>
+                <a:solidFill>
+                  <a:srgbClr val="FFC926"/>
+                </a:solidFill>
+                <a:ln w="38100" cap="flat" cmpd="sng" algn="ctr">
+                  <a:solidFill>
+                    <a:schemeClr val="tx1"/>
+                  </a:solidFill>
+                  <a:prstDash val="sysDash"/>
+                  <a:miter lim="800000"/>
+                </a:ln>
+              </p:spPr>
+              <p:style>
+                <a:lnRef idx="2">
+                  <a:schemeClr val="accent1">
+                    <a:shade val="50000"/>
+                  </a:schemeClr>
+                </a:lnRef>
+                <a:fillRef idx="1">
+                  <a:schemeClr val="accent1"/>
+                </a:fillRef>
+                <a:effectRef idx="0">
+                  <a:schemeClr val="accent1"/>
+                </a:effectRef>
+                <a:fontRef idx="minor">
+                  <a:schemeClr val="lt1"/>
+                </a:fontRef>
+              </p:style>
+            </p:sp>
+            <p:sp>
+              <p:nvSpPr>
+                <p:cNvPr id="1726292688" name=""/>
+                <p:cNvSpPr/>
+                <p:nvPr/>
+              </p:nvSpPr>
+              <p:spPr bwMode="auto">
+                <a:xfrm rot="0" flipH="0" flipV="0">
+                  <a:off x="0" y="0"/>
+                  <a:ext cx="732690" cy="732690"/>
+                </a:xfrm>
+                <a:prstGeom prst="ellipse">
+                  <a:avLst/>
+                </a:prstGeom>
+                <a:solidFill>
+                  <a:srgbClr val="FFC926"/>
+                </a:solidFill>
+                <a:ln w="38100" cap="flat" cmpd="sng" algn="ctr">
+                  <a:solidFill>
+                    <a:schemeClr val="tx1"/>
+                  </a:solidFill>
+                  <a:prstDash val="sysDash"/>
+                  <a:miter lim="800000"/>
+                </a:ln>
+              </p:spPr>
+              <p:style>
+                <a:lnRef idx="2">
+                  <a:schemeClr val="accent1">
+                    <a:shade val="50000"/>
+                  </a:schemeClr>
+                </a:lnRef>
+                <a:fillRef idx="1">
+                  <a:schemeClr val="accent1"/>
+                </a:fillRef>
+                <a:effectRef idx="0">
+                  <a:schemeClr val="accent1"/>
+                </a:effectRef>
+                <a:fontRef idx="minor">
+                  <a:schemeClr val="lt1"/>
+                </a:fontRef>
+              </p:style>
+            </p:sp>
+          </p:grpSp>
+        </p:grpSp>
+        <p:sp>
+          <p:nvSpPr>
+            <p:cNvPr id="567028311" name=""/>
+            <p:cNvSpPr txBox="1"/>
+            <p:nvPr/>
+          </p:nvSpPr>
+          <p:spPr bwMode="auto">
+            <a:xfrm rot="5400000" flipH="0" flipV="0">
+              <a:off x="7479376" y="3388455"/>
+              <a:ext cx="667965" cy="640440"/>
+            </a:xfrm>
+            <a:prstGeom prst="rect">
+              <a:avLst/>
+            </a:prstGeom>
+            <a:noFill/>
+          </p:spPr>
+          <p:txBody>
+            <a:bodyPr vertOverflow="overflow" horzOverflow="overflow" vert="horz" wrap="square" lIns="91440" tIns="45720" rIns="91440" bIns="45720" numCol="1" spcCol="0" rtlCol="0" fromWordArt="0" anchor="t" anchorCtr="0" forceAA="0" upright="0" compatLnSpc="0">
+              <a:spAutoFit/>
+            </a:bodyPr>
+            <a:p>
+              <a:pPr>
+                <a:defRPr/>
+              </a:pPr>
+              <a:r>
+                <a:rPr lang="fr-FR" sz="3600" b="1" i="0" u="none" strike="noStrike" cap="none" spc="0">
+                  <a:solidFill>
+                    <a:schemeClr val="tx1"/>
+                  </a:solidFill>
+                  <a:latin typeface="Arial"/>
+                  <a:ea typeface="Arial"/>
+                  <a:cs typeface="Arial"/>
+                </a:rPr>
+                <a:t>…</a:t>
+              </a:r>
+              <a:endParaRPr sz="3600" b="1"/>
+            </a:p>
+          </p:txBody>
+        </p:sp>
+        <p:sp>
+          <p:nvSpPr>
+            <p:cNvPr id="1783442873" name=""/>
+            <p:cNvSpPr txBox="1"/>
+            <p:nvPr/>
+          </p:nvSpPr>
+          <p:spPr bwMode="auto">
+            <a:xfrm rot="5400000" flipH="0" flipV="0">
+              <a:off x="13824846" y="3388455"/>
+              <a:ext cx="668323" cy="640440"/>
+            </a:xfrm>
+            <a:prstGeom prst="rect">
+              <a:avLst/>
+            </a:prstGeom>
+            <a:noFill/>
+          </p:spPr>
+          <p:txBody>
+            <a:bodyPr vertOverflow="overflow" horzOverflow="overflow" vert="horz" wrap="square" lIns="91440" tIns="45720" rIns="91440" bIns="45720" numCol="1" spcCol="0" rtlCol="0" fromWordArt="0" anchor="t" anchorCtr="0" forceAA="0" upright="0" compatLnSpc="0">
+              <a:spAutoFit/>
+            </a:bodyPr>
+            <a:p>
+              <a:pPr>
+                <a:defRPr/>
+              </a:pPr>
+              <a:r>
+                <a:rPr lang="fr-FR" sz="3600" b="1" i="0" u="none" strike="noStrike" cap="none" spc="0">
+                  <a:solidFill>
+                    <a:schemeClr val="tx1"/>
+                  </a:solidFill>
+                  <a:latin typeface="Arial"/>
+                  <a:ea typeface="Arial"/>
+                  <a:cs typeface="Arial"/>
+                </a:rPr>
+                <a:t>…</a:t>
+              </a:r>
+              <a:endParaRPr sz="3600" b="1"/>
+            </a:p>
+          </p:txBody>
+        </p:sp>
+        <p:sp>
+          <p:nvSpPr>
+            <p:cNvPr id="281951974" name=""/>
+            <p:cNvSpPr txBox="1"/>
+            <p:nvPr/>
+          </p:nvSpPr>
+          <p:spPr bwMode="auto">
+            <a:xfrm rot="0" flipH="0" flipV="0">
+              <a:off x="8436948" y="5072493"/>
+              <a:ext cx="4671456" cy="640440"/>
+            </a:xfrm>
+            <a:prstGeom prst="rect">
+              <a:avLst/>
+            </a:prstGeom>
+            <a:noFill/>
+          </p:spPr>
+          <p:txBody>
+            <a:bodyPr vertOverflow="overflow" horzOverflow="overflow" vert="horz" wrap="square" lIns="91440" tIns="45720" rIns="91440" bIns="45720" numCol="1" spcCol="0" rtlCol="0" fromWordArt="0" anchor="t" anchorCtr="0" forceAA="0" upright="0" compatLnSpc="0">
+              <a:spAutoFit/>
+            </a:bodyPr>
+            <a:p>
+              <a:pPr algn="ctr">
+                <a:defRPr/>
+              </a:pPr>
+              <a:r>
+                <a:rPr lang="fr-FR" sz="3600" b="1">
+                  <a:latin typeface="CMU Serif"/>
+                  <a:ea typeface="CMU Serif"/>
+                  <a:cs typeface="CMU Serif"/>
+                </a:rPr>
+                <a:t>(b)</a:t>
+              </a:r>
+              <a:endParaRPr sz="3600" b="1" i="0">
+                <a:latin typeface="CMU Serif"/>
+                <a:cs typeface="CMU Serif"/>
+              </a:endParaRPr>
+            </a:p>
+          </p:txBody>
+        </p:sp>
+        <p:sp>
+          <p:nvSpPr>
+            <p:cNvPr id="640037127" name=""/>
+            <p:cNvSpPr txBox="1"/>
+            <p:nvPr/>
+          </p:nvSpPr>
+          <p:spPr bwMode="auto">
+            <a:xfrm rot="0" flipH="0" flipV="0">
+              <a:off x="366663" y="5072493"/>
+              <a:ext cx="4616155" cy="640440"/>
+            </a:xfrm>
+            <a:prstGeom prst="rect">
+              <a:avLst/>
+            </a:prstGeom>
+            <a:noFill/>
+          </p:spPr>
+          <p:txBody>
+            <a:bodyPr vertOverflow="overflow" horzOverflow="overflow" vert="horz" wrap="square" lIns="91440" tIns="45720" rIns="91440" bIns="45720" numCol="1" spcCol="0" rtlCol="0" fromWordArt="0" anchor="t" anchorCtr="0" forceAA="0" upright="0" compatLnSpc="0">
+              <a:spAutoFit/>
+            </a:bodyPr>
+            <a:p>
+              <a:pPr algn="ctr">
+                <a:defRPr/>
+              </a:pPr>
+              <a:r>
+                <a:rPr lang="fr-FR" sz="3600" b="1">
+                  <a:latin typeface="CMU Serif"/>
+                  <a:ea typeface="CMU Serif"/>
+                  <a:cs typeface="CMU Serif"/>
+                </a:rPr>
+                <a:t>(a)</a:t>
+              </a:r>
+              <a:endParaRPr sz="2600" b="1" i="0">
+                <a:latin typeface="CMU Serif"/>
+                <a:cs typeface="CMU Serif"/>
+              </a:endParaRPr>
+            </a:p>
+          </p:txBody>
+        </p:sp>
+        <p:sp>
+          <p:nvSpPr>
+            <p:cNvPr id="613859544" name=""/>
+            <p:cNvSpPr/>
+            <p:nvPr/>
+          </p:nvSpPr>
+          <p:spPr bwMode="auto">
+            <a:xfrm rot="0" flipH="0" flipV="0">
+              <a:off x="9612193" y="2508062"/>
+              <a:ext cx="2332140" cy="959653"/>
+            </a:xfrm>
+            <a:prstGeom prst="flowChartAlternateProcess">
+              <a:avLst/>
+            </a:prstGeom>
+            <a:noFill/>
+            <a:ln w="57150" cap="flat" cmpd="sng" algn="ctr">
+              <a:solidFill>
+                <a:schemeClr val="tx1"/>
+              </a:solidFill>
+              <a:prstDash val="dash"/>
+              <a:miter lim="800000"/>
+            </a:ln>
+          </p:spPr>
+          <p:style>
+            <a:lnRef idx="2">
+              <a:schemeClr val="accent1">
+                <a:shade val="50000"/>
+              </a:schemeClr>
+            </a:lnRef>
+            <a:fillRef idx="1">
+              <a:schemeClr val="accent1"/>
+            </a:fillRef>
+            <a:effectRef idx="0">
+              <a:schemeClr val="accent1"/>
+            </a:effectRef>
+            <a:fontRef idx="minor">
+              <a:schemeClr val="lt1"/>
+            </a:fontRef>
+          </p:style>
+          <p:txBody>
+            <a:bodyPr anchor="ctr"/>
+            <a:p>
+              <a:pPr algn="ctr">
+                <a:defRPr/>
+              </a:pPr>
+              <a:endParaRPr/>
+            </a:p>
+          </p:txBody>
+        </p:sp>
+        <p:sp>
+          <p:nvSpPr>
+            <p:cNvPr id="1029952904" name=""/>
+            <p:cNvSpPr txBox="1"/>
+            <p:nvPr/>
+          </p:nvSpPr>
+          <p:spPr bwMode="auto">
+            <a:xfrm rot="0" flipH="0" flipV="0">
+              <a:off x="9813211" y="3554797"/>
+              <a:ext cx="1983682" cy="488039"/>
+            </a:xfrm>
+            <a:prstGeom prst="rect">
+              <a:avLst/>
+            </a:prstGeom>
+            <a:noFill/>
+          </p:spPr>
+          <p:txBody>
+            <a:bodyPr vertOverflow="overflow" horzOverflow="overflow" vert="horz" wrap="square" lIns="91440" tIns="45720" rIns="91440" bIns="45720" numCol="1" spcCol="0" rtlCol="0" fromWordArt="0" anchor="t" anchorCtr="0" forceAA="0" upright="0" compatLnSpc="0">
+              <a:spAutoFit/>
+            </a:bodyPr>
+            <a:p>
+              <a:pPr algn="ctr">
+                <a:defRPr/>
+              </a:pPr>
+              <a:r>
+                <a:rPr lang="fr-FR" sz="2600" b="1">
+                  <a:latin typeface="CMU Serif"/>
+                  <a:ea typeface="CMU Serif"/>
+                  <a:cs typeface="CMU Serif"/>
+                </a:rPr>
+                <a:t>BSM</a:t>
+              </a:r>
+              <a:endParaRPr sz="2600" b="1">
+                <a:latin typeface="CMU Serif"/>
+                <a:cs typeface="CMU Serif"/>
+              </a:endParaRPr>
+            </a:p>
+          </p:txBody>
+        </p:sp>
+        <p:sp>
+          <p:nvSpPr>
+            <p:cNvPr id="402842430" name=""/>
+            <p:cNvSpPr txBox="1"/>
+            <p:nvPr/>
+          </p:nvSpPr>
+          <p:spPr bwMode="auto">
+            <a:xfrm rot="0" flipH="0" flipV="0">
+              <a:off x="15179472" y="675670"/>
+              <a:ext cx="380999" cy="366119"/>
+            </a:xfrm>
+            <a:prstGeom prst="rect">
+              <a:avLst/>
+            </a:prstGeom>
+            <a:noFill/>
+          </p:spPr>
+          <p:txBody>
+            <a:bodyPr vertOverflow="overflow" horzOverflow="overflow" vert="horz" wrap="square" lIns="91440" tIns="45720" rIns="91440" bIns="45720" numCol="1" spcCol="0" rtlCol="0" fromWordArt="0" anchor="t" anchorCtr="0" forceAA="0" upright="0" compatLnSpc="0">
+              <a:spAutoFit/>
+            </a:bodyPr>
+            <a:p>
+              <a:pPr>
+                <a:defRPr/>
+              </a:pPr>
+              <a:endParaRPr/>
             </a:p>
           </p:txBody>
         </p:sp>
@@ -12206,7 +11931,7 @@
       </p:grpSpPr>
       <p:sp>
         <p:nvSpPr>
-          <p:cNvPr id="989534896" name=""/>
+          <p:cNvPr id="916119384" name=""/>
           <p:cNvSpPr txBox="1"/>
           <p:nvPr/>
         </p:nvSpPr>
@@ -12238,7 +11963,7 @@
       </p:sp>
       <p:grpSp>
         <p:nvGrpSpPr>
-          <p:cNvPr id="343655057" name=""/>
+          <p:cNvPr id="827139211" name=""/>
           <p:cNvGrpSpPr/>
           <p:nvPr/>
         </p:nvGrpSpPr>
@@ -22317,7 +22042,7 @@
       </p:grpSpPr>
       <p:sp>
         <p:nvSpPr>
-          <p:cNvPr id="2056937624" name=""/>
+          <p:cNvPr id="593047690" name=""/>
           <p:cNvSpPr txBox="1"/>
           <p:nvPr/>
         </p:nvSpPr>
@@ -22357,7 +22082,7 @@
       </p:sp>
       <p:grpSp>
         <p:nvGrpSpPr>
-          <p:cNvPr id="1728154237" name=""/>
+          <p:cNvPr id="149037374" name=""/>
           <p:cNvGrpSpPr/>
           <p:nvPr/>
         </p:nvGrpSpPr>
@@ -24812,7 +24537,7 @@
       </p:grpSpPr>
       <p:grpSp>
         <p:nvGrpSpPr>
-          <p:cNvPr id="2127903883" name=""/>
+          <p:cNvPr id="43190845" name=""/>
           <p:cNvGrpSpPr/>
           <p:nvPr/>
         </p:nvGrpSpPr>
@@ -25727,7 +25452,7 @@
       </p:grpSp>
       <p:grpSp>
         <p:nvGrpSpPr>
-          <p:cNvPr id="869402359" name=""/>
+          <p:cNvPr id="797875652" name=""/>
           <p:cNvGrpSpPr/>
           <p:nvPr/>
         </p:nvGrpSpPr>
